--- a/dm_presentation.pptx
+++ b/dm_presentation.pptx
@@ -5,20 +5,21 @@
     <p:sldMasterId id="2147483672" r:id="rId1"/>
   </p:sldMasterIdLst>
   <p:notesMasterIdLst>
-    <p:notesMasterId r:id="rId13"/>
+    <p:notesMasterId r:id="rId14"/>
   </p:notesMasterIdLst>
   <p:sldIdLst>
     <p:sldId id="256" r:id="rId2"/>
     <p:sldId id="257" r:id="rId3"/>
-    <p:sldId id="266" r:id="rId4"/>
-    <p:sldId id="258" r:id="rId5"/>
-    <p:sldId id="261" r:id="rId6"/>
-    <p:sldId id="267" r:id="rId7"/>
-    <p:sldId id="262" r:id="rId8"/>
-    <p:sldId id="263" r:id="rId9"/>
-    <p:sldId id="264" r:id="rId10"/>
-    <p:sldId id="259" r:id="rId11"/>
-    <p:sldId id="265" r:id="rId12"/>
+    <p:sldId id="268" r:id="rId4"/>
+    <p:sldId id="266" r:id="rId5"/>
+    <p:sldId id="258" r:id="rId6"/>
+    <p:sldId id="261" r:id="rId7"/>
+    <p:sldId id="267" r:id="rId8"/>
+    <p:sldId id="262" r:id="rId9"/>
+    <p:sldId id="263" r:id="rId10"/>
+    <p:sldId id="264" r:id="rId11"/>
+    <p:sldId id="259" r:id="rId12"/>
+    <p:sldId id="265" r:id="rId13"/>
   </p:sldIdLst>
   <p:sldSz cx="12192000" cy="6858000"/>
   <p:notesSz cx="6858000" cy="9144000"/>
@@ -117,13 +118,18 @@
       </a:defRPr>
     </a:lvl9pPr>
   </p:defaultTextStyle>
+  <p:extLst>
+    <p:ext uri="{EFAFB233-063F-42B5-8137-9DF3F51BA10A}">
+      <p15:sldGuideLst xmlns:p15="http://schemas.microsoft.com/office/powerpoint/2012/main"/>
+    </p:ext>
+  </p:extLst>
 </p:presentation>
 </file>
 
 <file path=ppt/revisionInfo.xml><?xml version="1.0" encoding="utf-8"?>
 <p1510:revInfo xmlns:a="http://schemas.openxmlformats.org/drawingml/2006/main" xmlns:r="http://schemas.openxmlformats.org/officeDocument/2006/relationships" xmlns:p1510="http://schemas.microsoft.com/office/powerpoint/2015/10/main">
   <p1510:revLst>
-    <p1510:client id="{3BA904CF-6BC9-C143-B607-88BD5D704F2D}" v="71" dt="2026-04-08T22:49:36.702"/>
+    <p1510:client id="{3BA904CF-6BC9-C143-B607-88BD5D704F2D}" v="72" dt="2026-04-10T07:39:15.083"/>
   </p1510:revLst>
 </p1510:revInfo>
 </file>
@@ -133,7 +139,7 @@
   <pc:docChgLst>
     <pc:chgData name="Anna Sommani" userId="dfc5161e61809c7d" providerId="LiveId" clId="{3BA904CF-6BC9-C143-B607-88BD5D704F2D}"/>
     <pc:docChg chg="undo redo custSel addSld delSld modSld sldOrd modMainMaster">
-      <pc:chgData name="Anna Sommani" userId="dfc5161e61809c7d" providerId="LiveId" clId="{3BA904CF-6BC9-C143-B607-88BD5D704F2D}" dt="2026-04-08T23:01:43.050" v="3794"/>
+      <pc:chgData name="Anna Sommani" userId="dfc5161e61809c7d" providerId="LiveId" clId="{3BA904CF-6BC9-C143-B607-88BD5D704F2D}" dt="2026-04-10T08:51:25.039" v="3962" actId="478"/>
       <pc:docMkLst>
         <pc:docMk/>
       </pc:docMkLst>
@@ -309,8 +315,8 @@
           </ac:cxnSpMkLst>
         </pc:cxnChg>
       </pc:sldChg>
-      <pc:sldChg chg="modSp new mod">
-        <pc:chgData name="Anna Sommani" userId="dfc5161e61809c7d" providerId="LiveId" clId="{3BA904CF-6BC9-C143-B607-88BD5D704F2D}" dt="2026-04-08T19:31:21.755" v="2795" actId="5793"/>
+      <pc:sldChg chg="addSp delSp modSp new mod">
+        <pc:chgData name="Anna Sommani" userId="dfc5161e61809c7d" providerId="LiveId" clId="{3BA904CF-6BC9-C143-B607-88BD5D704F2D}" dt="2026-04-10T07:39:15.082" v="3800"/>
         <pc:sldMkLst>
           <pc:docMk/>
           <pc:sldMk cId="2038201188" sldId="259"/>
@@ -323,14 +329,30 @@
             <ac:spMk id="2" creationId="{713E309C-F839-3142-B97F-8CFA05E0E1CA}"/>
           </ac:spMkLst>
         </pc:spChg>
-        <pc:spChg chg="mod">
-          <ac:chgData name="Anna Sommani" userId="dfc5161e61809c7d" providerId="LiveId" clId="{3BA904CF-6BC9-C143-B607-88BD5D704F2D}" dt="2026-04-08T19:31:21.755" v="2795" actId="5793"/>
+        <pc:spChg chg="del mod">
+          <ac:chgData name="Anna Sommani" userId="dfc5161e61809c7d" providerId="LiveId" clId="{3BA904CF-6BC9-C143-B607-88BD5D704F2D}" dt="2026-04-10T07:39:07.203" v="3799" actId="3680"/>
           <ac:spMkLst>
             <pc:docMk/>
             <pc:sldMk cId="2038201188" sldId="259"/>
             <ac:spMk id="3" creationId="{06FB9977-0661-6A1C-126E-693F7CA66599}"/>
           </ac:spMkLst>
         </pc:spChg>
+        <pc:graphicFrameChg chg="add mod ord modGraphic">
+          <ac:chgData name="Anna Sommani" userId="dfc5161e61809c7d" providerId="LiveId" clId="{3BA904CF-6BC9-C143-B607-88BD5D704F2D}" dt="2026-04-10T07:39:07.203" v="3799" actId="3680"/>
+          <ac:graphicFrameMkLst>
+            <pc:docMk/>
+            <pc:sldMk cId="2038201188" sldId="259"/>
+            <ac:graphicFrameMk id="5" creationId="{5E223CD5-082F-F77A-F820-90A5024F2834}"/>
+          </ac:graphicFrameMkLst>
+        </pc:graphicFrameChg>
+        <pc:graphicFrameChg chg="add mod">
+          <ac:chgData name="Anna Sommani" userId="dfc5161e61809c7d" providerId="LiveId" clId="{3BA904CF-6BC9-C143-B607-88BD5D704F2D}" dt="2026-04-10T07:39:15.082" v="3800"/>
+          <ac:graphicFrameMkLst>
+            <pc:docMk/>
+            <pc:sldMk cId="2038201188" sldId="259"/>
+            <ac:graphicFrameMk id="6" creationId="{F9BD40EB-E024-92E2-B861-04DB22F19EC0}"/>
+          </ac:graphicFrameMkLst>
+        </pc:graphicFrameChg>
       </pc:sldChg>
       <pc:sldChg chg="addSp delSp modSp new del mod ord">
         <pc:chgData name="Anna Sommani" userId="dfc5161e61809c7d" providerId="LiveId" clId="{3BA904CF-6BC9-C143-B607-88BD5D704F2D}" dt="2026-04-08T12:33:50.121" v="1788" actId="2696"/>
@@ -950,14 +972,22 @@
           </ac:spMkLst>
         </pc:spChg>
       </pc:sldChg>
-      <pc:sldChg chg="modSp new mod">
-        <pc:chgData name="Anna Sommani" userId="dfc5161e61809c7d" providerId="LiveId" clId="{3BA904CF-6BC9-C143-B607-88BD5D704F2D}" dt="2026-04-08T22:34:20.488" v="3765" actId="20577"/>
+      <pc:sldChg chg="delSp modSp new mod">
+        <pc:chgData name="Anna Sommani" userId="dfc5161e61809c7d" providerId="LiveId" clId="{3BA904CF-6BC9-C143-B607-88BD5D704F2D}" dt="2026-04-10T08:51:25.039" v="3962" actId="478"/>
         <pc:sldMkLst>
           <pc:docMk/>
           <pc:sldMk cId="3615651213" sldId="266"/>
         </pc:sldMkLst>
+        <pc:spChg chg="del">
+          <ac:chgData name="Anna Sommani" userId="dfc5161e61809c7d" providerId="LiveId" clId="{3BA904CF-6BC9-C143-B607-88BD5D704F2D}" dt="2026-04-10T08:51:25.039" v="3962" actId="478"/>
+          <ac:spMkLst>
+            <pc:docMk/>
+            <pc:sldMk cId="3615651213" sldId="266"/>
+            <ac:spMk id="2" creationId="{0664A6FE-CB32-15B3-8DC3-C410C18B81A9}"/>
+          </ac:spMkLst>
+        </pc:spChg>
         <pc:spChg chg="mod">
-          <ac:chgData name="Anna Sommani" userId="dfc5161e61809c7d" providerId="LiveId" clId="{3BA904CF-6BC9-C143-B607-88BD5D704F2D}" dt="2026-04-08T22:34:20.488" v="3765" actId="20577"/>
+          <ac:chgData name="Anna Sommani" userId="dfc5161e61809c7d" providerId="LiveId" clId="{3BA904CF-6BC9-C143-B607-88BD5D704F2D}" dt="2026-04-10T08:51:22.341" v="3961" actId="27636"/>
           <ac:spMkLst>
             <pc:docMk/>
             <pc:sldMk cId="3615651213" sldId="266"/>
@@ -1017,6 +1047,21 @@
             <pc:docMk/>
             <pc:sldMk cId="3145914003" sldId="267"/>
             <ac:spMk id="9" creationId="{32022861-B207-633D-5074-0CCF01CCB06A}"/>
+          </ac:spMkLst>
+        </pc:spChg>
+      </pc:sldChg>
+      <pc:sldChg chg="modSp new mod">
+        <pc:chgData name="Anna Sommani" userId="dfc5161e61809c7d" providerId="LiveId" clId="{3BA904CF-6BC9-C143-B607-88BD5D704F2D}" dt="2026-04-10T06:55:25.748" v="3798"/>
+        <pc:sldMkLst>
+          <pc:docMk/>
+          <pc:sldMk cId="3121836545" sldId="268"/>
+        </pc:sldMkLst>
+        <pc:spChg chg="mod">
+          <ac:chgData name="Anna Sommani" userId="dfc5161e61809c7d" providerId="LiveId" clId="{3BA904CF-6BC9-C143-B607-88BD5D704F2D}" dt="2026-04-10T06:55:25.748" v="3798"/>
+          <ac:spMkLst>
+            <pc:docMk/>
+            <pc:sldMk cId="3121836545" sldId="268"/>
+            <ac:spMk id="3" creationId="{C8010576-0B9B-BE2C-A22D-6C6279CD914A}"/>
           </ac:spMkLst>
         </pc:spChg>
       </pc:sldChg>
@@ -1131,7 +1176,7 @@
           <a:p>
             <a:fld id="{FFD5BADF-E446-AD4A-9AF2-02CC56F79E6A}" type="datetimeFigureOut">
               <a:rPr lang="de-DE" smtClean="0"/>
-              <a:t>07.04.26</a:t>
+              <a:t>09.04.26</a:t>
             </a:fld>
             <a:endParaRPr lang="de-DE"/>
           </a:p>
@@ -1548,7 +1593,7 @@
           <a:p>
             <a:fld id="{FEB81764-BE06-7641-940B-B245D941F4EC}" type="slidenum">
               <a:rPr lang="de-DE" smtClean="0"/>
-              <a:t>3</a:t>
+              <a:t>4</a:t>
             </a:fld>
             <a:endParaRPr lang="de-DE"/>
           </a:p>
@@ -1718,7 +1763,7 @@
           <a:p>
             <a:fld id="{FEB81764-BE06-7641-940B-B245D941F4EC}" type="slidenum">
               <a:rPr lang="de-DE" smtClean="0"/>
-              <a:t>4</a:t>
+              <a:t>5</a:t>
             </a:fld>
             <a:endParaRPr lang="de-DE"/>
           </a:p>
@@ -1802,7 +1847,7 @@
           <a:p>
             <a:fld id="{FEB81764-BE06-7641-940B-B245D941F4EC}" type="slidenum">
               <a:rPr lang="de-DE" smtClean="0"/>
-              <a:t>6</a:t>
+              <a:t>7</a:t>
             </a:fld>
             <a:endParaRPr lang="de-DE"/>
           </a:p>
@@ -1886,7 +1931,7 @@
           <a:p>
             <a:fld id="{FEB81764-BE06-7641-940B-B245D941F4EC}" type="slidenum">
               <a:rPr lang="de-DE" smtClean="0"/>
-              <a:t>7</a:t>
+              <a:t>8</a:t>
             </a:fld>
             <a:endParaRPr lang="de-DE"/>
           </a:p>
@@ -2036,7 +2081,7 @@
           <a:p>
             <a:fld id="{FEB81764-BE06-7641-940B-B245D941F4EC}" type="slidenum">
               <a:rPr lang="de-DE" smtClean="0"/>
-              <a:t>8</a:t>
+              <a:t>9</a:t>
             </a:fld>
             <a:endParaRPr lang="de-DE"/>
           </a:p>
@@ -2120,7 +2165,7 @@
           <a:p>
             <a:fld id="{FEB81764-BE06-7641-940B-B245D941F4EC}" type="slidenum">
               <a:rPr lang="de-DE" smtClean="0"/>
-              <a:t>9</a:t>
+              <a:t>10</a:t>
             </a:fld>
             <a:endParaRPr lang="de-DE"/>
           </a:p>
@@ -2204,7 +2249,7 @@
           <a:p>
             <a:fld id="{FEB81764-BE06-7641-940B-B245D941F4EC}" type="slidenum">
               <a:rPr lang="de-DE" smtClean="0"/>
-              <a:t>10</a:t>
+              <a:t>11</a:t>
             </a:fld>
             <a:endParaRPr lang="de-DE"/>
           </a:p>
@@ -2370,7 +2415,7 @@
           <a:p>
             <a:fld id="{6038C434-50CF-AB47-889F-0C4A6E2EAAB8}" type="datetimeFigureOut">
               <a:rPr lang="en-US" smtClean="0"/>
-              <a:t>4/7/26</a:t>
+              <a:t>4/9/26</a:t>
             </a:fld>
             <a:endParaRPr lang="en-US"/>
           </a:p>
@@ -2568,7 +2613,7 @@
           <a:p>
             <a:fld id="{6038C434-50CF-AB47-889F-0C4A6E2EAAB8}" type="datetimeFigureOut">
               <a:rPr lang="en-US" smtClean="0"/>
-              <a:t>4/7/26</a:t>
+              <a:t>4/9/26</a:t>
             </a:fld>
             <a:endParaRPr lang="en-US"/>
           </a:p>
@@ -2776,7 +2821,7 @@
           <a:p>
             <a:fld id="{6038C434-50CF-AB47-889F-0C4A6E2EAAB8}" type="datetimeFigureOut">
               <a:rPr lang="en-US" smtClean="0"/>
-              <a:t>4/7/26</a:t>
+              <a:t>4/9/26</a:t>
             </a:fld>
             <a:endParaRPr lang="en-US"/>
           </a:p>
@@ -2974,7 +3019,7 @@
           <a:p>
             <a:fld id="{6038C434-50CF-AB47-889F-0C4A6E2EAAB8}" type="datetimeFigureOut">
               <a:rPr lang="en-US" smtClean="0"/>
-              <a:t>4/7/26</a:t>
+              <a:t>4/9/26</a:t>
             </a:fld>
             <a:endParaRPr lang="en-US"/>
           </a:p>
@@ -3249,7 +3294,7 @@
           <a:p>
             <a:fld id="{6038C434-50CF-AB47-889F-0C4A6E2EAAB8}" type="datetimeFigureOut">
               <a:rPr lang="en-US" smtClean="0"/>
-              <a:t>4/7/26</a:t>
+              <a:t>4/9/26</a:t>
             </a:fld>
             <a:endParaRPr lang="en-US"/>
           </a:p>
@@ -3514,7 +3559,7 @@
           <a:p>
             <a:fld id="{6038C434-50CF-AB47-889F-0C4A6E2EAAB8}" type="datetimeFigureOut">
               <a:rPr lang="en-US" smtClean="0"/>
-              <a:t>4/7/26</a:t>
+              <a:t>4/9/26</a:t>
             </a:fld>
             <a:endParaRPr lang="en-US"/>
           </a:p>
@@ -3926,7 +3971,7 @@
           <a:p>
             <a:fld id="{6038C434-50CF-AB47-889F-0C4A6E2EAAB8}" type="datetimeFigureOut">
               <a:rPr lang="en-US" smtClean="0"/>
-              <a:t>4/7/26</a:t>
+              <a:t>4/9/26</a:t>
             </a:fld>
             <a:endParaRPr lang="en-US"/>
           </a:p>
@@ -4067,7 +4112,7 @@
           <a:p>
             <a:fld id="{6038C434-50CF-AB47-889F-0C4A6E2EAAB8}" type="datetimeFigureOut">
               <a:rPr lang="en-US" smtClean="0"/>
-              <a:t>4/7/26</a:t>
+              <a:t>4/9/26</a:t>
             </a:fld>
             <a:endParaRPr lang="en-US"/>
           </a:p>
@@ -4180,7 +4225,7 @@
           <a:p>
             <a:fld id="{6038C434-50CF-AB47-889F-0C4A6E2EAAB8}" type="datetimeFigureOut">
               <a:rPr lang="en-US" smtClean="0"/>
-              <a:t>4/7/26</a:t>
+              <a:t>4/9/26</a:t>
             </a:fld>
             <a:endParaRPr lang="en-US"/>
           </a:p>
@@ -4491,7 +4536,7 @@
           <a:p>
             <a:fld id="{6038C434-50CF-AB47-889F-0C4A6E2EAAB8}" type="datetimeFigureOut">
               <a:rPr lang="en-US" smtClean="0"/>
-              <a:t>4/7/26</a:t>
+              <a:t>4/9/26</a:t>
             </a:fld>
             <a:endParaRPr lang="en-US"/>
           </a:p>
@@ -4779,7 +4824,7 @@
           <a:p>
             <a:fld id="{6038C434-50CF-AB47-889F-0C4A6E2EAAB8}" type="datetimeFigureOut">
               <a:rPr lang="en-US" smtClean="0"/>
-              <a:t>4/7/26</a:t>
+              <a:t>4/9/26</a:t>
             </a:fld>
             <a:endParaRPr lang="en-US"/>
           </a:p>
@@ -5020,7 +5065,7 @@
           <a:p>
             <a:fld id="{6038C434-50CF-AB47-889F-0C4A6E2EAAB8}" type="datetimeFigureOut">
               <a:rPr lang="en-US" smtClean="0"/>
-              <a:t>4/7/26</a:t>
+              <a:t>4/9/26</a:t>
             </a:fld>
             <a:endParaRPr lang="en-US"/>
           </a:p>
@@ -5629,6 +5674,539 @@
   <p:cSld>
     <p:spTree>
       <p:nvGrpSpPr>
+        <p:cNvPr id="1" name="">
+          <a:extLst>
+            <a:ext uri="{FF2B5EF4-FFF2-40B4-BE49-F238E27FC236}">
+              <a16:creationId xmlns:a16="http://schemas.microsoft.com/office/drawing/2014/main" id="{D3532CFE-8F0F-4545-01E0-ACDDE288D17C}"/>
+            </a:ext>
+          </a:extLst>
+        </p:cNvPr>
+        <p:cNvGrpSpPr/>
+        <p:nvPr/>
+      </p:nvGrpSpPr>
+      <p:grpSpPr>
+        <a:xfrm>
+          <a:off x="0" y="0"/>
+          <a:ext cx="0" cy="0"/>
+          <a:chOff x="0" y="0"/>
+          <a:chExt cx="0" cy="0"/>
+        </a:xfrm>
+      </p:grpSpPr>
+      <p:pic>
+        <p:nvPicPr>
+          <p:cNvPr id="9" name="Content Placeholder 8" descr="A screenshot of a graph&#10;&#10;Description automatically generated">
+            <a:extLst>
+              <a:ext uri="{FF2B5EF4-FFF2-40B4-BE49-F238E27FC236}">
+                <a16:creationId xmlns:a16="http://schemas.microsoft.com/office/drawing/2014/main" id="{609C0DA7-2AFC-2805-ABA1-C5E206B2B266}"/>
+              </a:ext>
+            </a:extLst>
+          </p:cNvPr>
+          <p:cNvPicPr>
+            <a:picLocks noGrp="1" noChangeAspect="1"/>
+          </p:cNvPicPr>
+          <p:nvPr>
+            <p:ph idx="1"/>
+          </p:nvPr>
+        </p:nvPicPr>
+        <p:blipFill>
+          <a:blip r:embed="rId3"/>
+          <a:stretch>
+            <a:fillRect/>
+          </a:stretch>
+        </p:blipFill>
+        <p:spPr>
+          <a:xfrm>
+            <a:off x="0" y="1026189"/>
+            <a:ext cx="7705003" cy="3023482"/>
+          </a:xfrm>
+        </p:spPr>
+      </p:pic>
+      <p:sp>
+        <p:nvSpPr>
+          <p:cNvPr id="5" name="Title 4">
+            <a:extLst>
+              <a:ext uri="{FF2B5EF4-FFF2-40B4-BE49-F238E27FC236}">
+                <a16:creationId xmlns:a16="http://schemas.microsoft.com/office/drawing/2014/main" id="{5CFBCEA6-8A21-82CC-B7B2-06FAFD71BEFC}"/>
+              </a:ext>
+            </a:extLst>
+          </p:cNvPr>
+          <p:cNvSpPr>
+            <a:spLocks noGrp="1"/>
+          </p:cNvSpPr>
+          <p:nvPr>
+            <p:ph type="title"/>
+          </p:nvPr>
+        </p:nvSpPr>
+        <p:spPr>
+          <a:xfrm>
+            <a:off x="0" y="95395"/>
+            <a:ext cx="10515600" cy="1325563"/>
+          </a:xfrm>
+        </p:spPr>
+        <p:txBody>
+          <a:bodyPr>
+            <a:normAutofit/>
+          </a:bodyPr>
+          <a:lstStyle/>
+          <a:p>
+            <a:r>
+              <a:rPr lang="de-DE" sz="4000" dirty="0"/>
+              <a:t>Lieferantendaten </a:t>
+            </a:r>
+          </a:p>
+        </p:txBody>
+      </p:sp>
+      <p:sp>
+        <p:nvSpPr>
+          <p:cNvPr id="12" name="Rectangle 11">
+            <a:extLst>
+              <a:ext uri="{FF2B5EF4-FFF2-40B4-BE49-F238E27FC236}">
+                <a16:creationId xmlns:a16="http://schemas.microsoft.com/office/drawing/2014/main" id="{A6CB4A9D-C657-4AC0-5AA9-EB5475A5E947}"/>
+              </a:ext>
+            </a:extLst>
+          </p:cNvPr>
+          <p:cNvSpPr/>
+          <p:nvPr/>
+        </p:nvSpPr>
+        <p:spPr>
+          <a:xfrm>
+            <a:off x="231244" y="1651518"/>
+            <a:ext cx="7373206" cy="298579"/>
+          </a:xfrm>
+          <a:prstGeom prst="rect">
+            <a:avLst/>
+          </a:prstGeom>
+          <a:noFill/>
+          <a:ln w="28575">
+            <a:solidFill>
+              <a:srgbClr val="00B050"/>
+            </a:solidFill>
+          </a:ln>
+        </p:spPr>
+        <p:style>
+          <a:lnRef idx="2">
+            <a:schemeClr val="accent1">
+              <a:shade val="15000"/>
+            </a:schemeClr>
+          </a:lnRef>
+          <a:fillRef idx="1">
+            <a:schemeClr val="accent1"/>
+          </a:fillRef>
+          <a:effectRef idx="0">
+            <a:schemeClr val="accent1"/>
+          </a:effectRef>
+          <a:fontRef idx="minor">
+            <a:schemeClr val="lt1"/>
+          </a:fontRef>
+        </p:style>
+        <p:txBody>
+          <a:bodyPr rtlCol="0" anchor="ctr"/>
+          <a:lstStyle/>
+          <a:p>
+            <a:pPr algn="ctr"/>
+            <a:endParaRPr lang="de-DE">
+              <a:solidFill>
+                <a:srgbClr val="00B050"/>
+              </a:solidFill>
+            </a:endParaRPr>
+          </a:p>
+        </p:txBody>
+      </p:sp>
+      <p:cxnSp>
+        <p:nvCxnSpPr>
+          <p:cNvPr id="14" name="Straight Arrow Connector 13">
+            <a:extLst>
+              <a:ext uri="{FF2B5EF4-FFF2-40B4-BE49-F238E27FC236}">
+                <a16:creationId xmlns:a16="http://schemas.microsoft.com/office/drawing/2014/main" id="{A8DB8931-B0F0-97B1-B7E4-0E74FA95943C}"/>
+              </a:ext>
+            </a:extLst>
+          </p:cNvPr>
+          <p:cNvCxnSpPr>
+            <a:cxnSpLocks/>
+            <a:stCxn id="12" idx="3"/>
+          </p:cNvCxnSpPr>
+          <p:nvPr/>
+        </p:nvCxnSpPr>
+        <p:spPr>
+          <a:xfrm>
+            <a:off x="7604450" y="1800808"/>
+            <a:ext cx="331796" cy="0"/>
+          </a:xfrm>
+          <a:prstGeom prst="straightConnector1">
+            <a:avLst/>
+          </a:prstGeom>
+          <a:ln w="28575">
+            <a:solidFill>
+              <a:srgbClr val="00B050"/>
+            </a:solidFill>
+            <a:tailEnd type="triangle"/>
+          </a:ln>
+        </p:spPr>
+        <p:style>
+          <a:lnRef idx="2">
+            <a:schemeClr val="accent1"/>
+          </a:lnRef>
+          <a:fillRef idx="0">
+            <a:schemeClr val="accent1"/>
+          </a:fillRef>
+          <a:effectRef idx="1">
+            <a:schemeClr val="accent1"/>
+          </a:effectRef>
+          <a:fontRef idx="minor">
+            <a:schemeClr val="tx1"/>
+          </a:fontRef>
+        </p:style>
+      </p:cxnSp>
+      <p:sp>
+        <p:nvSpPr>
+          <p:cNvPr id="19" name="TextBox 18">
+            <a:extLst>
+              <a:ext uri="{FF2B5EF4-FFF2-40B4-BE49-F238E27FC236}">
+                <a16:creationId xmlns:a16="http://schemas.microsoft.com/office/drawing/2014/main" id="{73587B3B-0880-FEC3-5A80-45D5D187FC2C}"/>
+              </a:ext>
+            </a:extLst>
+          </p:cNvPr>
+          <p:cNvSpPr txBox="1"/>
+          <p:nvPr/>
+        </p:nvSpPr>
+        <p:spPr>
+          <a:xfrm>
+            <a:off x="7936246" y="1395700"/>
+            <a:ext cx="4024512" cy="1938992"/>
+          </a:xfrm>
+          <a:prstGeom prst="rect">
+            <a:avLst/>
+          </a:prstGeom>
+          <a:noFill/>
+        </p:spPr>
+        <p:txBody>
+          <a:bodyPr wrap="square" rtlCol="0">
+            <a:spAutoFit/>
+          </a:bodyPr>
+          <a:lstStyle/>
+          <a:p>
+            <a:r>
+              <a:rPr lang="de-DE" sz="1500" dirty="0"/>
+              <a:t>Eindeutige </a:t>
+            </a:r>
+            <a:r>
+              <a:rPr lang="de-DE" sz="1500" dirty="0" err="1"/>
+              <a:t>Lieferant_ID</a:t>
+            </a:r>
+            <a:r>
+              <a:rPr lang="de-DE" sz="1500" dirty="0"/>
+              <a:t>: 22 / 22 Zeilen → keine Duplikate</a:t>
+            </a:r>
+          </a:p>
+          <a:p>
+            <a:br>
+              <a:rPr lang="de-DE" dirty="0"/>
+            </a:br>
+            <a:r>
+              <a:rPr lang="de-DE" sz="1800" dirty="0"/>
+              <a:t>→</a:t>
+            </a:r>
+            <a:r>
+              <a:rPr lang="de-DE" dirty="0"/>
+              <a:t> </a:t>
+            </a:r>
+            <a:r>
+              <a:rPr lang="de-DE" sz="1800" b="1" dirty="0" err="1"/>
+              <a:t>Lieferant_ID</a:t>
+            </a:r>
+            <a:r>
+              <a:rPr lang="de-DE" b="1" dirty="0"/>
+              <a:t> </a:t>
+            </a:r>
+            <a:r>
+              <a:rPr lang="de-DE" dirty="0"/>
+              <a:t>= eindeutiger Primärschlüssel (</a:t>
+            </a:r>
+            <a:r>
+              <a:rPr lang="de-DE" b="1" dirty="0"/>
+              <a:t>PK</a:t>
+            </a:r>
+            <a:r>
+              <a:rPr lang="de-DE" dirty="0"/>
+              <a:t>) der </a:t>
+            </a:r>
+            <a:r>
+              <a:rPr lang="de-DE" dirty="0" err="1"/>
+              <a:t>Liferantendaten</a:t>
+            </a:r>
+            <a:r>
+              <a:rPr lang="de-DE" dirty="0"/>
+              <a:t> Tabelle</a:t>
+            </a:r>
+          </a:p>
+          <a:p>
+            <a:endParaRPr lang="de-DE" dirty="0"/>
+          </a:p>
+        </p:txBody>
+      </p:sp>
+      <p:sp>
+        <p:nvSpPr>
+          <p:cNvPr id="23" name="TextBox 22">
+            <a:extLst>
+              <a:ext uri="{FF2B5EF4-FFF2-40B4-BE49-F238E27FC236}">
+                <a16:creationId xmlns:a16="http://schemas.microsoft.com/office/drawing/2014/main" id="{A7101C3C-9904-E285-95A6-4E664D4331FA}"/>
+              </a:ext>
+            </a:extLst>
+          </p:cNvPr>
+          <p:cNvSpPr txBox="1"/>
+          <p:nvPr/>
+        </p:nvSpPr>
+        <p:spPr>
+          <a:xfrm>
+            <a:off x="231244" y="4280231"/>
+            <a:ext cx="11058797" cy="830997"/>
+          </a:xfrm>
+          <a:prstGeom prst="rect">
+            <a:avLst/>
+          </a:prstGeom>
+          <a:noFill/>
+          <a:ln>
+            <a:solidFill>
+              <a:schemeClr val="accent6">
+                <a:lumMod val="20000"/>
+                <a:lumOff val="80000"/>
+              </a:schemeClr>
+            </a:solidFill>
+          </a:ln>
+        </p:spPr>
+        <p:txBody>
+          <a:bodyPr wrap="square" rtlCol="0">
+            <a:spAutoFit/>
+          </a:bodyPr>
+          <a:lstStyle/>
+          <a:p>
+            <a:r>
+              <a:rPr lang="de-DE" sz="1200" b="0" i="0" dirty="0">
+                <a:solidFill>
+                  <a:srgbClr val="0A0A0A"/>
+                </a:solidFill>
+                <a:effectLst/>
+                <a:highlight>
+                  <a:srgbClr val="FFFFFF"/>
+                </a:highlight>
+                <a:latin typeface="Google Sans"/>
+              </a:rPr>
+              <a:t>⚠️ </a:t>
+            </a:r>
+            <a:r>
+              <a:rPr lang="de-DE" sz="1200" b="1" dirty="0"/>
+              <a:t>1NF: </a:t>
+            </a:r>
+            <a:r>
+              <a:rPr lang="de-DE" sz="1200" dirty="0"/>
+              <a:t>Adresse in Lieferantendaten speichert Straße, Hausnummer, Postleitzahl und Stadt in einem einzigen Feld. Empfehlung: In separate Attribute aufteilen — </a:t>
+            </a:r>
+            <a:r>
+              <a:rPr lang="de-DE" sz="1200" dirty="0" err="1"/>
+              <a:t>Strasse</a:t>
+            </a:r>
+            <a:r>
+              <a:rPr lang="de-DE" sz="1200" dirty="0"/>
+              <a:t>, Hausnummer, PLZ, Stadt — um gezielte Abfragen und Validierungen zu ermöglichen, z.B. Prüfung ob PLZ zum angegebenen Ort gehört.</a:t>
+            </a:r>
+          </a:p>
+          <a:p>
+            <a:r>
+              <a:rPr lang="de-DE" sz="1200" b="1" dirty="0">
+                <a:sym typeface="Wingdings" pitchFamily="2" charset="2"/>
+              </a:rPr>
+              <a:t> </a:t>
+            </a:r>
+            <a:r>
+              <a:rPr lang="de-DE" sz="1200" i="1" dirty="0"/>
+              <a:t>"Kein formaler 1NF-Verstoß, aber fehlende </a:t>
+            </a:r>
+            <a:r>
+              <a:rPr lang="de-DE" sz="1200" i="1" dirty="0" err="1"/>
+              <a:t>Atomarität</a:t>
+            </a:r>
+            <a:r>
+              <a:rPr lang="de-DE" sz="1200" i="1" dirty="0"/>
+              <a:t> verhindert Validierung und gezielte Auswertung."</a:t>
+            </a:r>
+            <a:endParaRPr lang="de-DE" sz="1200" dirty="0"/>
+          </a:p>
+          <a:p>
+            <a:endParaRPr lang="de-DE" sz="1200" b="1" dirty="0"/>
+          </a:p>
+        </p:txBody>
+      </p:sp>
+      <p:sp>
+        <p:nvSpPr>
+          <p:cNvPr id="24" name="TextBox 23">
+            <a:extLst>
+              <a:ext uri="{FF2B5EF4-FFF2-40B4-BE49-F238E27FC236}">
+                <a16:creationId xmlns:a16="http://schemas.microsoft.com/office/drawing/2014/main" id="{E3B472E4-6D38-4536-A5D7-BD660D4E4CEF}"/>
+              </a:ext>
+            </a:extLst>
+          </p:cNvPr>
+          <p:cNvSpPr txBox="1"/>
+          <p:nvPr/>
+        </p:nvSpPr>
+        <p:spPr>
+          <a:xfrm>
+            <a:off x="231244" y="5203288"/>
+            <a:ext cx="4710169" cy="276999"/>
+          </a:xfrm>
+          <a:prstGeom prst="rect">
+            <a:avLst/>
+          </a:prstGeom>
+          <a:noFill/>
+          <a:ln>
+            <a:solidFill>
+              <a:schemeClr val="accent6">
+                <a:lumMod val="20000"/>
+                <a:lumOff val="80000"/>
+              </a:schemeClr>
+            </a:solidFill>
+          </a:ln>
+        </p:spPr>
+        <p:txBody>
+          <a:bodyPr wrap="square" rtlCol="0">
+            <a:spAutoFit/>
+          </a:bodyPr>
+          <a:lstStyle/>
+          <a:p>
+            <a:r>
+              <a:rPr lang="de-DE" sz="1200" dirty="0"/>
+              <a:t>✅</a:t>
+            </a:r>
+            <a:r>
+              <a:rPr lang="de-DE" sz="1200" b="0" i="0" dirty="0">
+                <a:solidFill>
+                  <a:srgbClr val="0A0A0A"/>
+                </a:solidFill>
+                <a:effectLst/>
+                <a:highlight>
+                  <a:srgbClr val="FFFFFF"/>
+                </a:highlight>
+                <a:latin typeface="Google Sans"/>
+              </a:rPr>
+              <a:t> </a:t>
+            </a:r>
+            <a:r>
+              <a:rPr lang="de-DE" sz="1200" b="1" i="0" dirty="0">
+                <a:solidFill>
+                  <a:srgbClr val="0A0A0A"/>
+                </a:solidFill>
+                <a:effectLst/>
+                <a:highlight>
+                  <a:srgbClr val="FFFFFF"/>
+                </a:highlight>
+                <a:latin typeface="Google Sans"/>
+              </a:rPr>
+              <a:t>2</a:t>
+            </a:r>
+            <a:r>
+              <a:rPr lang="de-DE" sz="1200" b="1" dirty="0"/>
+              <a:t>NF </a:t>
+            </a:r>
+            <a:r>
+              <a:rPr lang="de-DE" sz="1200" dirty="0"/>
+              <a:t>(vorausgesetzt, die 1. Normalform ist erfüllt)</a:t>
+            </a:r>
+          </a:p>
+        </p:txBody>
+      </p:sp>
+      <p:sp>
+        <p:nvSpPr>
+          <p:cNvPr id="25" name="TextBox 24">
+            <a:extLst>
+              <a:ext uri="{FF2B5EF4-FFF2-40B4-BE49-F238E27FC236}">
+                <a16:creationId xmlns:a16="http://schemas.microsoft.com/office/drawing/2014/main" id="{4AA7640E-3A45-94F1-1EE8-E041C9407418}"/>
+              </a:ext>
+            </a:extLst>
+          </p:cNvPr>
+          <p:cNvSpPr txBox="1"/>
+          <p:nvPr/>
+        </p:nvSpPr>
+        <p:spPr>
+          <a:xfrm>
+            <a:off x="231244" y="5572347"/>
+            <a:ext cx="4710169" cy="276999"/>
+          </a:xfrm>
+          <a:prstGeom prst="rect">
+            <a:avLst/>
+          </a:prstGeom>
+          <a:noFill/>
+          <a:ln>
+            <a:solidFill>
+              <a:schemeClr val="accent6">
+                <a:lumMod val="20000"/>
+                <a:lumOff val="80000"/>
+              </a:schemeClr>
+            </a:solidFill>
+          </a:ln>
+        </p:spPr>
+        <p:txBody>
+          <a:bodyPr wrap="square" rtlCol="0">
+            <a:spAutoFit/>
+          </a:bodyPr>
+          <a:lstStyle/>
+          <a:p>
+            <a:r>
+              <a:rPr lang="de-DE" sz="1200" dirty="0"/>
+              <a:t>✅</a:t>
+            </a:r>
+            <a:r>
+              <a:rPr lang="de-DE" sz="1200" b="0" i="0" dirty="0">
+                <a:solidFill>
+                  <a:srgbClr val="0A0A0A"/>
+                </a:solidFill>
+                <a:effectLst/>
+                <a:highlight>
+                  <a:srgbClr val="FFFFFF"/>
+                </a:highlight>
+                <a:latin typeface="Google Sans"/>
+              </a:rPr>
+              <a:t> </a:t>
+            </a:r>
+            <a:r>
+              <a:rPr lang="de-DE" sz="1200" b="1" dirty="0">
+                <a:solidFill>
+                  <a:srgbClr val="0A0A0A"/>
+                </a:solidFill>
+                <a:highlight>
+                  <a:srgbClr val="FFFFFF"/>
+                </a:highlight>
+                <a:latin typeface="Google Sans"/>
+              </a:rPr>
+              <a:t>3</a:t>
+            </a:r>
+            <a:r>
+              <a:rPr lang="de-DE" sz="1200" b="1" dirty="0"/>
+              <a:t>NF </a:t>
+            </a:r>
+            <a:r>
+              <a:rPr lang="de-DE" sz="1200" dirty="0"/>
+              <a:t>(vorausgesetzt, die 1. Normalform ist erfüllt)</a:t>
+            </a:r>
+          </a:p>
+        </p:txBody>
+      </p:sp>
+    </p:spTree>
+    <p:extLst>
+      <p:ext uri="{BB962C8B-B14F-4D97-AF65-F5344CB8AC3E}">
+        <p14:creationId xmlns:p14="http://schemas.microsoft.com/office/powerpoint/2010/main" val="789515391"/>
+      </p:ext>
+    </p:extLst>
+  </p:cSld>
+  <p:clrMapOvr>
+    <a:masterClrMapping/>
+  </p:clrMapOvr>
+</p:sld>
+</file>
+
+<file path=ppt/slides/slide11.xml><?xml version="1.0" encoding="utf-8"?>
+<p:sld xmlns:a="http://schemas.openxmlformats.org/drawingml/2006/main" xmlns:r="http://schemas.openxmlformats.org/officeDocument/2006/relationships" xmlns:p="http://schemas.openxmlformats.org/presentationml/2006/main">
+  <p:cSld>
+    <p:spTree>
+      <p:nvGrpSpPr>
         <p:cNvPr id="1" name=""/>
         <p:cNvGrpSpPr/>
         <p:nvPr/>
@@ -5670,34 +6248,3561 @@
           </a:p>
         </p:txBody>
       </p:sp>
-      <p:sp>
-        <p:nvSpPr>
-          <p:cNvPr id="3" name="Content Placeholder 2">
+      <p:graphicFrame>
+        <p:nvGraphicFramePr>
+          <p:cNvPr id="5" name="Content Placeholder 4">
             <a:extLst>
               <a:ext uri="{FF2B5EF4-FFF2-40B4-BE49-F238E27FC236}">
-                <a16:creationId xmlns:a16="http://schemas.microsoft.com/office/drawing/2014/main" id="{06FB9977-0661-6A1C-126E-693F7CA66599}"/>
+                <a16:creationId xmlns:a16="http://schemas.microsoft.com/office/drawing/2014/main" id="{5E223CD5-082F-F77A-F820-90A5024F2834}"/>
               </a:ext>
             </a:extLst>
           </p:cNvPr>
-          <p:cNvSpPr>
-            <a:spLocks noGrp="1"/>
-          </p:cNvSpPr>
+          <p:cNvGraphicFramePr>
+            <a:graphicFrameLocks noGrp="1"/>
+          </p:cNvGraphicFramePr>
           <p:nvPr>
             <p:ph idx="1"/>
+            <p:extLst>
+              <p:ext uri="{D42A27DB-BD31-4B8C-83A1-F6EECF244321}">
+                <p14:modId xmlns:p14="http://schemas.microsoft.com/office/powerpoint/2010/main" val="904714927"/>
+              </p:ext>
+            </p:extLst>
           </p:nvPr>
-        </p:nvSpPr>
-        <p:spPr/>
-        <p:txBody>
-          <a:bodyPr/>
-          <a:lstStyle/>
-          <a:p>
-            <a:pPr marL="0" indent="0">
-              <a:buNone/>
-            </a:pPr>
-            <a:endParaRPr lang="de-DE" dirty="0"/>
-          </a:p>
-        </p:txBody>
-      </p:sp>
+        </p:nvGraphicFramePr>
+        <p:xfrm>
+          <a:off x="838200" y="1825625"/>
+          <a:ext cx="10515600" cy="741680"/>
+        </p:xfrm>
+        <a:graphic>
+          <a:graphicData uri="http://schemas.openxmlformats.org/drawingml/2006/table">
+            <a:tbl>
+              <a:tblPr firstRow="1" bandRow="1">
+                <a:tableStyleId>{5C22544A-7EE6-4342-B048-85BDC9FD1C3A}</a:tableStyleId>
+              </a:tblPr>
+              <a:tblGrid>
+                <a:gridCol w="2103120">
+                  <a:extLst>
+                    <a:ext uri="{9D8B030D-6E8A-4147-A177-3AD203B41FA5}">
+                      <a16:colId xmlns:a16="http://schemas.microsoft.com/office/drawing/2014/main" val="3008942672"/>
+                    </a:ext>
+                  </a:extLst>
+                </a:gridCol>
+                <a:gridCol w="2103120">
+                  <a:extLst>
+                    <a:ext uri="{9D8B030D-6E8A-4147-A177-3AD203B41FA5}">
+                      <a16:colId xmlns:a16="http://schemas.microsoft.com/office/drawing/2014/main" val="984542439"/>
+                    </a:ext>
+                  </a:extLst>
+                </a:gridCol>
+                <a:gridCol w="2103120">
+                  <a:extLst>
+                    <a:ext uri="{9D8B030D-6E8A-4147-A177-3AD203B41FA5}">
+                      <a16:colId xmlns:a16="http://schemas.microsoft.com/office/drawing/2014/main" val="530137838"/>
+                    </a:ext>
+                  </a:extLst>
+                </a:gridCol>
+                <a:gridCol w="2103120">
+                  <a:extLst>
+                    <a:ext uri="{9D8B030D-6E8A-4147-A177-3AD203B41FA5}">
+                      <a16:colId xmlns:a16="http://schemas.microsoft.com/office/drawing/2014/main" val="2522197552"/>
+                    </a:ext>
+                  </a:extLst>
+                </a:gridCol>
+                <a:gridCol w="2103120">
+                  <a:extLst>
+                    <a:ext uri="{9D8B030D-6E8A-4147-A177-3AD203B41FA5}">
+                      <a16:colId xmlns:a16="http://schemas.microsoft.com/office/drawing/2014/main" val="4167324781"/>
+                    </a:ext>
+                  </a:extLst>
+                </a:gridCol>
+              </a:tblGrid>
+              <a:tr h="370840">
+                <a:tc>
+                  <a:txBody>
+                    <a:bodyPr/>
+                    <a:lstStyle/>
+                    <a:p>
+                      <a:endParaRPr lang="de-DE"/>
+                    </a:p>
+                  </a:txBody>
+                  <a:tcPr/>
+                </a:tc>
+                <a:tc>
+                  <a:txBody>
+                    <a:bodyPr/>
+                    <a:lstStyle/>
+                    <a:p>
+                      <a:endParaRPr lang="de-DE"/>
+                    </a:p>
+                  </a:txBody>
+                  <a:tcPr/>
+                </a:tc>
+                <a:tc>
+                  <a:txBody>
+                    <a:bodyPr/>
+                    <a:lstStyle/>
+                    <a:p>
+                      <a:endParaRPr lang="de-DE"/>
+                    </a:p>
+                  </a:txBody>
+                  <a:tcPr/>
+                </a:tc>
+                <a:tc>
+                  <a:txBody>
+                    <a:bodyPr/>
+                    <a:lstStyle/>
+                    <a:p>
+                      <a:endParaRPr lang="de-DE"/>
+                    </a:p>
+                  </a:txBody>
+                  <a:tcPr/>
+                </a:tc>
+                <a:tc>
+                  <a:txBody>
+                    <a:bodyPr/>
+                    <a:lstStyle/>
+                    <a:p>
+                      <a:endParaRPr lang="de-DE"/>
+                    </a:p>
+                  </a:txBody>
+                  <a:tcPr/>
+                </a:tc>
+                <a:extLst>
+                  <a:ext uri="{0D108BD9-81ED-4DB2-BD59-A6C34878D82A}">
+                    <a16:rowId xmlns:a16="http://schemas.microsoft.com/office/drawing/2014/main" val="364639135"/>
+                  </a:ext>
+                </a:extLst>
+              </a:tr>
+              <a:tr h="370840">
+                <a:tc>
+                  <a:txBody>
+                    <a:bodyPr/>
+                    <a:lstStyle/>
+                    <a:p>
+                      <a:endParaRPr lang="de-DE"/>
+                    </a:p>
+                  </a:txBody>
+                  <a:tcPr/>
+                </a:tc>
+                <a:tc>
+                  <a:txBody>
+                    <a:bodyPr/>
+                    <a:lstStyle/>
+                    <a:p>
+                      <a:endParaRPr lang="de-DE"/>
+                    </a:p>
+                  </a:txBody>
+                  <a:tcPr/>
+                </a:tc>
+                <a:tc>
+                  <a:txBody>
+                    <a:bodyPr/>
+                    <a:lstStyle/>
+                    <a:p>
+                      <a:endParaRPr lang="de-DE"/>
+                    </a:p>
+                  </a:txBody>
+                  <a:tcPr/>
+                </a:tc>
+                <a:tc>
+                  <a:txBody>
+                    <a:bodyPr/>
+                    <a:lstStyle/>
+                    <a:p>
+                      <a:endParaRPr lang="de-DE"/>
+                    </a:p>
+                  </a:txBody>
+                  <a:tcPr/>
+                </a:tc>
+                <a:tc>
+                  <a:txBody>
+                    <a:bodyPr/>
+                    <a:lstStyle/>
+                    <a:p>
+                      <a:endParaRPr lang="de-DE" dirty="0"/>
+                    </a:p>
+                  </a:txBody>
+                  <a:tcPr/>
+                </a:tc>
+                <a:extLst>
+                  <a:ext uri="{0D108BD9-81ED-4DB2-BD59-A6C34878D82A}">
+                    <a16:rowId xmlns:a16="http://schemas.microsoft.com/office/drawing/2014/main" val="1858708607"/>
+                  </a:ext>
+                </a:extLst>
+              </a:tr>
+            </a:tbl>
+          </a:graphicData>
+        </a:graphic>
+      </p:graphicFrame>
+      <p:graphicFrame>
+        <p:nvGraphicFramePr>
+          <p:cNvPr id="6" name="Table 5">
+            <a:extLst>
+              <a:ext uri="{FF2B5EF4-FFF2-40B4-BE49-F238E27FC236}">
+                <a16:creationId xmlns:a16="http://schemas.microsoft.com/office/drawing/2014/main" id="{F9BD40EB-E024-92E2-B861-04DB22F19EC0}"/>
+              </a:ext>
+            </a:extLst>
+          </p:cNvPr>
+          <p:cNvGraphicFramePr>
+            <a:graphicFrameLocks noGrp="1"/>
+          </p:cNvGraphicFramePr>
+          <p:nvPr/>
+        </p:nvGraphicFramePr>
+        <p:xfrm>
+          <a:off x="1143000" y="3102451"/>
+          <a:ext cx="9906000" cy="1797685"/>
+        </p:xfrm>
+        <a:graphic>
+          <a:graphicData uri="http://schemas.openxmlformats.org/drawingml/2006/table">
+            <a:tbl>
+              <a:tblPr/>
+              <a:tblGrid>
+                <a:gridCol w="825500">
+                  <a:extLst>
+                    <a:ext uri="{9D8B030D-6E8A-4147-A177-3AD203B41FA5}">
+                      <a16:colId xmlns:a16="http://schemas.microsoft.com/office/drawing/2014/main" val="329284946"/>
+                    </a:ext>
+                  </a:extLst>
+                </a:gridCol>
+                <a:gridCol w="825500">
+                  <a:extLst>
+                    <a:ext uri="{9D8B030D-6E8A-4147-A177-3AD203B41FA5}">
+                      <a16:colId xmlns:a16="http://schemas.microsoft.com/office/drawing/2014/main" val="3296145522"/>
+                    </a:ext>
+                  </a:extLst>
+                </a:gridCol>
+                <a:gridCol w="825500">
+                  <a:extLst>
+                    <a:ext uri="{9D8B030D-6E8A-4147-A177-3AD203B41FA5}">
+                      <a16:colId xmlns:a16="http://schemas.microsoft.com/office/drawing/2014/main" val="418697586"/>
+                    </a:ext>
+                  </a:extLst>
+                </a:gridCol>
+                <a:gridCol w="825500">
+                  <a:extLst>
+                    <a:ext uri="{9D8B030D-6E8A-4147-A177-3AD203B41FA5}">
+                      <a16:colId xmlns:a16="http://schemas.microsoft.com/office/drawing/2014/main" val="1973169447"/>
+                    </a:ext>
+                  </a:extLst>
+                </a:gridCol>
+                <a:gridCol w="825500">
+                  <a:extLst>
+                    <a:ext uri="{9D8B030D-6E8A-4147-A177-3AD203B41FA5}">
+                      <a16:colId xmlns:a16="http://schemas.microsoft.com/office/drawing/2014/main" val="229323088"/>
+                    </a:ext>
+                  </a:extLst>
+                </a:gridCol>
+                <a:gridCol w="825500">
+                  <a:extLst>
+                    <a:ext uri="{9D8B030D-6E8A-4147-A177-3AD203B41FA5}">
+                      <a16:colId xmlns:a16="http://schemas.microsoft.com/office/drawing/2014/main" val="2152460118"/>
+                    </a:ext>
+                  </a:extLst>
+                </a:gridCol>
+                <a:gridCol w="825500">
+                  <a:extLst>
+                    <a:ext uri="{9D8B030D-6E8A-4147-A177-3AD203B41FA5}">
+                      <a16:colId xmlns:a16="http://schemas.microsoft.com/office/drawing/2014/main" val="632309551"/>
+                    </a:ext>
+                  </a:extLst>
+                </a:gridCol>
+                <a:gridCol w="825500">
+                  <a:extLst>
+                    <a:ext uri="{9D8B030D-6E8A-4147-A177-3AD203B41FA5}">
+                      <a16:colId xmlns:a16="http://schemas.microsoft.com/office/drawing/2014/main" val="2030860086"/>
+                    </a:ext>
+                  </a:extLst>
+                </a:gridCol>
+                <a:gridCol w="825500">
+                  <a:extLst>
+                    <a:ext uri="{9D8B030D-6E8A-4147-A177-3AD203B41FA5}">
+                      <a16:colId xmlns:a16="http://schemas.microsoft.com/office/drawing/2014/main" val="286369449"/>
+                    </a:ext>
+                  </a:extLst>
+                </a:gridCol>
+                <a:gridCol w="825500">
+                  <a:extLst>
+                    <a:ext uri="{9D8B030D-6E8A-4147-A177-3AD203B41FA5}">
+                      <a16:colId xmlns:a16="http://schemas.microsoft.com/office/drawing/2014/main" val="227075420"/>
+                    </a:ext>
+                  </a:extLst>
+                </a:gridCol>
+                <a:gridCol w="825500">
+                  <a:extLst>
+                    <a:ext uri="{9D8B030D-6E8A-4147-A177-3AD203B41FA5}">
+                      <a16:colId xmlns:a16="http://schemas.microsoft.com/office/drawing/2014/main" val="2045316657"/>
+                    </a:ext>
+                  </a:extLst>
+                </a:gridCol>
+                <a:gridCol w="825500">
+                  <a:extLst>
+                    <a:ext uri="{9D8B030D-6E8A-4147-A177-3AD203B41FA5}">
+                      <a16:colId xmlns:a16="http://schemas.microsoft.com/office/drawing/2014/main" val="1741993942"/>
+                    </a:ext>
+                  </a:extLst>
+                </a:gridCol>
+              </a:tblGrid>
+              <a:tr h="203200">
+                <a:tc>
+                  <a:txBody>
+                    <a:bodyPr/>
+                    <a:lstStyle/>
+                    <a:p>
+                      <a:pPr algn="l" fontAlgn="b"/>
+                      <a:r>
+                        <a:rPr lang="en-US" sz="1200" b="0" i="0" u="none" strike="noStrike">
+                          <a:solidFill>
+                            <a:srgbClr val="000000"/>
+                          </a:solidFill>
+                          <a:effectLst/>
+                          <a:latin typeface="Aptos Narrow" panose="020B0004020202020204" pitchFamily="34" charset="0"/>
+                        </a:rPr>
+                        <a:t>Artikelnummer</a:t>
+                      </a:r>
+                    </a:p>
+                  </a:txBody>
+                  <a:tcPr marL="9525" marR="9525" marT="9525" marB="0" anchor="b">
+                    <a:lnL>
+                      <a:noFill/>
+                    </a:lnL>
+                    <a:lnR>
+                      <a:noFill/>
+                    </a:lnR>
+                    <a:lnT>
+                      <a:noFill/>
+                    </a:lnT>
+                    <a:lnB>
+                      <a:noFill/>
+                    </a:lnB>
+                    <a:noFill/>
+                  </a:tcPr>
+                </a:tc>
+                <a:tc>
+                  <a:txBody>
+                    <a:bodyPr/>
+                    <a:lstStyle/>
+                    <a:p>
+                      <a:pPr algn="l" fontAlgn="b"/>
+                      <a:r>
+                        <a:rPr lang="en-US" sz="1200" b="0" i="0" u="none" strike="noStrike">
+                          <a:solidFill>
+                            <a:srgbClr val="000000"/>
+                          </a:solidFill>
+                          <a:effectLst/>
+                          <a:latin typeface="Aptos Narrow" panose="020B0004020202020204" pitchFamily="34" charset="0"/>
+                        </a:rPr>
+                        <a:t>Werk</a:t>
+                      </a:r>
+                    </a:p>
+                  </a:txBody>
+                  <a:tcPr marL="9525" marR="9525" marT="9525" marB="0" anchor="b">
+                    <a:lnL>
+                      <a:noFill/>
+                    </a:lnL>
+                    <a:lnR>
+                      <a:noFill/>
+                    </a:lnR>
+                    <a:lnT>
+                      <a:noFill/>
+                    </a:lnT>
+                    <a:lnB>
+                      <a:noFill/>
+                    </a:lnB>
+                    <a:noFill/>
+                  </a:tcPr>
+                </a:tc>
+                <a:tc>
+                  <a:txBody>
+                    <a:bodyPr/>
+                    <a:lstStyle/>
+                    <a:p>
+                      <a:pPr algn="l" fontAlgn="b"/>
+                      <a:r>
+                        <a:rPr lang="en-US" sz="1200" b="0" i="0" u="none" strike="noStrike">
+                          <a:solidFill>
+                            <a:srgbClr val="000000"/>
+                          </a:solidFill>
+                          <a:effectLst/>
+                          <a:latin typeface="Aptos Narrow" panose="020B0004020202020204" pitchFamily="34" charset="0"/>
+                        </a:rPr>
+                        <a:t>Lagerort</a:t>
+                      </a:r>
+                    </a:p>
+                  </a:txBody>
+                  <a:tcPr marL="9525" marR="9525" marT="9525" marB="0" anchor="b">
+                    <a:lnL>
+                      <a:noFill/>
+                    </a:lnL>
+                    <a:lnR>
+                      <a:noFill/>
+                    </a:lnR>
+                    <a:lnT>
+                      <a:noFill/>
+                    </a:lnT>
+                    <a:lnB>
+                      <a:noFill/>
+                    </a:lnB>
+                    <a:noFill/>
+                  </a:tcPr>
+                </a:tc>
+                <a:tc>
+                  <a:txBody>
+                    <a:bodyPr/>
+                    <a:lstStyle/>
+                    <a:p>
+                      <a:pPr algn="l" fontAlgn="b"/>
+                      <a:r>
+                        <a:rPr lang="en-US" sz="1200" b="0" i="0" u="none" strike="noStrike">
+                          <a:solidFill>
+                            <a:srgbClr val="000000"/>
+                          </a:solidFill>
+                          <a:effectLst/>
+                          <a:latin typeface="Aptos Narrow" panose="020B0004020202020204" pitchFamily="34" charset="0"/>
+                        </a:rPr>
+                        <a:t>Mindestbestand</a:t>
+                      </a:r>
+                    </a:p>
+                  </a:txBody>
+                  <a:tcPr marL="9525" marR="9525" marT="9525" marB="0" anchor="b">
+                    <a:lnL>
+                      <a:noFill/>
+                    </a:lnL>
+                    <a:lnR>
+                      <a:noFill/>
+                    </a:lnR>
+                    <a:lnT>
+                      <a:noFill/>
+                    </a:lnT>
+                    <a:lnB>
+                      <a:noFill/>
+                    </a:lnB>
+                    <a:noFill/>
+                  </a:tcPr>
+                </a:tc>
+                <a:tc>
+                  <a:txBody>
+                    <a:bodyPr/>
+                    <a:lstStyle/>
+                    <a:p>
+                      <a:pPr algn="l" fontAlgn="b"/>
+                      <a:r>
+                        <a:rPr lang="en-US" sz="1200" b="0" i="0" u="none" strike="noStrike">
+                          <a:solidFill>
+                            <a:srgbClr val="000000"/>
+                          </a:solidFill>
+                          <a:effectLst/>
+                          <a:latin typeface="Aptos Narrow" panose="020B0004020202020204" pitchFamily="34" charset="0"/>
+                        </a:rPr>
+                        <a:t>Disponent</a:t>
+                      </a:r>
+                    </a:p>
+                  </a:txBody>
+                  <a:tcPr marL="9525" marR="9525" marT="9525" marB="0" anchor="b">
+                    <a:lnL>
+                      <a:noFill/>
+                    </a:lnL>
+                    <a:lnR>
+                      <a:noFill/>
+                    </a:lnR>
+                    <a:lnT>
+                      <a:noFill/>
+                    </a:lnT>
+                    <a:lnB>
+                      <a:noFill/>
+                    </a:lnB>
+                    <a:noFill/>
+                  </a:tcPr>
+                </a:tc>
+                <a:tc>
+                  <a:txBody>
+                    <a:bodyPr/>
+                    <a:lstStyle/>
+                    <a:p>
+                      <a:pPr algn="l" fontAlgn="b"/>
+                      <a:r>
+                        <a:rPr lang="en-US" sz="1200" b="0" i="0" u="none" strike="noStrike">
+                          <a:solidFill>
+                            <a:srgbClr val="000000"/>
+                          </a:solidFill>
+                          <a:effectLst/>
+                          <a:latin typeface="Aptos Narrow" panose="020B0004020202020204" pitchFamily="34" charset="0"/>
+                        </a:rPr>
+                        <a:t>Laenge_cm_werk</a:t>
+                      </a:r>
+                    </a:p>
+                  </a:txBody>
+                  <a:tcPr marL="9525" marR="9525" marT="9525" marB="0" anchor="b">
+                    <a:lnL>
+                      <a:noFill/>
+                    </a:lnL>
+                    <a:lnR>
+                      <a:noFill/>
+                    </a:lnR>
+                    <a:lnT>
+                      <a:noFill/>
+                    </a:lnT>
+                    <a:lnB>
+                      <a:noFill/>
+                    </a:lnB>
+                    <a:noFill/>
+                  </a:tcPr>
+                </a:tc>
+                <a:tc>
+                  <a:txBody>
+                    <a:bodyPr/>
+                    <a:lstStyle/>
+                    <a:p>
+                      <a:pPr algn="l" fontAlgn="b"/>
+                      <a:r>
+                        <a:rPr lang="en-US" sz="1200" b="0" i="0" u="none" strike="noStrike">
+                          <a:solidFill>
+                            <a:srgbClr val="000000"/>
+                          </a:solidFill>
+                          <a:effectLst/>
+                          <a:latin typeface="Aptos Narrow" panose="020B0004020202020204" pitchFamily="34" charset="0"/>
+                        </a:rPr>
+                        <a:t>Breite_cm_werk</a:t>
+                      </a:r>
+                    </a:p>
+                  </a:txBody>
+                  <a:tcPr marL="9525" marR="9525" marT="9525" marB="0" anchor="b">
+                    <a:lnL>
+                      <a:noFill/>
+                    </a:lnL>
+                    <a:lnR>
+                      <a:noFill/>
+                    </a:lnR>
+                    <a:lnT>
+                      <a:noFill/>
+                    </a:lnT>
+                    <a:lnB>
+                      <a:noFill/>
+                    </a:lnB>
+                    <a:noFill/>
+                  </a:tcPr>
+                </a:tc>
+                <a:tc>
+                  <a:txBody>
+                    <a:bodyPr/>
+                    <a:lstStyle/>
+                    <a:p>
+                      <a:pPr algn="l" fontAlgn="b"/>
+                      <a:r>
+                        <a:rPr lang="en-US" sz="1200" b="0" i="0" u="none" strike="noStrike">
+                          <a:solidFill>
+                            <a:srgbClr val="000000"/>
+                          </a:solidFill>
+                          <a:effectLst/>
+                          <a:latin typeface="Aptos Narrow" panose="020B0004020202020204" pitchFamily="34" charset="0"/>
+                        </a:rPr>
+                        <a:t>Hoehe_cm_werk</a:t>
+                      </a:r>
+                    </a:p>
+                  </a:txBody>
+                  <a:tcPr marL="9525" marR="9525" marT="9525" marB="0" anchor="b">
+                    <a:lnL>
+                      <a:noFill/>
+                    </a:lnL>
+                    <a:lnR>
+                      <a:noFill/>
+                    </a:lnR>
+                    <a:lnT>
+                      <a:noFill/>
+                    </a:lnT>
+                    <a:lnB>
+                      <a:noFill/>
+                    </a:lnB>
+                    <a:noFill/>
+                  </a:tcPr>
+                </a:tc>
+                <a:tc>
+                  <a:txBody>
+                    <a:bodyPr/>
+                    <a:lstStyle/>
+                    <a:p>
+                      <a:pPr algn="l" fontAlgn="b"/>
+                      <a:r>
+                        <a:rPr lang="en-US" sz="1200" b="0" i="0" u="none" strike="noStrike">
+                          <a:solidFill>
+                            <a:srgbClr val="000000"/>
+                          </a:solidFill>
+                          <a:effectLst/>
+                          <a:latin typeface="Aptos Narrow" panose="020B0004020202020204" pitchFamily="34" charset="0"/>
+                        </a:rPr>
+                        <a:t>Mass_Einheit</a:t>
+                      </a:r>
+                    </a:p>
+                  </a:txBody>
+                  <a:tcPr marL="9525" marR="9525" marT="9525" marB="0" anchor="b">
+                    <a:lnL>
+                      <a:noFill/>
+                    </a:lnL>
+                    <a:lnR>
+                      <a:noFill/>
+                    </a:lnR>
+                    <a:lnT>
+                      <a:noFill/>
+                    </a:lnT>
+                    <a:lnB>
+                      <a:noFill/>
+                    </a:lnB>
+                    <a:noFill/>
+                  </a:tcPr>
+                </a:tc>
+                <a:tc>
+                  <a:txBody>
+                    <a:bodyPr/>
+                    <a:lstStyle/>
+                    <a:p>
+                      <a:pPr algn="l" fontAlgn="b"/>
+                      <a:r>
+                        <a:rPr lang="en-US" sz="1200" b="0" i="0" u="none" strike="noStrike">
+                          <a:solidFill>
+                            <a:srgbClr val="000000"/>
+                          </a:solidFill>
+                          <a:effectLst/>
+                          <a:latin typeface="Aptos Narrow" panose="020B0004020202020204" pitchFamily="34" charset="0"/>
+                        </a:rPr>
+                        <a:t>Lieferant_ID</a:t>
+                      </a:r>
+                    </a:p>
+                  </a:txBody>
+                  <a:tcPr marL="9525" marR="9525" marT="9525" marB="0" anchor="b">
+                    <a:lnL>
+                      <a:noFill/>
+                    </a:lnL>
+                    <a:lnR>
+                      <a:noFill/>
+                    </a:lnR>
+                    <a:lnT>
+                      <a:noFill/>
+                    </a:lnT>
+                    <a:lnB>
+                      <a:noFill/>
+                    </a:lnB>
+                    <a:noFill/>
+                  </a:tcPr>
+                </a:tc>
+                <a:tc>
+                  <a:txBody>
+                    <a:bodyPr/>
+                    <a:lstStyle/>
+                    <a:p>
+                      <a:pPr algn="l" fontAlgn="b"/>
+                      <a:r>
+                        <a:rPr lang="en-US" sz="1200" b="0" i="0" u="none" strike="noStrike">
+                          <a:solidFill>
+                            <a:srgbClr val="000000"/>
+                          </a:solidFill>
+                          <a:effectLst/>
+                          <a:latin typeface="Aptos Narrow" panose="020B0004020202020204" pitchFamily="34" charset="0"/>
+                        </a:rPr>
+                        <a:t>Status</a:t>
+                      </a:r>
+                    </a:p>
+                  </a:txBody>
+                  <a:tcPr marL="9525" marR="9525" marT="9525" marB="0" anchor="b">
+                    <a:lnL>
+                      <a:noFill/>
+                    </a:lnL>
+                    <a:lnR>
+                      <a:noFill/>
+                    </a:lnR>
+                    <a:lnT>
+                      <a:noFill/>
+                    </a:lnT>
+                    <a:lnB>
+                      <a:noFill/>
+                    </a:lnB>
+                    <a:noFill/>
+                  </a:tcPr>
+                </a:tc>
+                <a:tc>
+                  <a:txBody>
+                    <a:bodyPr/>
+                    <a:lstStyle/>
+                    <a:p>
+                      <a:pPr algn="l" fontAlgn="b"/>
+                      <a:endParaRPr lang="en-US" sz="1200" b="0" i="0" u="none" strike="noStrike">
+                        <a:solidFill>
+                          <a:srgbClr val="000000"/>
+                        </a:solidFill>
+                        <a:effectLst/>
+                        <a:latin typeface="Aptos Narrow" panose="020B0004020202020204" pitchFamily="34" charset="0"/>
+                      </a:endParaRPr>
+                    </a:p>
+                  </a:txBody>
+                  <a:tcPr marL="9525" marR="9525" marT="9525" marB="0" anchor="b">
+                    <a:lnL>
+                      <a:noFill/>
+                    </a:lnL>
+                    <a:lnR>
+                      <a:noFill/>
+                    </a:lnR>
+                    <a:lnT>
+                      <a:noFill/>
+                    </a:lnT>
+                    <a:lnB>
+                      <a:noFill/>
+                    </a:lnB>
+                    <a:noFill/>
+                  </a:tcPr>
+                </a:tc>
+                <a:extLst>
+                  <a:ext uri="{0D108BD9-81ED-4DB2-BD59-A6C34878D82A}">
+                    <a16:rowId xmlns:a16="http://schemas.microsoft.com/office/drawing/2014/main" val="3951273260"/>
+                  </a:ext>
+                </a:extLst>
+              </a:tr>
+              <a:tr h="203200">
+                <a:tc>
+                  <a:txBody>
+                    <a:bodyPr/>
+                    <a:lstStyle/>
+                    <a:p>
+                      <a:pPr algn="l" fontAlgn="b"/>
+                      <a:r>
+                        <a:rPr lang="en-US" sz="1200" b="0" i="0" u="none" strike="noStrike">
+                          <a:solidFill>
+                            <a:srgbClr val="000000"/>
+                          </a:solidFill>
+                          <a:effectLst/>
+                          <a:latin typeface="Aptos Narrow" panose="020B0004020202020204" pitchFamily="34" charset="0"/>
+                        </a:rPr>
+                        <a:t>A0068</a:t>
+                      </a:r>
+                    </a:p>
+                  </a:txBody>
+                  <a:tcPr marL="9525" marR="9525" marT="9525" marB="0" anchor="b">
+                    <a:lnL>
+                      <a:noFill/>
+                    </a:lnL>
+                    <a:lnR>
+                      <a:noFill/>
+                    </a:lnR>
+                    <a:lnT>
+                      <a:noFill/>
+                    </a:lnT>
+                    <a:lnB>
+                      <a:noFill/>
+                    </a:lnB>
+                    <a:noFill/>
+                  </a:tcPr>
+                </a:tc>
+                <a:tc>
+                  <a:txBody>
+                    <a:bodyPr/>
+                    <a:lstStyle/>
+                    <a:p>
+                      <a:pPr algn="l" fontAlgn="b"/>
+                      <a:r>
+                        <a:rPr lang="en-US" sz="1200" b="0" i="0" u="none" strike="noStrike">
+                          <a:solidFill>
+                            <a:srgbClr val="000000"/>
+                          </a:solidFill>
+                          <a:effectLst/>
+                          <a:latin typeface="Aptos Narrow" panose="020B0004020202020204" pitchFamily="34" charset="0"/>
+                        </a:rPr>
+                        <a:t>Werk Nord</a:t>
+                      </a:r>
+                    </a:p>
+                  </a:txBody>
+                  <a:tcPr marL="9525" marR="9525" marT="9525" marB="0" anchor="b">
+                    <a:lnL>
+                      <a:noFill/>
+                    </a:lnL>
+                    <a:lnR>
+                      <a:noFill/>
+                    </a:lnR>
+                    <a:lnT>
+                      <a:noFill/>
+                    </a:lnT>
+                    <a:lnB>
+                      <a:noFill/>
+                    </a:lnB>
+                    <a:noFill/>
+                  </a:tcPr>
+                </a:tc>
+                <a:tc>
+                  <a:txBody>
+                    <a:bodyPr/>
+                    <a:lstStyle/>
+                    <a:p>
+                      <a:pPr algn="l" fontAlgn="b"/>
+                      <a:r>
+                        <a:rPr lang="en-US" sz="1200" b="0" i="0" u="none" strike="noStrike">
+                          <a:solidFill>
+                            <a:srgbClr val="000000"/>
+                          </a:solidFill>
+                          <a:effectLst/>
+                          <a:latin typeface="Aptos Narrow" panose="020B0004020202020204" pitchFamily="34" charset="0"/>
+                        </a:rPr>
+                        <a:t>D400</a:t>
+                      </a:r>
+                    </a:p>
+                  </a:txBody>
+                  <a:tcPr marL="9525" marR="9525" marT="9525" marB="0" anchor="b">
+                    <a:lnL>
+                      <a:noFill/>
+                    </a:lnL>
+                    <a:lnR>
+                      <a:noFill/>
+                    </a:lnR>
+                    <a:lnT>
+                      <a:noFill/>
+                    </a:lnT>
+                    <a:lnB>
+                      <a:noFill/>
+                    </a:lnB>
+                    <a:noFill/>
+                  </a:tcPr>
+                </a:tc>
+                <a:tc>
+                  <a:txBody>
+                    <a:bodyPr/>
+                    <a:lstStyle/>
+                    <a:p>
+                      <a:pPr algn="r" fontAlgn="b"/>
+                      <a:r>
+                        <a:rPr lang="en-US" sz="1200" b="0" i="0" u="none" strike="noStrike">
+                          <a:solidFill>
+                            <a:srgbClr val="000000"/>
+                          </a:solidFill>
+                          <a:effectLst/>
+                          <a:latin typeface="Aptos Narrow" panose="020B0004020202020204" pitchFamily="34" charset="0"/>
+                        </a:rPr>
+                        <a:t>187</a:t>
+                      </a:r>
+                    </a:p>
+                  </a:txBody>
+                  <a:tcPr marL="9525" marR="9525" marT="9525" marB="0" anchor="b">
+                    <a:lnL>
+                      <a:noFill/>
+                    </a:lnL>
+                    <a:lnR>
+                      <a:noFill/>
+                    </a:lnR>
+                    <a:lnT>
+                      <a:noFill/>
+                    </a:lnT>
+                    <a:lnB>
+                      <a:noFill/>
+                    </a:lnB>
+                    <a:noFill/>
+                  </a:tcPr>
+                </a:tc>
+                <a:tc>
+                  <a:txBody>
+                    <a:bodyPr/>
+                    <a:lstStyle/>
+                    <a:p>
+                      <a:pPr algn="l" fontAlgn="b"/>
+                      <a:r>
+                        <a:rPr lang="en-US" sz="1200" b="0" i="0" u="none" strike="noStrike">
+                          <a:solidFill>
+                            <a:srgbClr val="000000"/>
+                          </a:solidFill>
+                          <a:effectLst/>
+                          <a:latin typeface="Aptos Narrow" panose="020B0004020202020204" pitchFamily="34" charset="0"/>
+                        </a:rPr>
+                        <a:t>D01</a:t>
+                      </a:r>
+                    </a:p>
+                  </a:txBody>
+                  <a:tcPr marL="9525" marR="9525" marT="9525" marB="0" anchor="b">
+                    <a:lnL>
+                      <a:noFill/>
+                    </a:lnL>
+                    <a:lnR>
+                      <a:noFill/>
+                    </a:lnR>
+                    <a:lnT>
+                      <a:noFill/>
+                    </a:lnT>
+                    <a:lnB>
+                      <a:noFill/>
+                    </a:lnB>
+                    <a:noFill/>
+                  </a:tcPr>
+                </a:tc>
+                <a:tc>
+                  <a:txBody>
+                    <a:bodyPr/>
+                    <a:lstStyle/>
+                    <a:p>
+                      <a:pPr algn="r" fontAlgn="b"/>
+                      <a:r>
+                        <a:rPr lang="en-US" sz="1200" b="0" i="0" u="none" strike="noStrike">
+                          <a:solidFill>
+                            <a:srgbClr val="000000"/>
+                          </a:solidFill>
+                          <a:effectLst/>
+                          <a:latin typeface="Aptos Narrow" panose="020B0004020202020204" pitchFamily="34" charset="0"/>
+                        </a:rPr>
+                        <a:t>16.4</a:t>
+                      </a:r>
+                    </a:p>
+                  </a:txBody>
+                  <a:tcPr marL="9525" marR="9525" marT="9525" marB="0" anchor="b">
+                    <a:lnL>
+                      <a:noFill/>
+                    </a:lnL>
+                    <a:lnR>
+                      <a:noFill/>
+                    </a:lnR>
+                    <a:lnT>
+                      <a:noFill/>
+                    </a:lnT>
+                    <a:lnB>
+                      <a:noFill/>
+                    </a:lnB>
+                    <a:noFill/>
+                  </a:tcPr>
+                </a:tc>
+                <a:tc>
+                  <a:txBody>
+                    <a:bodyPr/>
+                    <a:lstStyle/>
+                    <a:p>
+                      <a:pPr algn="r" fontAlgn="b"/>
+                      <a:r>
+                        <a:rPr lang="en-US" sz="1200" b="0" i="0" u="none" strike="noStrike">
+                          <a:solidFill>
+                            <a:srgbClr val="000000"/>
+                          </a:solidFill>
+                          <a:effectLst/>
+                          <a:latin typeface="Aptos Narrow" panose="020B0004020202020204" pitchFamily="34" charset="0"/>
+                        </a:rPr>
+                        <a:t>9.8</a:t>
+                      </a:r>
+                    </a:p>
+                  </a:txBody>
+                  <a:tcPr marL="9525" marR="9525" marT="9525" marB="0" anchor="b">
+                    <a:lnL>
+                      <a:noFill/>
+                    </a:lnL>
+                    <a:lnR>
+                      <a:noFill/>
+                    </a:lnR>
+                    <a:lnT>
+                      <a:noFill/>
+                    </a:lnT>
+                    <a:lnB>
+                      <a:noFill/>
+                    </a:lnB>
+                    <a:noFill/>
+                  </a:tcPr>
+                </a:tc>
+                <a:tc>
+                  <a:txBody>
+                    <a:bodyPr/>
+                    <a:lstStyle/>
+                    <a:p>
+                      <a:pPr algn="l" fontAlgn="b"/>
+                      <a:endParaRPr lang="en-US" sz="1200" b="0" i="0" u="none" strike="noStrike">
+                        <a:solidFill>
+                          <a:srgbClr val="000000"/>
+                        </a:solidFill>
+                        <a:effectLst/>
+                        <a:latin typeface="Aptos Narrow" panose="020B0004020202020204" pitchFamily="34" charset="0"/>
+                      </a:endParaRPr>
+                    </a:p>
+                  </a:txBody>
+                  <a:tcPr marL="9525" marR="9525" marT="9525" marB="0" anchor="b">
+                    <a:lnL>
+                      <a:noFill/>
+                    </a:lnL>
+                    <a:lnR>
+                      <a:noFill/>
+                    </a:lnR>
+                    <a:lnT>
+                      <a:noFill/>
+                    </a:lnT>
+                    <a:lnB>
+                      <a:noFill/>
+                    </a:lnB>
+                    <a:noFill/>
+                  </a:tcPr>
+                </a:tc>
+                <a:tc>
+                  <a:txBody>
+                    <a:bodyPr/>
+                    <a:lstStyle/>
+                    <a:p>
+                      <a:pPr algn="l" fontAlgn="b"/>
+                      <a:r>
+                        <a:rPr lang="en-US" sz="1200" b="0" i="0" u="none" strike="noStrike">
+                          <a:solidFill>
+                            <a:srgbClr val="000000"/>
+                          </a:solidFill>
+                          <a:effectLst/>
+                          <a:latin typeface="Aptos Narrow" panose="020B0004020202020204" pitchFamily="34" charset="0"/>
+                        </a:rPr>
+                        <a:t>cm</a:t>
+                      </a:r>
+                    </a:p>
+                  </a:txBody>
+                  <a:tcPr marL="9525" marR="9525" marT="9525" marB="0" anchor="b">
+                    <a:lnL>
+                      <a:noFill/>
+                    </a:lnL>
+                    <a:lnR>
+                      <a:noFill/>
+                    </a:lnR>
+                    <a:lnT>
+                      <a:noFill/>
+                    </a:lnT>
+                    <a:lnB>
+                      <a:noFill/>
+                    </a:lnB>
+                    <a:noFill/>
+                  </a:tcPr>
+                </a:tc>
+                <a:tc>
+                  <a:txBody>
+                    <a:bodyPr/>
+                    <a:lstStyle/>
+                    <a:p>
+                      <a:pPr algn="r" fontAlgn="b"/>
+                      <a:r>
+                        <a:rPr lang="en-US" sz="1200" b="0" i="0" u="none" strike="noStrike">
+                          <a:solidFill>
+                            <a:srgbClr val="000000"/>
+                          </a:solidFill>
+                          <a:effectLst/>
+                          <a:latin typeface="Aptos Narrow" panose="020B0004020202020204" pitchFamily="34" charset="0"/>
+                        </a:rPr>
+                        <a:t>2</a:t>
+                      </a:r>
+                    </a:p>
+                  </a:txBody>
+                  <a:tcPr marL="9525" marR="9525" marT="9525" marB="0" anchor="b">
+                    <a:lnL>
+                      <a:noFill/>
+                    </a:lnL>
+                    <a:lnR>
+                      <a:noFill/>
+                    </a:lnR>
+                    <a:lnT>
+                      <a:noFill/>
+                    </a:lnT>
+                    <a:lnB>
+                      <a:noFill/>
+                    </a:lnB>
+                    <a:noFill/>
+                  </a:tcPr>
+                </a:tc>
+                <a:tc>
+                  <a:txBody>
+                    <a:bodyPr/>
+                    <a:lstStyle/>
+                    <a:p>
+                      <a:pPr algn="l" fontAlgn="b"/>
+                      <a:r>
+                        <a:rPr lang="en-US" sz="1200" b="0" i="0" u="none" strike="noStrike">
+                          <a:solidFill>
+                            <a:srgbClr val="000000"/>
+                          </a:solidFill>
+                          <a:effectLst/>
+                          <a:latin typeface="Aptos Narrow" panose="020B0004020202020204" pitchFamily="34" charset="0"/>
+                        </a:rPr>
+                        <a:t>Freigegeben</a:t>
+                      </a:r>
+                    </a:p>
+                  </a:txBody>
+                  <a:tcPr marL="9525" marR="9525" marT="9525" marB="0" anchor="b">
+                    <a:lnL>
+                      <a:noFill/>
+                    </a:lnL>
+                    <a:lnR>
+                      <a:noFill/>
+                    </a:lnR>
+                    <a:lnT>
+                      <a:noFill/>
+                    </a:lnT>
+                    <a:lnB>
+                      <a:noFill/>
+                    </a:lnB>
+                    <a:noFill/>
+                  </a:tcPr>
+                </a:tc>
+                <a:tc>
+                  <a:txBody>
+                    <a:bodyPr/>
+                    <a:lstStyle/>
+                    <a:p>
+                      <a:pPr algn="l" fontAlgn="b"/>
+                      <a:endParaRPr lang="en-US" sz="1200" b="0" i="0" u="none" strike="noStrike">
+                        <a:solidFill>
+                          <a:srgbClr val="000000"/>
+                        </a:solidFill>
+                        <a:effectLst/>
+                        <a:latin typeface="Aptos Narrow" panose="020B0004020202020204" pitchFamily="34" charset="0"/>
+                      </a:endParaRPr>
+                    </a:p>
+                  </a:txBody>
+                  <a:tcPr marL="9525" marR="9525" marT="9525" marB="0" anchor="b">
+                    <a:lnL>
+                      <a:noFill/>
+                    </a:lnL>
+                    <a:lnR>
+                      <a:noFill/>
+                    </a:lnR>
+                    <a:lnT>
+                      <a:noFill/>
+                    </a:lnT>
+                    <a:lnB>
+                      <a:noFill/>
+                    </a:lnB>
+                    <a:noFill/>
+                  </a:tcPr>
+                </a:tc>
+                <a:extLst>
+                  <a:ext uri="{0D108BD9-81ED-4DB2-BD59-A6C34878D82A}">
+                    <a16:rowId xmlns:a16="http://schemas.microsoft.com/office/drawing/2014/main" val="63955467"/>
+                  </a:ext>
+                </a:extLst>
+              </a:tr>
+              <a:tr h="203200">
+                <a:tc>
+                  <a:txBody>
+                    <a:bodyPr/>
+                    <a:lstStyle/>
+                    <a:p>
+                      <a:pPr algn="l" fontAlgn="b"/>
+                      <a:r>
+                        <a:rPr lang="en-US" sz="1200" b="0" i="0" u="none" strike="noStrike">
+                          <a:solidFill>
+                            <a:srgbClr val="000000"/>
+                          </a:solidFill>
+                          <a:effectLst/>
+                          <a:latin typeface="Aptos Narrow" panose="020B0004020202020204" pitchFamily="34" charset="0"/>
+                        </a:rPr>
+                        <a:t>A0068</a:t>
+                      </a:r>
+                    </a:p>
+                  </a:txBody>
+                  <a:tcPr marL="9525" marR="9525" marT="9525" marB="0" anchor="b">
+                    <a:lnL>
+                      <a:noFill/>
+                    </a:lnL>
+                    <a:lnR>
+                      <a:noFill/>
+                    </a:lnR>
+                    <a:lnT>
+                      <a:noFill/>
+                    </a:lnT>
+                    <a:lnB>
+                      <a:noFill/>
+                    </a:lnB>
+                    <a:noFill/>
+                  </a:tcPr>
+                </a:tc>
+                <a:tc>
+                  <a:txBody>
+                    <a:bodyPr/>
+                    <a:lstStyle/>
+                    <a:p>
+                      <a:pPr algn="l" fontAlgn="b"/>
+                      <a:r>
+                        <a:rPr lang="en-US" sz="1200" b="0" i="0" u="none" strike="noStrike">
+                          <a:solidFill>
+                            <a:srgbClr val="000000"/>
+                          </a:solidFill>
+                          <a:effectLst/>
+                          <a:latin typeface="Aptos Narrow" panose="020B0004020202020204" pitchFamily="34" charset="0"/>
+                        </a:rPr>
+                        <a:t>Werk Nord</a:t>
+                      </a:r>
+                    </a:p>
+                  </a:txBody>
+                  <a:tcPr marL="9525" marR="9525" marT="9525" marB="0" anchor="b">
+                    <a:lnL>
+                      <a:noFill/>
+                    </a:lnL>
+                    <a:lnR>
+                      <a:noFill/>
+                    </a:lnR>
+                    <a:lnT>
+                      <a:noFill/>
+                    </a:lnT>
+                    <a:lnB>
+                      <a:noFill/>
+                    </a:lnB>
+                    <a:noFill/>
+                  </a:tcPr>
+                </a:tc>
+                <a:tc>
+                  <a:txBody>
+                    <a:bodyPr/>
+                    <a:lstStyle/>
+                    <a:p>
+                      <a:pPr algn="l" fontAlgn="b"/>
+                      <a:r>
+                        <a:rPr lang="en-US" sz="1200" b="0" i="0" u="none" strike="noStrike">
+                          <a:solidFill>
+                            <a:srgbClr val="000000"/>
+                          </a:solidFill>
+                          <a:effectLst/>
+                          <a:latin typeface="Aptos Narrow" panose="020B0004020202020204" pitchFamily="34" charset="0"/>
+                        </a:rPr>
+                        <a:t>D400</a:t>
+                      </a:r>
+                    </a:p>
+                  </a:txBody>
+                  <a:tcPr marL="9525" marR="9525" marT="9525" marB="0" anchor="b">
+                    <a:lnL>
+                      <a:noFill/>
+                    </a:lnL>
+                    <a:lnR>
+                      <a:noFill/>
+                    </a:lnR>
+                    <a:lnT>
+                      <a:noFill/>
+                    </a:lnT>
+                    <a:lnB>
+                      <a:noFill/>
+                    </a:lnB>
+                    <a:noFill/>
+                  </a:tcPr>
+                </a:tc>
+                <a:tc>
+                  <a:txBody>
+                    <a:bodyPr/>
+                    <a:lstStyle/>
+                    <a:p>
+                      <a:pPr algn="r" fontAlgn="b"/>
+                      <a:r>
+                        <a:rPr lang="en-US" sz="1200" b="0" i="0" u="none" strike="noStrike">
+                          <a:solidFill>
+                            <a:srgbClr val="000000"/>
+                          </a:solidFill>
+                          <a:effectLst/>
+                          <a:latin typeface="Aptos Narrow" panose="020B0004020202020204" pitchFamily="34" charset="0"/>
+                        </a:rPr>
+                        <a:t>187</a:t>
+                      </a:r>
+                    </a:p>
+                  </a:txBody>
+                  <a:tcPr marL="9525" marR="9525" marT="9525" marB="0" anchor="b">
+                    <a:lnL>
+                      <a:noFill/>
+                    </a:lnL>
+                    <a:lnR>
+                      <a:noFill/>
+                    </a:lnR>
+                    <a:lnT>
+                      <a:noFill/>
+                    </a:lnT>
+                    <a:lnB>
+                      <a:noFill/>
+                    </a:lnB>
+                    <a:noFill/>
+                  </a:tcPr>
+                </a:tc>
+                <a:tc>
+                  <a:txBody>
+                    <a:bodyPr/>
+                    <a:lstStyle/>
+                    <a:p>
+                      <a:pPr algn="l" fontAlgn="b"/>
+                      <a:r>
+                        <a:rPr lang="en-US" sz="1200" b="0" i="0" u="none" strike="noStrike">
+                          <a:solidFill>
+                            <a:srgbClr val="000000"/>
+                          </a:solidFill>
+                          <a:effectLst/>
+                          <a:latin typeface="Aptos Narrow" panose="020B0004020202020204" pitchFamily="34" charset="0"/>
+                        </a:rPr>
+                        <a:t>D01</a:t>
+                      </a:r>
+                    </a:p>
+                  </a:txBody>
+                  <a:tcPr marL="9525" marR="9525" marT="9525" marB="0" anchor="b">
+                    <a:lnL>
+                      <a:noFill/>
+                    </a:lnL>
+                    <a:lnR>
+                      <a:noFill/>
+                    </a:lnR>
+                    <a:lnT>
+                      <a:noFill/>
+                    </a:lnT>
+                    <a:lnB>
+                      <a:noFill/>
+                    </a:lnB>
+                    <a:noFill/>
+                  </a:tcPr>
+                </a:tc>
+                <a:tc>
+                  <a:txBody>
+                    <a:bodyPr/>
+                    <a:lstStyle/>
+                    <a:p>
+                      <a:pPr algn="r" fontAlgn="b"/>
+                      <a:r>
+                        <a:rPr lang="en-US" sz="1200" b="0" i="0" u="none" strike="noStrike">
+                          <a:solidFill>
+                            <a:srgbClr val="000000"/>
+                          </a:solidFill>
+                          <a:effectLst/>
+                          <a:latin typeface="Aptos Narrow" panose="020B0004020202020204" pitchFamily="34" charset="0"/>
+                        </a:rPr>
+                        <a:t>16.4</a:t>
+                      </a:r>
+                    </a:p>
+                  </a:txBody>
+                  <a:tcPr marL="9525" marR="9525" marT="9525" marB="0" anchor="b">
+                    <a:lnL>
+                      <a:noFill/>
+                    </a:lnL>
+                    <a:lnR>
+                      <a:noFill/>
+                    </a:lnR>
+                    <a:lnT>
+                      <a:noFill/>
+                    </a:lnT>
+                    <a:lnB>
+                      <a:noFill/>
+                    </a:lnB>
+                    <a:noFill/>
+                  </a:tcPr>
+                </a:tc>
+                <a:tc>
+                  <a:txBody>
+                    <a:bodyPr/>
+                    <a:lstStyle/>
+                    <a:p>
+                      <a:pPr algn="r" fontAlgn="b"/>
+                      <a:r>
+                        <a:rPr lang="en-US" sz="1200" b="0" i="0" u="none" strike="noStrike">
+                          <a:solidFill>
+                            <a:srgbClr val="000000"/>
+                          </a:solidFill>
+                          <a:effectLst/>
+                          <a:latin typeface="Aptos Narrow" panose="020B0004020202020204" pitchFamily="34" charset="0"/>
+                        </a:rPr>
+                        <a:t>9.8</a:t>
+                      </a:r>
+                    </a:p>
+                  </a:txBody>
+                  <a:tcPr marL="9525" marR="9525" marT="9525" marB="0" anchor="b">
+                    <a:lnL>
+                      <a:noFill/>
+                    </a:lnL>
+                    <a:lnR>
+                      <a:noFill/>
+                    </a:lnR>
+                    <a:lnT>
+                      <a:noFill/>
+                    </a:lnT>
+                    <a:lnB>
+                      <a:noFill/>
+                    </a:lnB>
+                    <a:noFill/>
+                  </a:tcPr>
+                </a:tc>
+                <a:tc>
+                  <a:txBody>
+                    <a:bodyPr/>
+                    <a:lstStyle/>
+                    <a:p>
+                      <a:pPr algn="l" fontAlgn="b"/>
+                      <a:endParaRPr lang="en-US" sz="1200" b="0" i="0" u="none" strike="noStrike">
+                        <a:solidFill>
+                          <a:srgbClr val="000000"/>
+                        </a:solidFill>
+                        <a:effectLst/>
+                        <a:latin typeface="Aptos Narrow" panose="020B0004020202020204" pitchFamily="34" charset="0"/>
+                      </a:endParaRPr>
+                    </a:p>
+                  </a:txBody>
+                  <a:tcPr marL="9525" marR="9525" marT="9525" marB="0" anchor="b">
+                    <a:lnL>
+                      <a:noFill/>
+                    </a:lnL>
+                    <a:lnR>
+                      <a:noFill/>
+                    </a:lnR>
+                    <a:lnT>
+                      <a:noFill/>
+                    </a:lnT>
+                    <a:lnB>
+                      <a:noFill/>
+                    </a:lnB>
+                    <a:noFill/>
+                  </a:tcPr>
+                </a:tc>
+                <a:tc>
+                  <a:txBody>
+                    <a:bodyPr/>
+                    <a:lstStyle/>
+                    <a:p>
+                      <a:pPr algn="l" fontAlgn="b"/>
+                      <a:r>
+                        <a:rPr lang="en-US" sz="1200" b="0" i="0" u="none" strike="noStrike">
+                          <a:solidFill>
+                            <a:srgbClr val="000000"/>
+                          </a:solidFill>
+                          <a:effectLst/>
+                          <a:latin typeface="Aptos Narrow" panose="020B0004020202020204" pitchFamily="34" charset="0"/>
+                        </a:rPr>
+                        <a:t>cm</a:t>
+                      </a:r>
+                    </a:p>
+                  </a:txBody>
+                  <a:tcPr marL="9525" marR="9525" marT="9525" marB="0" anchor="b">
+                    <a:lnL>
+                      <a:noFill/>
+                    </a:lnL>
+                    <a:lnR>
+                      <a:noFill/>
+                    </a:lnR>
+                    <a:lnT>
+                      <a:noFill/>
+                    </a:lnT>
+                    <a:lnB>
+                      <a:noFill/>
+                    </a:lnB>
+                    <a:noFill/>
+                  </a:tcPr>
+                </a:tc>
+                <a:tc>
+                  <a:txBody>
+                    <a:bodyPr/>
+                    <a:lstStyle/>
+                    <a:p>
+                      <a:pPr algn="r" fontAlgn="b"/>
+                      <a:r>
+                        <a:rPr lang="en-US" sz="1200" b="0" i="0" u="none" strike="noStrike">
+                          <a:solidFill>
+                            <a:srgbClr val="000000"/>
+                          </a:solidFill>
+                          <a:effectLst/>
+                          <a:latin typeface="Aptos Narrow" panose="020B0004020202020204" pitchFamily="34" charset="0"/>
+                        </a:rPr>
+                        <a:t>2</a:t>
+                      </a:r>
+                    </a:p>
+                  </a:txBody>
+                  <a:tcPr marL="9525" marR="9525" marT="9525" marB="0" anchor="b">
+                    <a:lnL>
+                      <a:noFill/>
+                    </a:lnL>
+                    <a:lnR>
+                      <a:noFill/>
+                    </a:lnR>
+                    <a:lnT>
+                      <a:noFill/>
+                    </a:lnT>
+                    <a:lnB>
+                      <a:noFill/>
+                    </a:lnB>
+                    <a:noFill/>
+                  </a:tcPr>
+                </a:tc>
+                <a:tc>
+                  <a:txBody>
+                    <a:bodyPr/>
+                    <a:lstStyle/>
+                    <a:p>
+                      <a:pPr algn="l" fontAlgn="b"/>
+                      <a:r>
+                        <a:rPr lang="en-US" sz="1200" b="0" i="0" u="none" strike="noStrike">
+                          <a:solidFill>
+                            <a:srgbClr val="000000"/>
+                          </a:solidFill>
+                          <a:effectLst/>
+                          <a:latin typeface="Aptos Narrow" panose="020B0004020202020204" pitchFamily="34" charset="0"/>
+                        </a:rPr>
+                        <a:t>Ausgelistet</a:t>
+                      </a:r>
+                    </a:p>
+                  </a:txBody>
+                  <a:tcPr marL="9525" marR="9525" marT="9525" marB="0" anchor="b">
+                    <a:lnL>
+                      <a:noFill/>
+                    </a:lnL>
+                    <a:lnR>
+                      <a:noFill/>
+                    </a:lnR>
+                    <a:lnT>
+                      <a:noFill/>
+                    </a:lnT>
+                    <a:lnB>
+                      <a:noFill/>
+                    </a:lnB>
+                    <a:noFill/>
+                  </a:tcPr>
+                </a:tc>
+                <a:tc>
+                  <a:txBody>
+                    <a:bodyPr/>
+                    <a:lstStyle/>
+                    <a:p>
+                      <a:pPr algn="l" fontAlgn="b"/>
+                      <a:endParaRPr lang="en-US" sz="1200" b="0" i="0" u="none" strike="noStrike">
+                        <a:solidFill>
+                          <a:srgbClr val="000000"/>
+                        </a:solidFill>
+                        <a:effectLst/>
+                        <a:latin typeface="Aptos Narrow" panose="020B0004020202020204" pitchFamily="34" charset="0"/>
+                      </a:endParaRPr>
+                    </a:p>
+                  </a:txBody>
+                  <a:tcPr marL="9525" marR="9525" marT="9525" marB="0" anchor="b">
+                    <a:lnL>
+                      <a:noFill/>
+                    </a:lnL>
+                    <a:lnR>
+                      <a:noFill/>
+                    </a:lnR>
+                    <a:lnT>
+                      <a:noFill/>
+                    </a:lnT>
+                    <a:lnB>
+                      <a:noFill/>
+                    </a:lnB>
+                    <a:noFill/>
+                  </a:tcPr>
+                </a:tc>
+                <a:extLst>
+                  <a:ext uri="{0D108BD9-81ED-4DB2-BD59-A6C34878D82A}">
+                    <a16:rowId xmlns:a16="http://schemas.microsoft.com/office/drawing/2014/main" val="219198035"/>
+                  </a:ext>
+                </a:extLst>
+              </a:tr>
+              <a:tr h="203200">
+                <a:tc>
+                  <a:txBody>
+                    <a:bodyPr/>
+                    <a:lstStyle/>
+                    <a:p>
+                      <a:pPr algn="l" fontAlgn="b"/>
+                      <a:r>
+                        <a:rPr lang="en-US" sz="1200" b="0" i="0" u="none" strike="noStrike">
+                          <a:solidFill>
+                            <a:srgbClr val="000000"/>
+                          </a:solidFill>
+                          <a:effectLst/>
+                          <a:latin typeface="Aptos Narrow" panose="020B0004020202020204" pitchFamily="34" charset="0"/>
+                        </a:rPr>
+                        <a:t>A0093</a:t>
+                      </a:r>
+                    </a:p>
+                  </a:txBody>
+                  <a:tcPr marL="9525" marR="9525" marT="9525" marB="0" anchor="b">
+                    <a:lnL>
+                      <a:noFill/>
+                    </a:lnL>
+                    <a:lnR>
+                      <a:noFill/>
+                    </a:lnR>
+                    <a:lnT>
+                      <a:noFill/>
+                    </a:lnT>
+                    <a:lnB>
+                      <a:noFill/>
+                    </a:lnB>
+                    <a:noFill/>
+                  </a:tcPr>
+                </a:tc>
+                <a:tc>
+                  <a:txBody>
+                    <a:bodyPr/>
+                    <a:lstStyle/>
+                    <a:p>
+                      <a:pPr algn="l" fontAlgn="b"/>
+                      <a:r>
+                        <a:rPr lang="en-US" sz="1200" b="0" i="0" u="none" strike="noStrike">
+                          <a:solidFill>
+                            <a:srgbClr val="000000"/>
+                          </a:solidFill>
+                          <a:effectLst/>
+                          <a:latin typeface="Aptos Narrow" panose="020B0004020202020204" pitchFamily="34" charset="0"/>
+                        </a:rPr>
+                        <a:t>Werk S√ºd</a:t>
+                      </a:r>
+                    </a:p>
+                  </a:txBody>
+                  <a:tcPr marL="9525" marR="9525" marT="9525" marB="0" anchor="b">
+                    <a:lnL>
+                      <a:noFill/>
+                    </a:lnL>
+                    <a:lnR>
+                      <a:noFill/>
+                    </a:lnR>
+                    <a:lnT>
+                      <a:noFill/>
+                    </a:lnT>
+                    <a:lnB>
+                      <a:noFill/>
+                    </a:lnB>
+                    <a:noFill/>
+                  </a:tcPr>
+                </a:tc>
+                <a:tc>
+                  <a:txBody>
+                    <a:bodyPr/>
+                    <a:lstStyle/>
+                    <a:p>
+                      <a:pPr algn="l" fontAlgn="b"/>
+                      <a:r>
+                        <a:rPr lang="en-US" sz="1200" b="0" i="0" u="none" strike="noStrike">
+                          <a:solidFill>
+                            <a:srgbClr val="000000"/>
+                          </a:solidFill>
+                          <a:effectLst/>
+                          <a:latin typeface="Aptos Narrow" panose="020B0004020202020204" pitchFamily="34" charset="0"/>
+                        </a:rPr>
+                        <a:t>B200</a:t>
+                      </a:r>
+                    </a:p>
+                  </a:txBody>
+                  <a:tcPr marL="9525" marR="9525" marT="9525" marB="0" anchor="b">
+                    <a:lnL>
+                      <a:noFill/>
+                    </a:lnL>
+                    <a:lnR>
+                      <a:noFill/>
+                    </a:lnR>
+                    <a:lnT>
+                      <a:noFill/>
+                    </a:lnT>
+                    <a:lnB>
+                      <a:noFill/>
+                    </a:lnB>
+                    <a:noFill/>
+                  </a:tcPr>
+                </a:tc>
+                <a:tc>
+                  <a:txBody>
+                    <a:bodyPr/>
+                    <a:lstStyle/>
+                    <a:p>
+                      <a:pPr algn="r" fontAlgn="b"/>
+                      <a:r>
+                        <a:rPr lang="en-US" sz="1200" b="0" i="0" u="none" strike="noStrike">
+                          <a:solidFill>
+                            <a:srgbClr val="000000"/>
+                          </a:solidFill>
+                          <a:effectLst/>
+                          <a:latin typeface="Aptos Narrow" panose="020B0004020202020204" pitchFamily="34" charset="0"/>
+                        </a:rPr>
+                        <a:t>63</a:t>
+                      </a:r>
+                    </a:p>
+                  </a:txBody>
+                  <a:tcPr marL="9525" marR="9525" marT="9525" marB="0" anchor="b">
+                    <a:lnL>
+                      <a:noFill/>
+                    </a:lnL>
+                    <a:lnR>
+                      <a:noFill/>
+                    </a:lnR>
+                    <a:lnT>
+                      <a:noFill/>
+                    </a:lnT>
+                    <a:lnB>
+                      <a:noFill/>
+                    </a:lnB>
+                    <a:noFill/>
+                  </a:tcPr>
+                </a:tc>
+                <a:tc>
+                  <a:txBody>
+                    <a:bodyPr/>
+                    <a:lstStyle/>
+                    <a:p>
+                      <a:pPr algn="l" fontAlgn="b"/>
+                      <a:r>
+                        <a:rPr lang="en-US" sz="1200" b="0" i="0" u="none" strike="noStrike">
+                          <a:solidFill>
+                            <a:srgbClr val="000000"/>
+                          </a:solidFill>
+                          <a:effectLst/>
+                          <a:latin typeface="Aptos Narrow" panose="020B0004020202020204" pitchFamily="34" charset="0"/>
+                        </a:rPr>
+                        <a:t>D04</a:t>
+                      </a:r>
+                    </a:p>
+                  </a:txBody>
+                  <a:tcPr marL="9525" marR="9525" marT="9525" marB="0" anchor="b">
+                    <a:lnL>
+                      <a:noFill/>
+                    </a:lnL>
+                    <a:lnR>
+                      <a:noFill/>
+                    </a:lnR>
+                    <a:lnT>
+                      <a:noFill/>
+                    </a:lnT>
+                    <a:lnB>
+                      <a:noFill/>
+                    </a:lnB>
+                    <a:noFill/>
+                  </a:tcPr>
+                </a:tc>
+                <a:tc>
+                  <a:txBody>
+                    <a:bodyPr/>
+                    <a:lstStyle/>
+                    <a:p>
+                      <a:pPr algn="r" fontAlgn="b"/>
+                      <a:r>
+                        <a:rPr lang="en-US" sz="1200" b="0" i="0" u="none" strike="noStrike">
+                          <a:solidFill>
+                            <a:srgbClr val="000000"/>
+                          </a:solidFill>
+                          <a:effectLst/>
+                          <a:latin typeface="Aptos Narrow" panose="020B0004020202020204" pitchFamily="34" charset="0"/>
+                        </a:rPr>
+                        <a:t>11.8</a:t>
+                      </a:r>
+                    </a:p>
+                  </a:txBody>
+                  <a:tcPr marL="9525" marR="9525" marT="9525" marB="0" anchor="b">
+                    <a:lnL>
+                      <a:noFill/>
+                    </a:lnL>
+                    <a:lnR>
+                      <a:noFill/>
+                    </a:lnR>
+                    <a:lnT>
+                      <a:noFill/>
+                    </a:lnT>
+                    <a:lnB>
+                      <a:noFill/>
+                    </a:lnB>
+                    <a:noFill/>
+                  </a:tcPr>
+                </a:tc>
+                <a:tc>
+                  <a:txBody>
+                    <a:bodyPr/>
+                    <a:lstStyle/>
+                    <a:p>
+                      <a:pPr algn="r" fontAlgn="b"/>
+                      <a:r>
+                        <a:rPr lang="en-US" sz="1200" b="0" i="0" u="none" strike="noStrike">
+                          <a:solidFill>
+                            <a:srgbClr val="000000"/>
+                          </a:solidFill>
+                          <a:effectLst/>
+                          <a:latin typeface="Aptos Narrow" panose="020B0004020202020204" pitchFamily="34" charset="0"/>
+                        </a:rPr>
+                        <a:t>4.7</a:t>
+                      </a:r>
+                    </a:p>
+                  </a:txBody>
+                  <a:tcPr marL="9525" marR="9525" marT="9525" marB="0" anchor="b">
+                    <a:lnL>
+                      <a:noFill/>
+                    </a:lnL>
+                    <a:lnR>
+                      <a:noFill/>
+                    </a:lnR>
+                    <a:lnT>
+                      <a:noFill/>
+                    </a:lnT>
+                    <a:lnB>
+                      <a:noFill/>
+                    </a:lnB>
+                    <a:noFill/>
+                  </a:tcPr>
+                </a:tc>
+                <a:tc>
+                  <a:txBody>
+                    <a:bodyPr/>
+                    <a:lstStyle/>
+                    <a:p>
+                      <a:pPr algn="r" fontAlgn="b"/>
+                      <a:r>
+                        <a:rPr lang="en-US" sz="1200" b="0" i="0" u="none" strike="noStrike">
+                          <a:solidFill>
+                            <a:srgbClr val="000000"/>
+                          </a:solidFill>
+                          <a:effectLst/>
+                          <a:latin typeface="Aptos Narrow" panose="020B0004020202020204" pitchFamily="34" charset="0"/>
+                        </a:rPr>
+                        <a:t>4.2</a:t>
+                      </a:r>
+                    </a:p>
+                  </a:txBody>
+                  <a:tcPr marL="9525" marR="9525" marT="9525" marB="0" anchor="b">
+                    <a:lnL>
+                      <a:noFill/>
+                    </a:lnL>
+                    <a:lnR>
+                      <a:noFill/>
+                    </a:lnR>
+                    <a:lnT>
+                      <a:noFill/>
+                    </a:lnT>
+                    <a:lnB>
+                      <a:noFill/>
+                    </a:lnB>
+                    <a:noFill/>
+                  </a:tcPr>
+                </a:tc>
+                <a:tc>
+                  <a:txBody>
+                    <a:bodyPr/>
+                    <a:lstStyle/>
+                    <a:p>
+                      <a:pPr algn="l" fontAlgn="b"/>
+                      <a:r>
+                        <a:rPr lang="en-US" sz="1200" b="0" i="0" u="none" strike="noStrike">
+                          <a:solidFill>
+                            <a:srgbClr val="000000"/>
+                          </a:solidFill>
+                          <a:effectLst/>
+                          <a:latin typeface="Aptos Narrow" panose="020B0004020202020204" pitchFamily="34" charset="0"/>
+                        </a:rPr>
+                        <a:t>cm</a:t>
+                      </a:r>
+                    </a:p>
+                  </a:txBody>
+                  <a:tcPr marL="9525" marR="9525" marT="9525" marB="0" anchor="b">
+                    <a:lnL>
+                      <a:noFill/>
+                    </a:lnL>
+                    <a:lnR>
+                      <a:noFill/>
+                    </a:lnR>
+                    <a:lnT>
+                      <a:noFill/>
+                    </a:lnT>
+                    <a:lnB>
+                      <a:noFill/>
+                    </a:lnB>
+                    <a:noFill/>
+                  </a:tcPr>
+                </a:tc>
+                <a:tc>
+                  <a:txBody>
+                    <a:bodyPr/>
+                    <a:lstStyle/>
+                    <a:p>
+                      <a:pPr algn="r" fontAlgn="b"/>
+                      <a:r>
+                        <a:rPr lang="en-US" sz="1200" b="0" i="0" u="none" strike="noStrike">
+                          <a:solidFill>
+                            <a:srgbClr val="000000"/>
+                          </a:solidFill>
+                          <a:effectLst/>
+                          <a:latin typeface="Aptos Narrow" panose="020B0004020202020204" pitchFamily="34" charset="0"/>
+                        </a:rPr>
+                        <a:t>1</a:t>
+                      </a:r>
+                    </a:p>
+                  </a:txBody>
+                  <a:tcPr marL="9525" marR="9525" marT="9525" marB="0" anchor="b">
+                    <a:lnL>
+                      <a:noFill/>
+                    </a:lnL>
+                    <a:lnR>
+                      <a:noFill/>
+                    </a:lnR>
+                    <a:lnT>
+                      <a:noFill/>
+                    </a:lnT>
+                    <a:lnB>
+                      <a:noFill/>
+                    </a:lnB>
+                    <a:noFill/>
+                  </a:tcPr>
+                </a:tc>
+                <a:tc>
+                  <a:txBody>
+                    <a:bodyPr/>
+                    <a:lstStyle/>
+                    <a:p>
+                      <a:pPr algn="l" fontAlgn="b"/>
+                      <a:r>
+                        <a:rPr lang="en-US" sz="1200" b="0" i="0" u="none" strike="noStrike">
+                          <a:solidFill>
+                            <a:srgbClr val="000000"/>
+                          </a:solidFill>
+                          <a:effectLst/>
+                          <a:latin typeface="Aptos Narrow" panose="020B0004020202020204" pitchFamily="34" charset="0"/>
+                        </a:rPr>
+                        <a:t>Freigegeben</a:t>
+                      </a:r>
+                    </a:p>
+                  </a:txBody>
+                  <a:tcPr marL="9525" marR="9525" marT="9525" marB="0" anchor="b">
+                    <a:lnL>
+                      <a:noFill/>
+                    </a:lnL>
+                    <a:lnR>
+                      <a:noFill/>
+                    </a:lnR>
+                    <a:lnT>
+                      <a:noFill/>
+                    </a:lnT>
+                    <a:lnB>
+                      <a:noFill/>
+                    </a:lnB>
+                    <a:noFill/>
+                  </a:tcPr>
+                </a:tc>
+                <a:tc>
+                  <a:txBody>
+                    <a:bodyPr/>
+                    <a:lstStyle/>
+                    <a:p>
+                      <a:pPr algn="l" fontAlgn="b"/>
+                      <a:endParaRPr lang="en-US" sz="1200" b="0" i="0" u="none" strike="noStrike">
+                        <a:solidFill>
+                          <a:srgbClr val="000000"/>
+                        </a:solidFill>
+                        <a:effectLst/>
+                        <a:latin typeface="Aptos Narrow" panose="020B0004020202020204" pitchFamily="34" charset="0"/>
+                      </a:endParaRPr>
+                    </a:p>
+                  </a:txBody>
+                  <a:tcPr marL="9525" marR="9525" marT="9525" marB="0" anchor="b">
+                    <a:lnL>
+                      <a:noFill/>
+                    </a:lnL>
+                    <a:lnR>
+                      <a:noFill/>
+                    </a:lnR>
+                    <a:lnT>
+                      <a:noFill/>
+                    </a:lnT>
+                    <a:lnB>
+                      <a:noFill/>
+                    </a:lnB>
+                    <a:noFill/>
+                  </a:tcPr>
+                </a:tc>
+                <a:extLst>
+                  <a:ext uri="{0D108BD9-81ED-4DB2-BD59-A6C34878D82A}">
+                    <a16:rowId xmlns:a16="http://schemas.microsoft.com/office/drawing/2014/main" val="1870981046"/>
+                  </a:ext>
+                </a:extLst>
+              </a:tr>
+              <a:tr h="203200">
+                <a:tc>
+                  <a:txBody>
+                    <a:bodyPr/>
+                    <a:lstStyle/>
+                    <a:p>
+                      <a:pPr algn="l" fontAlgn="b"/>
+                      <a:r>
+                        <a:rPr lang="en-US" sz="1200" b="0" i="0" u="none" strike="noStrike">
+                          <a:solidFill>
+                            <a:srgbClr val="000000"/>
+                          </a:solidFill>
+                          <a:effectLst/>
+                          <a:latin typeface="Aptos Narrow" panose="020B0004020202020204" pitchFamily="34" charset="0"/>
+                        </a:rPr>
+                        <a:t>A0093</a:t>
+                      </a:r>
+                    </a:p>
+                  </a:txBody>
+                  <a:tcPr marL="9525" marR="9525" marT="9525" marB="0" anchor="b">
+                    <a:lnL>
+                      <a:noFill/>
+                    </a:lnL>
+                    <a:lnR>
+                      <a:noFill/>
+                    </a:lnR>
+                    <a:lnT>
+                      <a:noFill/>
+                    </a:lnT>
+                    <a:lnB>
+                      <a:noFill/>
+                    </a:lnB>
+                    <a:noFill/>
+                  </a:tcPr>
+                </a:tc>
+                <a:tc>
+                  <a:txBody>
+                    <a:bodyPr/>
+                    <a:lstStyle/>
+                    <a:p>
+                      <a:pPr algn="l" fontAlgn="b"/>
+                      <a:r>
+                        <a:rPr lang="en-US" sz="1200" b="0" i="0" u="none" strike="noStrike">
+                          <a:solidFill>
+                            <a:srgbClr val="000000"/>
+                          </a:solidFill>
+                          <a:effectLst/>
+                          <a:latin typeface="Aptos Narrow" panose="020B0004020202020204" pitchFamily="34" charset="0"/>
+                        </a:rPr>
+                        <a:t>Werk S√ºd</a:t>
+                      </a:r>
+                    </a:p>
+                  </a:txBody>
+                  <a:tcPr marL="9525" marR="9525" marT="9525" marB="0" anchor="b">
+                    <a:lnL>
+                      <a:noFill/>
+                    </a:lnL>
+                    <a:lnR>
+                      <a:noFill/>
+                    </a:lnR>
+                    <a:lnT>
+                      <a:noFill/>
+                    </a:lnT>
+                    <a:lnB>
+                      <a:noFill/>
+                    </a:lnB>
+                    <a:noFill/>
+                  </a:tcPr>
+                </a:tc>
+                <a:tc>
+                  <a:txBody>
+                    <a:bodyPr/>
+                    <a:lstStyle/>
+                    <a:p>
+                      <a:pPr algn="l" fontAlgn="b"/>
+                      <a:r>
+                        <a:rPr lang="en-US" sz="1200" b="0" i="0" u="none" strike="noStrike">
+                          <a:solidFill>
+                            <a:srgbClr val="000000"/>
+                          </a:solidFill>
+                          <a:effectLst/>
+                          <a:latin typeface="Aptos Narrow" panose="020B0004020202020204" pitchFamily="34" charset="0"/>
+                        </a:rPr>
+                        <a:t>B200</a:t>
+                      </a:r>
+                    </a:p>
+                  </a:txBody>
+                  <a:tcPr marL="9525" marR="9525" marT="9525" marB="0" anchor="b">
+                    <a:lnL>
+                      <a:noFill/>
+                    </a:lnL>
+                    <a:lnR>
+                      <a:noFill/>
+                    </a:lnR>
+                    <a:lnT>
+                      <a:noFill/>
+                    </a:lnT>
+                    <a:lnB>
+                      <a:noFill/>
+                    </a:lnB>
+                    <a:noFill/>
+                  </a:tcPr>
+                </a:tc>
+                <a:tc>
+                  <a:txBody>
+                    <a:bodyPr/>
+                    <a:lstStyle/>
+                    <a:p>
+                      <a:pPr algn="r" fontAlgn="b"/>
+                      <a:r>
+                        <a:rPr lang="en-US" sz="1200" b="0" i="0" u="none" strike="noStrike">
+                          <a:solidFill>
+                            <a:srgbClr val="000000"/>
+                          </a:solidFill>
+                          <a:effectLst/>
+                          <a:latin typeface="Aptos Narrow" panose="020B0004020202020204" pitchFamily="34" charset="0"/>
+                        </a:rPr>
+                        <a:t>63</a:t>
+                      </a:r>
+                    </a:p>
+                  </a:txBody>
+                  <a:tcPr marL="9525" marR="9525" marT="9525" marB="0" anchor="b">
+                    <a:lnL>
+                      <a:noFill/>
+                    </a:lnL>
+                    <a:lnR>
+                      <a:noFill/>
+                    </a:lnR>
+                    <a:lnT>
+                      <a:noFill/>
+                    </a:lnT>
+                    <a:lnB>
+                      <a:noFill/>
+                    </a:lnB>
+                    <a:noFill/>
+                  </a:tcPr>
+                </a:tc>
+                <a:tc>
+                  <a:txBody>
+                    <a:bodyPr/>
+                    <a:lstStyle/>
+                    <a:p>
+                      <a:pPr algn="l" fontAlgn="b"/>
+                      <a:r>
+                        <a:rPr lang="en-US" sz="1200" b="0" i="0" u="none" strike="noStrike">
+                          <a:solidFill>
+                            <a:srgbClr val="000000"/>
+                          </a:solidFill>
+                          <a:effectLst/>
+                          <a:latin typeface="Aptos Narrow" panose="020B0004020202020204" pitchFamily="34" charset="0"/>
+                        </a:rPr>
+                        <a:t>D04</a:t>
+                      </a:r>
+                    </a:p>
+                  </a:txBody>
+                  <a:tcPr marL="9525" marR="9525" marT="9525" marB="0" anchor="b">
+                    <a:lnL>
+                      <a:noFill/>
+                    </a:lnL>
+                    <a:lnR>
+                      <a:noFill/>
+                    </a:lnR>
+                    <a:lnT>
+                      <a:noFill/>
+                    </a:lnT>
+                    <a:lnB>
+                      <a:noFill/>
+                    </a:lnB>
+                    <a:noFill/>
+                  </a:tcPr>
+                </a:tc>
+                <a:tc>
+                  <a:txBody>
+                    <a:bodyPr/>
+                    <a:lstStyle/>
+                    <a:p>
+                      <a:pPr algn="r" fontAlgn="b"/>
+                      <a:r>
+                        <a:rPr lang="en-US" sz="1200" b="0" i="0" u="none" strike="noStrike">
+                          <a:solidFill>
+                            <a:srgbClr val="000000"/>
+                          </a:solidFill>
+                          <a:effectLst/>
+                          <a:latin typeface="Aptos Narrow" panose="020B0004020202020204" pitchFamily="34" charset="0"/>
+                        </a:rPr>
+                        <a:t>11.8</a:t>
+                      </a:r>
+                    </a:p>
+                  </a:txBody>
+                  <a:tcPr marL="9525" marR="9525" marT="9525" marB="0" anchor="b">
+                    <a:lnL>
+                      <a:noFill/>
+                    </a:lnL>
+                    <a:lnR>
+                      <a:noFill/>
+                    </a:lnR>
+                    <a:lnT>
+                      <a:noFill/>
+                    </a:lnT>
+                    <a:lnB>
+                      <a:noFill/>
+                    </a:lnB>
+                    <a:noFill/>
+                  </a:tcPr>
+                </a:tc>
+                <a:tc>
+                  <a:txBody>
+                    <a:bodyPr/>
+                    <a:lstStyle/>
+                    <a:p>
+                      <a:pPr algn="r" fontAlgn="b"/>
+                      <a:r>
+                        <a:rPr lang="en-US" sz="1200" b="0" i="0" u="none" strike="noStrike">
+                          <a:solidFill>
+                            <a:srgbClr val="000000"/>
+                          </a:solidFill>
+                          <a:effectLst/>
+                          <a:latin typeface="Aptos Narrow" panose="020B0004020202020204" pitchFamily="34" charset="0"/>
+                        </a:rPr>
+                        <a:t>4.7</a:t>
+                      </a:r>
+                    </a:p>
+                  </a:txBody>
+                  <a:tcPr marL="9525" marR="9525" marT="9525" marB="0" anchor="b">
+                    <a:lnL>
+                      <a:noFill/>
+                    </a:lnL>
+                    <a:lnR>
+                      <a:noFill/>
+                    </a:lnR>
+                    <a:lnT>
+                      <a:noFill/>
+                    </a:lnT>
+                    <a:lnB>
+                      <a:noFill/>
+                    </a:lnB>
+                    <a:noFill/>
+                  </a:tcPr>
+                </a:tc>
+                <a:tc>
+                  <a:txBody>
+                    <a:bodyPr/>
+                    <a:lstStyle/>
+                    <a:p>
+                      <a:pPr algn="r" fontAlgn="b"/>
+                      <a:r>
+                        <a:rPr lang="en-US" sz="1200" b="0" i="0" u="none" strike="noStrike">
+                          <a:solidFill>
+                            <a:srgbClr val="000000"/>
+                          </a:solidFill>
+                          <a:effectLst/>
+                          <a:latin typeface="Aptos Narrow" panose="020B0004020202020204" pitchFamily="34" charset="0"/>
+                        </a:rPr>
+                        <a:t>4.2</a:t>
+                      </a:r>
+                    </a:p>
+                  </a:txBody>
+                  <a:tcPr marL="9525" marR="9525" marT="9525" marB="0" anchor="b">
+                    <a:lnL>
+                      <a:noFill/>
+                    </a:lnL>
+                    <a:lnR>
+                      <a:noFill/>
+                    </a:lnR>
+                    <a:lnT>
+                      <a:noFill/>
+                    </a:lnT>
+                    <a:lnB>
+                      <a:noFill/>
+                    </a:lnB>
+                    <a:noFill/>
+                  </a:tcPr>
+                </a:tc>
+                <a:tc>
+                  <a:txBody>
+                    <a:bodyPr/>
+                    <a:lstStyle/>
+                    <a:p>
+                      <a:pPr algn="l" fontAlgn="b"/>
+                      <a:r>
+                        <a:rPr lang="en-US" sz="1200" b="0" i="0" u="none" strike="noStrike">
+                          <a:solidFill>
+                            <a:srgbClr val="000000"/>
+                          </a:solidFill>
+                          <a:effectLst/>
+                          <a:latin typeface="Aptos Narrow" panose="020B0004020202020204" pitchFamily="34" charset="0"/>
+                        </a:rPr>
+                        <a:t>cm</a:t>
+                      </a:r>
+                    </a:p>
+                  </a:txBody>
+                  <a:tcPr marL="9525" marR="9525" marT="9525" marB="0" anchor="b">
+                    <a:lnL>
+                      <a:noFill/>
+                    </a:lnL>
+                    <a:lnR>
+                      <a:noFill/>
+                    </a:lnR>
+                    <a:lnT>
+                      <a:noFill/>
+                    </a:lnT>
+                    <a:lnB>
+                      <a:noFill/>
+                    </a:lnB>
+                    <a:noFill/>
+                  </a:tcPr>
+                </a:tc>
+                <a:tc>
+                  <a:txBody>
+                    <a:bodyPr/>
+                    <a:lstStyle/>
+                    <a:p>
+                      <a:pPr algn="r" fontAlgn="b"/>
+                      <a:r>
+                        <a:rPr lang="en-US" sz="1200" b="0" i="0" u="none" strike="noStrike">
+                          <a:solidFill>
+                            <a:srgbClr val="000000"/>
+                          </a:solidFill>
+                          <a:effectLst/>
+                          <a:latin typeface="Aptos Narrow" panose="020B0004020202020204" pitchFamily="34" charset="0"/>
+                        </a:rPr>
+                        <a:t>19</a:t>
+                      </a:r>
+                    </a:p>
+                  </a:txBody>
+                  <a:tcPr marL="9525" marR="9525" marT="9525" marB="0" anchor="b">
+                    <a:lnL>
+                      <a:noFill/>
+                    </a:lnL>
+                    <a:lnR>
+                      <a:noFill/>
+                    </a:lnR>
+                    <a:lnT>
+                      <a:noFill/>
+                    </a:lnT>
+                    <a:lnB>
+                      <a:noFill/>
+                    </a:lnB>
+                    <a:noFill/>
+                  </a:tcPr>
+                </a:tc>
+                <a:tc>
+                  <a:txBody>
+                    <a:bodyPr/>
+                    <a:lstStyle/>
+                    <a:p>
+                      <a:pPr algn="l" fontAlgn="b"/>
+                      <a:r>
+                        <a:rPr lang="en-US" sz="1200" b="0" i="0" u="none" strike="noStrike">
+                          <a:solidFill>
+                            <a:srgbClr val="000000"/>
+                          </a:solidFill>
+                          <a:effectLst/>
+                          <a:latin typeface="Aptos Narrow" panose="020B0004020202020204" pitchFamily="34" charset="0"/>
+                        </a:rPr>
+                        <a:t>Freigegeben</a:t>
+                      </a:r>
+                    </a:p>
+                  </a:txBody>
+                  <a:tcPr marL="9525" marR="9525" marT="9525" marB="0" anchor="b">
+                    <a:lnL>
+                      <a:noFill/>
+                    </a:lnL>
+                    <a:lnR>
+                      <a:noFill/>
+                    </a:lnR>
+                    <a:lnT>
+                      <a:noFill/>
+                    </a:lnT>
+                    <a:lnB>
+                      <a:noFill/>
+                    </a:lnB>
+                    <a:noFill/>
+                  </a:tcPr>
+                </a:tc>
+                <a:tc>
+                  <a:txBody>
+                    <a:bodyPr/>
+                    <a:lstStyle/>
+                    <a:p>
+                      <a:pPr algn="l" fontAlgn="b"/>
+                      <a:endParaRPr lang="en-US" sz="1200" b="0" i="0" u="none" strike="noStrike">
+                        <a:solidFill>
+                          <a:srgbClr val="000000"/>
+                        </a:solidFill>
+                        <a:effectLst/>
+                        <a:latin typeface="Aptos Narrow" panose="020B0004020202020204" pitchFamily="34" charset="0"/>
+                      </a:endParaRPr>
+                    </a:p>
+                  </a:txBody>
+                  <a:tcPr marL="9525" marR="9525" marT="9525" marB="0" anchor="b">
+                    <a:lnL>
+                      <a:noFill/>
+                    </a:lnL>
+                    <a:lnR>
+                      <a:noFill/>
+                    </a:lnR>
+                    <a:lnT>
+                      <a:noFill/>
+                    </a:lnT>
+                    <a:lnB>
+                      <a:noFill/>
+                    </a:lnB>
+                    <a:noFill/>
+                  </a:tcPr>
+                </a:tc>
+                <a:extLst>
+                  <a:ext uri="{0D108BD9-81ED-4DB2-BD59-A6C34878D82A}">
+                    <a16:rowId xmlns:a16="http://schemas.microsoft.com/office/drawing/2014/main" val="2569071245"/>
+                  </a:ext>
+                </a:extLst>
+              </a:tr>
+              <a:tr h="203200">
+                <a:tc>
+                  <a:txBody>
+                    <a:bodyPr/>
+                    <a:lstStyle/>
+                    <a:p>
+                      <a:pPr algn="l" fontAlgn="b"/>
+                      <a:r>
+                        <a:rPr lang="en-US" sz="1200" b="0" i="0" u="none" strike="noStrike">
+                          <a:solidFill>
+                            <a:srgbClr val="000000"/>
+                          </a:solidFill>
+                          <a:effectLst/>
+                          <a:latin typeface="Aptos Narrow" panose="020B0004020202020204" pitchFamily="34" charset="0"/>
+                        </a:rPr>
+                        <a:t>A0391</a:t>
+                      </a:r>
+                    </a:p>
+                  </a:txBody>
+                  <a:tcPr marL="9525" marR="9525" marT="9525" marB="0" anchor="b">
+                    <a:lnL>
+                      <a:noFill/>
+                    </a:lnL>
+                    <a:lnR>
+                      <a:noFill/>
+                    </a:lnR>
+                    <a:lnT>
+                      <a:noFill/>
+                    </a:lnT>
+                    <a:lnB>
+                      <a:noFill/>
+                    </a:lnB>
+                    <a:noFill/>
+                  </a:tcPr>
+                </a:tc>
+                <a:tc>
+                  <a:txBody>
+                    <a:bodyPr/>
+                    <a:lstStyle/>
+                    <a:p>
+                      <a:pPr algn="l" fontAlgn="b"/>
+                      <a:r>
+                        <a:rPr lang="en-US" sz="1200" b="0" i="0" u="none" strike="noStrike">
+                          <a:solidFill>
+                            <a:srgbClr val="000000"/>
+                          </a:solidFill>
+                          <a:effectLst/>
+                          <a:latin typeface="Aptos Narrow" panose="020B0004020202020204" pitchFamily="34" charset="0"/>
+                        </a:rPr>
+                        <a:t>Werk Ost</a:t>
+                      </a:r>
+                    </a:p>
+                  </a:txBody>
+                  <a:tcPr marL="9525" marR="9525" marT="9525" marB="0" anchor="b">
+                    <a:lnL>
+                      <a:noFill/>
+                    </a:lnL>
+                    <a:lnR>
+                      <a:noFill/>
+                    </a:lnR>
+                    <a:lnT>
+                      <a:noFill/>
+                    </a:lnT>
+                    <a:lnB>
+                      <a:noFill/>
+                    </a:lnB>
+                    <a:noFill/>
+                  </a:tcPr>
+                </a:tc>
+                <a:tc>
+                  <a:txBody>
+                    <a:bodyPr/>
+                    <a:lstStyle/>
+                    <a:p>
+                      <a:pPr algn="l" fontAlgn="b"/>
+                      <a:r>
+                        <a:rPr lang="en-US" sz="1200" b="0" i="0" u="none" strike="noStrike">
+                          <a:solidFill>
+                            <a:srgbClr val="000000"/>
+                          </a:solidFill>
+                          <a:effectLst/>
+                          <a:latin typeface="Aptos Narrow" panose="020B0004020202020204" pitchFamily="34" charset="0"/>
+                        </a:rPr>
+                        <a:t>D400</a:t>
+                      </a:r>
+                    </a:p>
+                  </a:txBody>
+                  <a:tcPr marL="9525" marR="9525" marT="9525" marB="0" anchor="b">
+                    <a:lnL>
+                      <a:noFill/>
+                    </a:lnL>
+                    <a:lnR>
+                      <a:noFill/>
+                    </a:lnR>
+                    <a:lnT>
+                      <a:noFill/>
+                    </a:lnT>
+                    <a:lnB>
+                      <a:noFill/>
+                    </a:lnB>
+                    <a:noFill/>
+                  </a:tcPr>
+                </a:tc>
+                <a:tc>
+                  <a:txBody>
+                    <a:bodyPr/>
+                    <a:lstStyle/>
+                    <a:p>
+                      <a:pPr algn="r" fontAlgn="b"/>
+                      <a:r>
+                        <a:rPr lang="en-US" sz="1200" b="0" i="0" u="none" strike="noStrike">
+                          <a:solidFill>
+                            <a:srgbClr val="000000"/>
+                          </a:solidFill>
+                          <a:effectLst/>
+                          <a:latin typeface="Aptos Narrow" panose="020B0004020202020204" pitchFamily="34" charset="0"/>
+                        </a:rPr>
+                        <a:t>20</a:t>
+                      </a:r>
+                    </a:p>
+                  </a:txBody>
+                  <a:tcPr marL="9525" marR="9525" marT="9525" marB="0" anchor="b">
+                    <a:lnL>
+                      <a:noFill/>
+                    </a:lnL>
+                    <a:lnR>
+                      <a:noFill/>
+                    </a:lnR>
+                    <a:lnT>
+                      <a:noFill/>
+                    </a:lnT>
+                    <a:lnB>
+                      <a:noFill/>
+                    </a:lnB>
+                    <a:noFill/>
+                  </a:tcPr>
+                </a:tc>
+                <a:tc>
+                  <a:txBody>
+                    <a:bodyPr/>
+                    <a:lstStyle/>
+                    <a:p>
+                      <a:pPr algn="l" fontAlgn="b"/>
+                      <a:r>
+                        <a:rPr lang="en-US" sz="1200" b="0" i="0" u="none" strike="noStrike">
+                          <a:solidFill>
+                            <a:srgbClr val="000000"/>
+                          </a:solidFill>
+                          <a:effectLst/>
+                          <a:latin typeface="Aptos Narrow" panose="020B0004020202020204" pitchFamily="34" charset="0"/>
+                        </a:rPr>
+                        <a:t>D03</a:t>
+                      </a:r>
+                    </a:p>
+                  </a:txBody>
+                  <a:tcPr marL="9525" marR="9525" marT="9525" marB="0" anchor="b">
+                    <a:lnL>
+                      <a:noFill/>
+                    </a:lnL>
+                    <a:lnR>
+                      <a:noFill/>
+                    </a:lnR>
+                    <a:lnT>
+                      <a:noFill/>
+                    </a:lnT>
+                    <a:lnB>
+                      <a:noFill/>
+                    </a:lnB>
+                    <a:noFill/>
+                  </a:tcPr>
+                </a:tc>
+                <a:tc>
+                  <a:txBody>
+                    <a:bodyPr/>
+                    <a:lstStyle/>
+                    <a:p>
+                      <a:pPr algn="r" fontAlgn="b"/>
+                      <a:r>
+                        <a:rPr lang="en-US" sz="1200" b="0" i="0" u="none" strike="noStrike">
+                          <a:solidFill>
+                            <a:srgbClr val="000000"/>
+                          </a:solidFill>
+                          <a:effectLst/>
+                          <a:latin typeface="Aptos Narrow" panose="020B0004020202020204" pitchFamily="34" charset="0"/>
+                        </a:rPr>
+                        <a:t>16.2</a:t>
+                      </a:r>
+                    </a:p>
+                  </a:txBody>
+                  <a:tcPr marL="9525" marR="9525" marT="9525" marB="0" anchor="b">
+                    <a:lnL>
+                      <a:noFill/>
+                    </a:lnL>
+                    <a:lnR>
+                      <a:noFill/>
+                    </a:lnR>
+                    <a:lnT>
+                      <a:noFill/>
+                    </a:lnT>
+                    <a:lnB>
+                      <a:noFill/>
+                    </a:lnB>
+                    <a:noFill/>
+                  </a:tcPr>
+                </a:tc>
+                <a:tc>
+                  <a:txBody>
+                    <a:bodyPr/>
+                    <a:lstStyle/>
+                    <a:p>
+                      <a:pPr algn="r" fontAlgn="b"/>
+                      <a:r>
+                        <a:rPr lang="en-US" sz="1200" b="0" i="0" u="none" strike="noStrike">
+                          <a:solidFill>
+                            <a:srgbClr val="000000"/>
+                          </a:solidFill>
+                          <a:effectLst/>
+                          <a:latin typeface="Aptos Narrow" panose="020B0004020202020204" pitchFamily="34" charset="0"/>
+                        </a:rPr>
+                        <a:t>9.7</a:t>
+                      </a:r>
+                    </a:p>
+                  </a:txBody>
+                  <a:tcPr marL="9525" marR="9525" marT="9525" marB="0" anchor="b">
+                    <a:lnL>
+                      <a:noFill/>
+                    </a:lnL>
+                    <a:lnR>
+                      <a:noFill/>
+                    </a:lnR>
+                    <a:lnT>
+                      <a:noFill/>
+                    </a:lnT>
+                    <a:lnB>
+                      <a:noFill/>
+                    </a:lnB>
+                    <a:noFill/>
+                  </a:tcPr>
+                </a:tc>
+                <a:tc>
+                  <a:txBody>
+                    <a:bodyPr/>
+                    <a:lstStyle/>
+                    <a:p>
+                      <a:pPr algn="r" fontAlgn="b"/>
+                      <a:r>
+                        <a:rPr lang="en-US" sz="1200" b="0" i="0" u="none" strike="noStrike">
+                          <a:solidFill>
+                            <a:srgbClr val="000000"/>
+                          </a:solidFill>
+                          <a:effectLst/>
+                          <a:latin typeface="Aptos Narrow" panose="020B0004020202020204" pitchFamily="34" charset="0"/>
+                        </a:rPr>
+                        <a:t>20.7</a:t>
+                      </a:r>
+                    </a:p>
+                  </a:txBody>
+                  <a:tcPr marL="9525" marR="9525" marT="9525" marB="0" anchor="b">
+                    <a:lnL>
+                      <a:noFill/>
+                    </a:lnL>
+                    <a:lnR>
+                      <a:noFill/>
+                    </a:lnR>
+                    <a:lnT>
+                      <a:noFill/>
+                    </a:lnT>
+                    <a:lnB>
+                      <a:noFill/>
+                    </a:lnB>
+                    <a:noFill/>
+                  </a:tcPr>
+                </a:tc>
+                <a:tc>
+                  <a:txBody>
+                    <a:bodyPr/>
+                    <a:lstStyle/>
+                    <a:p>
+                      <a:pPr algn="l" fontAlgn="b"/>
+                      <a:r>
+                        <a:rPr lang="en-US" sz="1200" b="0" i="0" u="none" strike="noStrike">
+                          <a:solidFill>
+                            <a:srgbClr val="000000"/>
+                          </a:solidFill>
+                          <a:effectLst/>
+                          <a:latin typeface="Aptos Narrow" panose="020B0004020202020204" pitchFamily="34" charset="0"/>
+                        </a:rPr>
+                        <a:t>cm</a:t>
+                      </a:r>
+                    </a:p>
+                  </a:txBody>
+                  <a:tcPr marL="9525" marR="9525" marT="9525" marB="0" anchor="b">
+                    <a:lnL>
+                      <a:noFill/>
+                    </a:lnL>
+                    <a:lnR>
+                      <a:noFill/>
+                    </a:lnR>
+                    <a:lnT>
+                      <a:noFill/>
+                    </a:lnT>
+                    <a:lnB>
+                      <a:noFill/>
+                    </a:lnB>
+                    <a:noFill/>
+                  </a:tcPr>
+                </a:tc>
+                <a:tc>
+                  <a:txBody>
+                    <a:bodyPr/>
+                    <a:lstStyle/>
+                    <a:p>
+                      <a:pPr algn="r" fontAlgn="b"/>
+                      <a:r>
+                        <a:rPr lang="en-US" sz="1200" b="0" i="0" u="none" strike="noStrike">
+                          <a:solidFill>
+                            <a:srgbClr val="000000"/>
+                          </a:solidFill>
+                          <a:effectLst/>
+                          <a:latin typeface="Aptos Narrow" panose="020B0004020202020204" pitchFamily="34" charset="0"/>
+                        </a:rPr>
+                        <a:t>17</a:t>
+                      </a:r>
+                    </a:p>
+                  </a:txBody>
+                  <a:tcPr marL="9525" marR="9525" marT="9525" marB="0" anchor="b">
+                    <a:lnL>
+                      <a:noFill/>
+                    </a:lnL>
+                    <a:lnR>
+                      <a:noFill/>
+                    </a:lnR>
+                    <a:lnT>
+                      <a:noFill/>
+                    </a:lnT>
+                    <a:lnB>
+                      <a:noFill/>
+                    </a:lnB>
+                    <a:noFill/>
+                  </a:tcPr>
+                </a:tc>
+                <a:tc>
+                  <a:txBody>
+                    <a:bodyPr/>
+                    <a:lstStyle/>
+                    <a:p>
+                      <a:pPr algn="l" fontAlgn="b"/>
+                      <a:r>
+                        <a:rPr lang="en-US" sz="1200" b="0" i="0" u="none" strike="noStrike">
+                          <a:solidFill>
+                            <a:srgbClr val="000000"/>
+                          </a:solidFill>
+                          <a:effectLst/>
+                          <a:latin typeface="Aptos Narrow" panose="020B0004020202020204" pitchFamily="34" charset="0"/>
+                        </a:rPr>
+                        <a:t>Freigegeben</a:t>
+                      </a:r>
+                    </a:p>
+                  </a:txBody>
+                  <a:tcPr marL="9525" marR="9525" marT="9525" marB="0" anchor="b">
+                    <a:lnL>
+                      <a:noFill/>
+                    </a:lnL>
+                    <a:lnR>
+                      <a:noFill/>
+                    </a:lnR>
+                    <a:lnT>
+                      <a:noFill/>
+                    </a:lnT>
+                    <a:lnB>
+                      <a:noFill/>
+                    </a:lnB>
+                    <a:noFill/>
+                  </a:tcPr>
+                </a:tc>
+                <a:tc>
+                  <a:txBody>
+                    <a:bodyPr/>
+                    <a:lstStyle/>
+                    <a:p>
+                      <a:pPr algn="l" fontAlgn="b"/>
+                      <a:endParaRPr lang="en-US" sz="1200" b="0" i="0" u="none" strike="noStrike">
+                        <a:solidFill>
+                          <a:srgbClr val="000000"/>
+                        </a:solidFill>
+                        <a:effectLst/>
+                        <a:latin typeface="Aptos Narrow" panose="020B0004020202020204" pitchFamily="34" charset="0"/>
+                      </a:endParaRPr>
+                    </a:p>
+                  </a:txBody>
+                  <a:tcPr marL="9525" marR="9525" marT="9525" marB="0" anchor="b">
+                    <a:lnL>
+                      <a:noFill/>
+                    </a:lnL>
+                    <a:lnR>
+                      <a:noFill/>
+                    </a:lnR>
+                    <a:lnT>
+                      <a:noFill/>
+                    </a:lnT>
+                    <a:lnB>
+                      <a:noFill/>
+                    </a:lnB>
+                    <a:noFill/>
+                  </a:tcPr>
+                </a:tc>
+                <a:extLst>
+                  <a:ext uri="{0D108BD9-81ED-4DB2-BD59-A6C34878D82A}">
+                    <a16:rowId xmlns:a16="http://schemas.microsoft.com/office/drawing/2014/main" val="22303452"/>
+                  </a:ext>
+                </a:extLst>
+              </a:tr>
+              <a:tr h="203200">
+                <a:tc>
+                  <a:txBody>
+                    <a:bodyPr/>
+                    <a:lstStyle/>
+                    <a:p>
+                      <a:pPr algn="l" fontAlgn="b"/>
+                      <a:r>
+                        <a:rPr lang="en-US" sz="1200" b="0" i="0" u="none" strike="noStrike">
+                          <a:solidFill>
+                            <a:srgbClr val="000000"/>
+                          </a:solidFill>
+                          <a:effectLst/>
+                          <a:latin typeface="Aptos Narrow" panose="020B0004020202020204" pitchFamily="34" charset="0"/>
+                        </a:rPr>
+                        <a:t>A0391</a:t>
+                      </a:r>
+                    </a:p>
+                  </a:txBody>
+                  <a:tcPr marL="9525" marR="9525" marT="9525" marB="0" anchor="b">
+                    <a:lnL>
+                      <a:noFill/>
+                    </a:lnL>
+                    <a:lnR>
+                      <a:noFill/>
+                    </a:lnR>
+                    <a:lnT>
+                      <a:noFill/>
+                    </a:lnT>
+                    <a:lnB>
+                      <a:noFill/>
+                    </a:lnB>
+                    <a:noFill/>
+                  </a:tcPr>
+                </a:tc>
+                <a:tc>
+                  <a:txBody>
+                    <a:bodyPr/>
+                    <a:lstStyle/>
+                    <a:p>
+                      <a:pPr algn="l" fontAlgn="b"/>
+                      <a:r>
+                        <a:rPr lang="en-US" sz="1200" b="0" i="0" u="none" strike="noStrike">
+                          <a:solidFill>
+                            <a:srgbClr val="000000"/>
+                          </a:solidFill>
+                          <a:effectLst/>
+                          <a:latin typeface="Aptos Narrow" panose="020B0004020202020204" pitchFamily="34" charset="0"/>
+                        </a:rPr>
+                        <a:t>Werk Ost</a:t>
+                      </a:r>
+                    </a:p>
+                  </a:txBody>
+                  <a:tcPr marL="9525" marR="9525" marT="9525" marB="0" anchor="b">
+                    <a:lnL>
+                      <a:noFill/>
+                    </a:lnL>
+                    <a:lnR>
+                      <a:noFill/>
+                    </a:lnR>
+                    <a:lnT>
+                      <a:noFill/>
+                    </a:lnT>
+                    <a:lnB>
+                      <a:noFill/>
+                    </a:lnB>
+                    <a:noFill/>
+                  </a:tcPr>
+                </a:tc>
+                <a:tc>
+                  <a:txBody>
+                    <a:bodyPr/>
+                    <a:lstStyle/>
+                    <a:p>
+                      <a:pPr algn="l" fontAlgn="b"/>
+                      <a:r>
+                        <a:rPr lang="en-US" sz="1200" b="0" i="0" u="none" strike="noStrike">
+                          <a:solidFill>
+                            <a:srgbClr val="000000"/>
+                          </a:solidFill>
+                          <a:effectLst/>
+                          <a:latin typeface="Aptos Narrow" panose="020B0004020202020204" pitchFamily="34" charset="0"/>
+                        </a:rPr>
+                        <a:t>D400</a:t>
+                      </a:r>
+                    </a:p>
+                  </a:txBody>
+                  <a:tcPr marL="9525" marR="9525" marT="9525" marB="0" anchor="b">
+                    <a:lnL>
+                      <a:noFill/>
+                    </a:lnL>
+                    <a:lnR>
+                      <a:noFill/>
+                    </a:lnR>
+                    <a:lnT>
+                      <a:noFill/>
+                    </a:lnT>
+                    <a:lnB>
+                      <a:noFill/>
+                    </a:lnB>
+                    <a:noFill/>
+                  </a:tcPr>
+                </a:tc>
+                <a:tc>
+                  <a:txBody>
+                    <a:bodyPr/>
+                    <a:lstStyle/>
+                    <a:p>
+                      <a:pPr algn="r" fontAlgn="b"/>
+                      <a:r>
+                        <a:rPr lang="en-US" sz="1200" b="0" i="0" u="none" strike="noStrike">
+                          <a:solidFill>
+                            <a:srgbClr val="000000"/>
+                          </a:solidFill>
+                          <a:effectLst/>
+                          <a:latin typeface="Aptos Narrow" panose="020B0004020202020204" pitchFamily="34" charset="0"/>
+                        </a:rPr>
+                        <a:t>20</a:t>
+                      </a:r>
+                    </a:p>
+                  </a:txBody>
+                  <a:tcPr marL="9525" marR="9525" marT="9525" marB="0" anchor="b">
+                    <a:lnL>
+                      <a:noFill/>
+                    </a:lnL>
+                    <a:lnR>
+                      <a:noFill/>
+                    </a:lnR>
+                    <a:lnT>
+                      <a:noFill/>
+                    </a:lnT>
+                    <a:lnB>
+                      <a:noFill/>
+                    </a:lnB>
+                    <a:noFill/>
+                  </a:tcPr>
+                </a:tc>
+                <a:tc>
+                  <a:txBody>
+                    <a:bodyPr/>
+                    <a:lstStyle/>
+                    <a:p>
+                      <a:pPr algn="l" fontAlgn="b"/>
+                      <a:r>
+                        <a:rPr lang="en-US" sz="1200" b="0" i="0" u="none" strike="noStrike">
+                          <a:solidFill>
+                            <a:srgbClr val="000000"/>
+                          </a:solidFill>
+                          <a:effectLst/>
+                          <a:latin typeface="Aptos Narrow" panose="020B0004020202020204" pitchFamily="34" charset="0"/>
+                        </a:rPr>
+                        <a:t>D03</a:t>
+                      </a:r>
+                    </a:p>
+                  </a:txBody>
+                  <a:tcPr marL="9525" marR="9525" marT="9525" marB="0" anchor="b">
+                    <a:lnL>
+                      <a:noFill/>
+                    </a:lnL>
+                    <a:lnR>
+                      <a:noFill/>
+                    </a:lnR>
+                    <a:lnT>
+                      <a:noFill/>
+                    </a:lnT>
+                    <a:lnB>
+                      <a:noFill/>
+                    </a:lnB>
+                    <a:noFill/>
+                  </a:tcPr>
+                </a:tc>
+                <a:tc>
+                  <a:txBody>
+                    <a:bodyPr/>
+                    <a:lstStyle/>
+                    <a:p>
+                      <a:pPr algn="r" fontAlgn="b"/>
+                      <a:r>
+                        <a:rPr lang="en-US" sz="1200" b="0" i="0" u="none" strike="noStrike">
+                          <a:solidFill>
+                            <a:srgbClr val="000000"/>
+                          </a:solidFill>
+                          <a:effectLst/>
+                          <a:latin typeface="Aptos Narrow" panose="020B0004020202020204" pitchFamily="34" charset="0"/>
+                        </a:rPr>
+                        <a:t>16.2</a:t>
+                      </a:r>
+                    </a:p>
+                  </a:txBody>
+                  <a:tcPr marL="9525" marR="9525" marT="9525" marB="0" anchor="b">
+                    <a:lnL>
+                      <a:noFill/>
+                    </a:lnL>
+                    <a:lnR>
+                      <a:noFill/>
+                    </a:lnR>
+                    <a:lnT>
+                      <a:noFill/>
+                    </a:lnT>
+                    <a:lnB>
+                      <a:noFill/>
+                    </a:lnB>
+                    <a:noFill/>
+                  </a:tcPr>
+                </a:tc>
+                <a:tc>
+                  <a:txBody>
+                    <a:bodyPr/>
+                    <a:lstStyle/>
+                    <a:p>
+                      <a:pPr algn="r" fontAlgn="b"/>
+                      <a:r>
+                        <a:rPr lang="en-US" sz="1200" b="0" i="0" u="none" strike="noStrike">
+                          <a:solidFill>
+                            <a:srgbClr val="000000"/>
+                          </a:solidFill>
+                          <a:effectLst/>
+                          <a:latin typeface="Aptos Narrow" panose="020B0004020202020204" pitchFamily="34" charset="0"/>
+                        </a:rPr>
+                        <a:t>9.7</a:t>
+                      </a:r>
+                    </a:p>
+                  </a:txBody>
+                  <a:tcPr marL="9525" marR="9525" marT="9525" marB="0" anchor="b">
+                    <a:lnL>
+                      <a:noFill/>
+                    </a:lnL>
+                    <a:lnR>
+                      <a:noFill/>
+                    </a:lnR>
+                    <a:lnT>
+                      <a:noFill/>
+                    </a:lnT>
+                    <a:lnB>
+                      <a:noFill/>
+                    </a:lnB>
+                    <a:noFill/>
+                  </a:tcPr>
+                </a:tc>
+                <a:tc>
+                  <a:txBody>
+                    <a:bodyPr/>
+                    <a:lstStyle/>
+                    <a:p>
+                      <a:pPr algn="r" fontAlgn="b"/>
+                      <a:r>
+                        <a:rPr lang="en-US" sz="1200" b="0" i="0" u="none" strike="noStrike">
+                          <a:solidFill>
+                            <a:srgbClr val="000000"/>
+                          </a:solidFill>
+                          <a:effectLst/>
+                          <a:latin typeface="Aptos Narrow" panose="020B0004020202020204" pitchFamily="34" charset="0"/>
+                        </a:rPr>
+                        <a:t>20.7</a:t>
+                      </a:r>
+                    </a:p>
+                  </a:txBody>
+                  <a:tcPr marL="9525" marR="9525" marT="9525" marB="0" anchor="b">
+                    <a:lnL>
+                      <a:noFill/>
+                    </a:lnL>
+                    <a:lnR>
+                      <a:noFill/>
+                    </a:lnR>
+                    <a:lnT>
+                      <a:noFill/>
+                    </a:lnT>
+                    <a:lnB>
+                      <a:noFill/>
+                    </a:lnB>
+                    <a:noFill/>
+                  </a:tcPr>
+                </a:tc>
+                <a:tc>
+                  <a:txBody>
+                    <a:bodyPr/>
+                    <a:lstStyle/>
+                    <a:p>
+                      <a:pPr algn="l" fontAlgn="b"/>
+                      <a:r>
+                        <a:rPr lang="en-US" sz="1200" b="0" i="0" u="none" strike="noStrike">
+                          <a:solidFill>
+                            <a:srgbClr val="000000"/>
+                          </a:solidFill>
+                          <a:effectLst/>
+                          <a:latin typeface="Aptos Narrow" panose="020B0004020202020204" pitchFamily="34" charset="0"/>
+                        </a:rPr>
+                        <a:t>cm</a:t>
+                      </a:r>
+                    </a:p>
+                  </a:txBody>
+                  <a:tcPr marL="9525" marR="9525" marT="9525" marB="0" anchor="b">
+                    <a:lnL>
+                      <a:noFill/>
+                    </a:lnL>
+                    <a:lnR>
+                      <a:noFill/>
+                    </a:lnR>
+                    <a:lnT>
+                      <a:noFill/>
+                    </a:lnT>
+                    <a:lnB>
+                      <a:noFill/>
+                    </a:lnB>
+                    <a:noFill/>
+                  </a:tcPr>
+                </a:tc>
+                <a:tc>
+                  <a:txBody>
+                    <a:bodyPr/>
+                    <a:lstStyle/>
+                    <a:p>
+                      <a:pPr algn="r" fontAlgn="b"/>
+                      <a:r>
+                        <a:rPr lang="en-US" sz="1200" b="0" i="0" u="none" strike="noStrike">
+                          <a:solidFill>
+                            <a:srgbClr val="000000"/>
+                          </a:solidFill>
+                          <a:effectLst/>
+                          <a:latin typeface="Aptos Narrow" panose="020B0004020202020204" pitchFamily="34" charset="0"/>
+                        </a:rPr>
+                        <a:t>19</a:t>
+                      </a:r>
+                    </a:p>
+                  </a:txBody>
+                  <a:tcPr marL="9525" marR="9525" marT="9525" marB="0" anchor="b">
+                    <a:lnL>
+                      <a:noFill/>
+                    </a:lnL>
+                    <a:lnR>
+                      <a:noFill/>
+                    </a:lnR>
+                    <a:lnT>
+                      <a:noFill/>
+                    </a:lnT>
+                    <a:lnB>
+                      <a:noFill/>
+                    </a:lnB>
+                    <a:noFill/>
+                  </a:tcPr>
+                </a:tc>
+                <a:tc>
+                  <a:txBody>
+                    <a:bodyPr/>
+                    <a:lstStyle/>
+                    <a:p>
+                      <a:pPr algn="l" fontAlgn="b"/>
+                      <a:r>
+                        <a:rPr lang="en-US" sz="1200" b="0" i="0" u="none" strike="noStrike">
+                          <a:solidFill>
+                            <a:srgbClr val="000000"/>
+                          </a:solidFill>
+                          <a:effectLst/>
+                          <a:latin typeface="Aptos Narrow" panose="020B0004020202020204" pitchFamily="34" charset="0"/>
+                        </a:rPr>
+                        <a:t>Freigegeben</a:t>
+                      </a:r>
+                    </a:p>
+                  </a:txBody>
+                  <a:tcPr marL="9525" marR="9525" marT="9525" marB="0" anchor="b">
+                    <a:lnL>
+                      <a:noFill/>
+                    </a:lnL>
+                    <a:lnR>
+                      <a:noFill/>
+                    </a:lnR>
+                    <a:lnT>
+                      <a:noFill/>
+                    </a:lnT>
+                    <a:lnB>
+                      <a:noFill/>
+                    </a:lnB>
+                    <a:noFill/>
+                  </a:tcPr>
+                </a:tc>
+                <a:tc>
+                  <a:txBody>
+                    <a:bodyPr/>
+                    <a:lstStyle/>
+                    <a:p>
+                      <a:pPr algn="l" fontAlgn="b"/>
+                      <a:endParaRPr lang="en-US" sz="1200" b="0" i="0" u="none" strike="noStrike">
+                        <a:solidFill>
+                          <a:srgbClr val="000000"/>
+                        </a:solidFill>
+                        <a:effectLst/>
+                        <a:latin typeface="Aptos Narrow" panose="020B0004020202020204" pitchFamily="34" charset="0"/>
+                      </a:endParaRPr>
+                    </a:p>
+                  </a:txBody>
+                  <a:tcPr marL="9525" marR="9525" marT="9525" marB="0" anchor="b">
+                    <a:lnL>
+                      <a:noFill/>
+                    </a:lnL>
+                    <a:lnR>
+                      <a:noFill/>
+                    </a:lnR>
+                    <a:lnT>
+                      <a:noFill/>
+                    </a:lnT>
+                    <a:lnB>
+                      <a:noFill/>
+                    </a:lnB>
+                    <a:noFill/>
+                  </a:tcPr>
+                </a:tc>
+                <a:extLst>
+                  <a:ext uri="{0D108BD9-81ED-4DB2-BD59-A6C34878D82A}">
+                    <a16:rowId xmlns:a16="http://schemas.microsoft.com/office/drawing/2014/main" val="3124945972"/>
+                  </a:ext>
+                </a:extLst>
+              </a:tr>
+              <a:tr h="203200">
+                <a:tc>
+                  <a:txBody>
+                    <a:bodyPr/>
+                    <a:lstStyle/>
+                    <a:p>
+                      <a:pPr algn="l" fontAlgn="b"/>
+                      <a:endParaRPr lang="en-US" sz="1200" b="0" i="0" u="none" strike="noStrike">
+                        <a:solidFill>
+                          <a:srgbClr val="000000"/>
+                        </a:solidFill>
+                        <a:effectLst/>
+                        <a:latin typeface="Aptos Narrow" panose="020B0004020202020204" pitchFamily="34" charset="0"/>
+                      </a:endParaRPr>
+                    </a:p>
+                  </a:txBody>
+                  <a:tcPr marL="9525" marR="9525" marT="9525" marB="0" anchor="b">
+                    <a:lnL>
+                      <a:noFill/>
+                    </a:lnL>
+                    <a:lnR>
+                      <a:noFill/>
+                    </a:lnR>
+                    <a:lnT>
+                      <a:noFill/>
+                    </a:lnT>
+                    <a:lnB>
+                      <a:noFill/>
+                    </a:lnB>
+                    <a:noFill/>
+                  </a:tcPr>
+                </a:tc>
+                <a:tc>
+                  <a:txBody>
+                    <a:bodyPr/>
+                    <a:lstStyle/>
+                    <a:p>
+                      <a:pPr algn="l" fontAlgn="b"/>
+                      <a:endParaRPr lang="en-US" sz="1200" b="0" i="0" u="none" strike="noStrike">
+                        <a:solidFill>
+                          <a:srgbClr val="000000"/>
+                        </a:solidFill>
+                        <a:effectLst/>
+                        <a:latin typeface="Aptos Narrow" panose="020B0004020202020204" pitchFamily="34" charset="0"/>
+                      </a:endParaRPr>
+                    </a:p>
+                  </a:txBody>
+                  <a:tcPr marL="9525" marR="9525" marT="9525" marB="0" anchor="b">
+                    <a:lnL>
+                      <a:noFill/>
+                    </a:lnL>
+                    <a:lnR>
+                      <a:noFill/>
+                    </a:lnR>
+                    <a:lnT>
+                      <a:noFill/>
+                    </a:lnT>
+                    <a:lnB>
+                      <a:noFill/>
+                    </a:lnB>
+                    <a:noFill/>
+                  </a:tcPr>
+                </a:tc>
+                <a:tc>
+                  <a:txBody>
+                    <a:bodyPr/>
+                    <a:lstStyle/>
+                    <a:p>
+                      <a:pPr algn="l" fontAlgn="b"/>
+                      <a:endParaRPr lang="en-US" sz="1200" b="0" i="0" u="none" strike="noStrike">
+                        <a:solidFill>
+                          <a:srgbClr val="000000"/>
+                        </a:solidFill>
+                        <a:effectLst/>
+                        <a:latin typeface="Aptos Narrow" panose="020B0004020202020204" pitchFamily="34" charset="0"/>
+                      </a:endParaRPr>
+                    </a:p>
+                  </a:txBody>
+                  <a:tcPr marL="9525" marR="9525" marT="9525" marB="0" anchor="b">
+                    <a:lnL>
+                      <a:noFill/>
+                    </a:lnL>
+                    <a:lnR>
+                      <a:noFill/>
+                    </a:lnR>
+                    <a:lnT>
+                      <a:noFill/>
+                    </a:lnT>
+                    <a:lnB>
+                      <a:noFill/>
+                    </a:lnB>
+                    <a:noFill/>
+                  </a:tcPr>
+                </a:tc>
+                <a:tc>
+                  <a:txBody>
+                    <a:bodyPr/>
+                    <a:lstStyle/>
+                    <a:p>
+                      <a:pPr algn="l" fontAlgn="b"/>
+                      <a:endParaRPr lang="en-US" sz="1200" b="0" i="0" u="none" strike="noStrike">
+                        <a:solidFill>
+                          <a:srgbClr val="000000"/>
+                        </a:solidFill>
+                        <a:effectLst/>
+                        <a:latin typeface="Aptos Narrow" panose="020B0004020202020204" pitchFamily="34" charset="0"/>
+                      </a:endParaRPr>
+                    </a:p>
+                  </a:txBody>
+                  <a:tcPr marL="9525" marR="9525" marT="9525" marB="0" anchor="b">
+                    <a:lnL>
+                      <a:noFill/>
+                    </a:lnL>
+                    <a:lnR>
+                      <a:noFill/>
+                    </a:lnR>
+                    <a:lnT>
+                      <a:noFill/>
+                    </a:lnT>
+                    <a:lnB>
+                      <a:noFill/>
+                    </a:lnB>
+                    <a:noFill/>
+                  </a:tcPr>
+                </a:tc>
+                <a:tc>
+                  <a:txBody>
+                    <a:bodyPr/>
+                    <a:lstStyle/>
+                    <a:p>
+                      <a:pPr algn="l" fontAlgn="b"/>
+                      <a:endParaRPr lang="en-US" sz="1200" b="0" i="0" u="none" strike="noStrike">
+                        <a:solidFill>
+                          <a:srgbClr val="000000"/>
+                        </a:solidFill>
+                        <a:effectLst/>
+                        <a:latin typeface="Aptos Narrow" panose="020B0004020202020204" pitchFamily="34" charset="0"/>
+                      </a:endParaRPr>
+                    </a:p>
+                  </a:txBody>
+                  <a:tcPr marL="9525" marR="9525" marT="9525" marB="0" anchor="b">
+                    <a:lnL>
+                      <a:noFill/>
+                    </a:lnL>
+                    <a:lnR>
+                      <a:noFill/>
+                    </a:lnR>
+                    <a:lnT>
+                      <a:noFill/>
+                    </a:lnT>
+                    <a:lnB>
+                      <a:noFill/>
+                    </a:lnB>
+                    <a:noFill/>
+                  </a:tcPr>
+                </a:tc>
+                <a:tc>
+                  <a:txBody>
+                    <a:bodyPr/>
+                    <a:lstStyle/>
+                    <a:p>
+                      <a:pPr algn="l" fontAlgn="b"/>
+                      <a:endParaRPr lang="en-US" sz="1200" b="0" i="0" u="none" strike="noStrike">
+                        <a:solidFill>
+                          <a:srgbClr val="000000"/>
+                        </a:solidFill>
+                        <a:effectLst/>
+                        <a:latin typeface="Aptos Narrow" panose="020B0004020202020204" pitchFamily="34" charset="0"/>
+                      </a:endParaRPr>
+                    </a:p>
+                  </a:txBody>
+                  <a:tcPr marL="9525" marR="9525" marT="9525" marB="0" anchor="b">
+                    <a:lnL>
+                      <a:noFill/>
+                    </a:lnL>
+                    <a:lnR>
+                      <a:noFill/>
+                    </a:lnR>
+                    <a:lnT>
+                      <a:noFill/>
+                    </a:lnT>
+                    <a:lnB>
+                      <a:noFill/>
+                    </a:lnB>
+                    <a:noFill/>
+                  </a:tcPr>
+                </a:tc>
+                <a:tc>
+                  <a:txBody>
+                    <a:bodyPr/>
+                    <a:lstStyle/>
+                    <a:p>
+                      <a:pPr algn="l" fontAlgn="b"/>
+                      <a:endParaRPr lang="en-US" sz="1200" b="0" i="0" u="none" strike="noStrike">
+                        <a:solidFill>
+                          <a:srgbClr val="000000"/>
+                        </a:solidFill>
+                        <a:effectLst/>
+                        <a:latin typeface="Aptos Narrow" panose="020B0004020202020204" pitchFamily="34" charset="0"/>
+                      </a:endParaRPr>
+                    </a:p>
+                  </a:txBody>
+                  <a:tcPr marL="9525" marR="9525" marT="9525" marB="0" anchor="b">
+                    <a:lnL>
+                      <a:noFill/>
+                    </a:lnL>
+                    <a:lnR>
+                      <a:noFill/>
+                    </a:lnR>
+                    <a:lnT>
+                      <a:noFill/>
+                    </a:lnT>
+                    <a:lnB>
+                      <a:noFill/>
+                    </a:lnB>
+                    <a:noFill/>
+                  </a:tcPr>
+                </a:tc>
+                <a:tc>
+                  <a:txBody>
+                    <a:bodyPr/>
+                    <a:lstStyle/>
+                    <a:p>
+                      <a:pPr algn="l" fontAlgn="b"/>
+                      <a:endParaRPr lang="en-US" sz="1200" b="0" i="0" u="none" strike="noStrike">
+                        <a:solidFill>
+                          <a:srgbClr val="000000"/>
+                        </a:solidFill>
+                        <a:effectLst/>
+                        <a:latin typeface="Aptos Narrow" panose="020B0004020202020204" pitchFamily="34" charset="0"/>
+                      </a:endParaRPr>
+                    </a:p>
+                  </a:txBody>
+                  <a:tcPr marL="9525" marR="9525" marT="9525" marB="0" anchor="b">
+                    <a:lnL>
+                      <a:noFill/>
+                    </a:lnL>
+                    <a:lnR>
+                      <a:noFill/>
+                    </a:lnR>
+                    <a:lnT>
+                      <a:noFill/>
+                    </a:lnT>
+                    <a:lnB>
+                      <a:noFill/>
+                    </a:lnB>
+                    <a:noFill/>
+                  </a:tcPr>
+                </a:tc>
+                <a:tc>
+                  <a:txBody>
+                    <a:bodyPr/>
+                    <a:lstStyle/>
+                    <a:p>
+                      <a:pPr algn="l" fontAlgn="b"/>
+                      <a:endParaRPr lang="en-US" sz="1200" b="0" i="0" u="none" strike="noStrike">
+                        <a:solidFill>
+                          <a:srgbClr val="000000"/>
+                        </a:solidFill>
+                        <a:effectLst/>
+                        <a:latin typeface="Aptos Narrow" panose="020B0004020202020204" pitchFamily="34" charset="0"/>
+                      </a:endParaRPr>
+                    </a:p>
+                  </a:txBody>
+                  <a:tcPr marL="9525" marR="9525" marT="9525" marB="0" anchor="b">
+                    <a:lnL>
+                      <a:noFill/>
+                    </a:lnL>
+                    <a:lnR>
+                      <a:noFill/>
+                    </a:lnR>
+                    <a:lnT>
+                      <a:noFill/>
+                    </a:lnT>
+                    <a:lnB>
+                      <a:noFill/>
+                    </a:lnB>
+                    <a:noFill/>
+                  </a:tcPr>
+                </a:tc>
+                <a:tc>
+                  <a:txBody>
+                    <a:bodyPr/>
+                    <a:lstStyle/>
+                    <a:p>
+                      <a:pPr algn="l" fontAlgn="b"/>
+                      <a:endParaRPr lang="en-US" sz="1200" b="0" i="0" u="none" strike="noStrike">
+                        <a:solidFill>
+                          <a:srgbClr val="000000"/>
+                        </a:solidFill>
+                        <a:effectLst/>
+                        <a:latin typeface="Aptos Narrow" panose="020B0004020202020204" pitchFamily="34" charset="0"/>
+                      </a:endParaRPr>
+                    </a:p>
+                  </a:txBody>
+                  <a:tcPr marL="9525" marR="9525" marT="9525" marB="0" anchor="b">
+                    <a:lnL>
+                      <a:noFill/>
+                    </a:lnL>
+                    <a:lnR>
+                      <a:noFill/>
+                    </a:lnR>
+                    <a:lnT>
+                      <a:noFill/>
+                    </a:lnT>
+                    <a:lnB>
+                      <a:noFill/>
+                    </a:lnB>
+                    <a:noFill/>
+                  </a:tcPr>
+                </a:tc>
+                <a:tc>
+                  <a:txBody>
+                    <a:bodyPr/>
+                    <a:lstStyle/>
+                    <a:p>
+                      <a:pPr algn="l" fontAlgn="b"/>
+                      <a:endParaRPr lang="en-US" sz="1200" b="0" i="0" u="none" strike="noStrike">
+                        <a:solidFill>
+                          <a:srgbClr val="000000"/>
+                        </a:solidFill>
+                        <a:effectLst/>
+                        <a:latin typeface="Aptos Narrow" panose="020B0004020202020204" pitchFamily="34" charset="0"/>
+                      </a:endParaRPr>
+                    </a:p>
+                  </a:txBody>
+                  <a:tcPr marL="9525" marR="9525" marT="9525" marB="0" anchor="b">
+                    <a:lnL>
+                      <a:noFill/>
+                    </a:lnL>
+                    <a:lnR>
+                      <a:noFill/>
+                    </a:lnR>
+                    <a:lnT>
+                      <a:noFill/>
+                    </a:lnT>
+                    <a:lnB>
+                      <a:noFill/>
+                    </a:lnB>
+                    <a:noFill/>
+                  </a:tcPr>
+                </a:tc>
+                <a:tc>
+                  <a:txBody>
+                    <a:bodyPr/>
+                    <a:lstStyle/>
+                    <a:p>
+                      <a:pPr algn="l" fontAlgn="b"/>
+                      <a:endParaRPr lang="en-US" sz="1200" b="0" i="0" u="none" strike="noStrike" dirty="0">
+                        <a:solidFill>
+                          <a:srgbClr val="000000"/>
+                        </a:solidFill>
+                        <a:effectLst/>
+                        <a:latin typeface="Aptos Narrow" panose="020B0004020202020204" pitchFamily="34" charset="0"/>
+                      </a:endParaRPr>
+                    </a:p>
+                  </a:txBody>
+                  <a:tcPr marL="9525" marR="9525" marT="9525" marB="0" anchor="b">
+                    <a:lnL>
+                      <a:noFill/>
+                    </a:lnL>
+                    <a:lnR>
+                      <a:noFill/>
+                    </a:lnR>
+                    <a:lnT>
+                      <a:noFill/>
+                    </a:lnT>
+                    <a:lnB>
+                      <a:noFill/>
+                    </a:lnB>
+                    <a:noFill/>
+                  </a:tcPr>
+                </a:tc>
+                <a:extLst>
+                  <a:ext uri="{0D108BD9-81ED-4DB2-BD59-A6C34878D82A}">
+                    <a16:rowId xmlns:a16="http://schemas.microsoft.com/office/drawing/2014/main" val="35187717"/>
+                  </a:ext>
+                </a:extLst>
+              </a:tr>
+            </a:tbl>
+          </a:graphicData>
+        </a:graphic>
+      </p:graphicFrame>
     </p:spTree>
     <p:extLst>
       <p:ext uri="{BB962C8B-B14F-4D97-AF65-F5344CB8AC3E}">
@@ -5711,7 +9816,7 @@
 </p:sld>
 </file>
 
-<file path=ppt/slides/slide11.xml><?xml version="1.0" encoding="utf-8"?>
+<file path=ppt/slides/slide12.xml><?xml version="1.0" encoding="utf-8"?>
 <p:sld xmlns:a="http://schemas.openxmlformats.org/drawingml/2006/main" xmlns:r="http://schemas.openxmlformats.org/officeDocument/2006/relationships" xmlns:p="http://schemas.openxmlformats.org/presentationml/2006/main">
   <p:cSld>
     <p:spTree>
@@ -6476,7 +10581,7 @@
           <p:cNvPr id="2" name="Title 1">
             <a:extLst>
               <a:ext uri="{FF2B5EF4-FFF2-40B4-BE49-F238E27FC236}">
-                <a16:creationId xmlns:a16="http://schemas.microsoft.com/office/drawing/2014/main" id="{0664A6FE-CB32-15B3-8DC3-C410C18B81A9}"/>
+                <a16:creationId xmlns:a16="http://schemas.microsoft.com/office/drawing/2014/main" id="{3FFD4074-6312-E0EE-2257-8D5441C5B5D5}"/>
               </a:ext>
             </a:extLst>
           </p:cNvPr>
@@ -6496,6 +10601,135 @@
           </a:p>
         </p:txBody>
       </p:sp>
+      <p:sp>
+        <p:nvSpPr>
+          <p:cNvPr id="3" name="Content Placeholder 2">
+            <a:extLst>
+              <a:ext uri="{FF2B5EF4-FFF2-40B4-BE49-F238E27FC236}">
+                <a16:creationId xmlns:a16="http://schemas.microsoft.com/office/drawing/2014/main" id="{C8010576-0B9B-BE2C-A22D-6C6279CD914A}"/>
+              </a:ext>
+            </a:extLst>
+          </p:cNvPr>
+          <p:cNvSpPr>
+            <a:spLocks noGrp="1"/>
+          </p:cNvSpPr>
+          <p:nvPr>
+            <p:ph idx="1"/>
+          </p:nvPr>
+        </p:nvSpPr>
+        <p:spPr/>
+        <p:txBody>
+          <a:bodyPr/>
+          <a:lstStyle/>
+          <a:p>
+            <a:r>
+              <a:rPr lang="en-US" b="1" dirty="0"/>
+              <a:t>The three business problems named in the brief are:</a:t>
+            </a:r>
+            <a:endParaRPr lang="en-US" dirty="0"/>
+          </a:p>
+          <a:p>
+            <a:pPr>
+              <a:buFont typeface="+mj-lt"/>
+              <a:buAutoNum type="arabicPeriod"/>
+            </a:pPr>
+            <a:r>
+              <a:rPr lang="en-US" b="1" dirty="0" err="1"/>
+              <a:t>Kundenservice</a:t>
+            </a:r>
+            <a:r>
+              <a:rPr lang="en-US" b="1" dirty="0"/>
+              <a:t> / Legal</a:t>
+            </a:r>
+            <a:r>
+              <a:rPr lang="en-US" dirty="0"/>
+              <a:t> — wrong info on the website, </a:t>
+            </a:r>
+            <a:r>
+              <a:rPr lang="en-US" dirty="0" err="1"/>
+              <a:t>Unterlassungserklärung</a:t>
+            </a:r>
+            <a:endParaRPr lang="en-US" dirty="0"/>
+          </a:p>
+          <a:p>
+            <a:pPr>
+              <a:buFont typeface="+mj-lt"/>
+              <a:buAutoNum type="arabicPeriod"/>
+            </a:pPr>
+            <a:r>
+              <a:rPr lang="en-US" b="1" dirty="0" err="1"/>
+              <a:t>Logistik</a:t>
+            </a:r>
+            <a:r>
+              <a:rPr lang="en-US" dirty="0"/>
+              <a:t> — </a:t>
+            </a:r>
+            <a:r>
+              <a:rPr lang="en-US" dirty="0" err="1"/>
+              <a:t>Fehllieferungen</a:t>
+            </a:r>
+            <a:r>
+              <a:rPr lang="en-US" dirty="0"/>
+              <a:t>, wrong </a:t>
+            </a:r>
+            <a:r>
+              <a:rPr lang="en-US" dirty="0" err="1"/>
+              <a:t>Karton</a:t>
+            </a:r>
+            <a:r>
+              <a:rPr lang="en-US" dirty="0"/>
+              <a:t> calculations, manual rework</a:t>
+            </a:r>
+          </a:p>
+          <a:p>
+            <a:pPr>
+              <a:buFont typeface="+mj-lt"/>
+              <a:buAutoNum type="arabicPeriod"/>
+            </a:pPr>
+            <a:r>
+              <a:rPr lang="en-US" b="1" dirty="0"/>
+              <a:t>Marketing</a:t>
+            </a:r>
+            <a:r>
+              <a:rPr lang="en-US" dirty="0"/>
+              <a:t> — ongoing complaints</a:t>
+            </a:r>
+          </a:p>
+          <a:p>
+            <a:endParaRPr lang="de-DE" dirty="0"/>
+          </a:p>
+        </p:txBody>
+      </p:sp>
+    </p:spTree>
+    <p:extLst>
+      <p:ext uri="{BB962C8B-B14F-4D97-AF65-F5344CB8AC3E}">
+        <p14:creationId xmlns:p14="http://schemas.microsoft.com/office/powerpoint/2010/main" val="3121836545"/>
+      </p:ext>
+    </p:extLst>
+  </p:cSld>
+  <p:clrMapOvr>
+    <a:masterClrMapping/>
+  </p:clrMapOvr>
+</p:sld>
+</file>
+
+<file path=ppt/slides/slide4.xml><?xml version="1.0" encoding="utf-8"?>
+<p:sld xmlns:a="http://schemas.openxmlformats.org/drawingml/2006/main" xmlns:r="http://schemas.openxmlformats.org/officeDocument/2006/relationships" xmlns:p="http://schemas.openxmlformats.org/presentationml/2006/main">
+  <p:cSld>
+    <p:spTree>
+      <p:nvGrpSpPr>
+        <p:cNvPr id="1" name=""/>
+        <p:cNvGrpSpPr/>
+        <p:nvPr/>
+      </p:nvGrpSpPr>
+      <p:grpSpPr>
+        <a:xfrm>
+          <a:off x="0" y="0"/>
+          <a:ext cx="0" cy="0"/>
+          <a:chOff x="0" y="0"/>
+          <a:chExt cx="0" cy="0"/>
+        </a:xfrm>
+      </p:grpSpPr>
       <p:sp>
         <p:nvSpPr>
           <p:cNvPr id="3" name="Content Placeholder 2">
@@ -6512,66 +10746,750 @@
             <p:ph idx="1"/>
           </p:nvPr>
         </p:nvSpPr>
-        <p:spPr/>
+        <p:spPr>
+          <a:xfrm>
+            <a:off x="838200" y="1255776"/>
+            <a:ext cx="10515600" cy="4921187"/>
+          </a:xfrm>
+        </p:spPr>
         <p:txBody>
           <a:bodyPr>
             <a:normAutofit/>
           </a:bodyPr>
           <a:lstStyle/>
           <a:p>
-            <a:r>
-              <a:rPr lang="de-DE" sz="1600" dirty="0"/>
-              <a:t>1NF: Eine Tabelle ist in der ersten Normalform, wenn jedes Attribut ausschließlich </a:t>
-            </a:r>
-            <a:r>
-              <a:rPr lang="de-DE" sz="1600" b="1" dirty="0"/>
-              <a:t>atomare</a:t>
-            </a:r>
-            <a:r>
-              <a:rPr lang="de-DE" sz="1600" dirty="0"/>
-              <a:t>, nicht weiter zerlegbare Werte enthält — also keine Listen, Mengen oder verschachtelten Strukturen.</a:t>
-            </a:r>
-          </a:p>
-          <a:p>
-            <a:r>
-              <a:rPr lang="de-DE" sz="1600" dirty="0"/>
-              <a:t>2NF: Eine Tabelle ist in der zweiten Normalform, wenn sie in 1NF ist und jedes Nicht-Schlüssel-Attribut vom vollständigen Schlüssel abhängt — und nicht nur von einem Teil davon.</a:t>
-            </a:r>
-            <a:r>
-              <a:rPr lang="de-DE" sz="1200" dirty="0"/>
-              <a:t> </a:t>
-            </a:r>
-          </a:p>
-          <a:p>
-            <a:pPr marL="0" indent="0">
+            <a:pPr marL="0" indent="0" algn="l">
               <a:buNone/>
             </a:pPr>
             <a:r>
-              <a:rPr lang="de-DE" sz="1200" dirty="0">
-                <a:sym typeface="Wingdings" pitchFamily="2" charset="2"/>
-              </a:rPr>
-              <a:t>                        </a:t>
-            </a:r>
-            <a:r>
-              <a:rPr lang="de-DE" sz="1400" dirty="0">
-                <a:sym typeface="Wingdings" pitchFamily="2" charset="2"/>
-              </a:rPr>
-              <a:t>Eine Tabelle mit einem einfachen Primärschlüssel, die in 1NF ist, ist automatisch in 2NF.</a:t>
-            </a:r>
-          </a:p>
-          <a:p>
-            <a:r>
-              <a:rPr lang="de-DE" sz="1600" dirty="0">
-                <a:sym typeface="Wingdings" pitchFamily="2" charset="2"/>
-              </a:rPr>
-              <a:t>3NF: Eine Tabelle ist in der dritten Normalform, wenn sie in 2NF ist und kein Nicht-Schlüssel-Attribut transitiv von einem Kandidatenschlüssel abhängt.</a:t>
-            </a:r>
-          </a:p>
-          <a:p>
-            <a:pPr marL="0" indent="0">
+              <a:rPr lang="en-US" sz="1200" b="1" i="0" dirty="0">
+                <a:solidFill>
+                  <a:srgbClr val="0A0A0A"/>
+                </a:solidFill>
+                <a:effectLst/>
+                <a:highlight>
+                  <a:srgbClr val="FFFFFF"/>
+                </a:highlight>
+                <a:latin typeface="Calibri" panose="020F0502020204030204" pitchFamily="34" charset="0"/>
+                <a:cs typeface="Calibri" panose="020F0502020204030204" pitchFamily="34" charset="0"/>
+              </a:rPr>
+              <a:t>1. First Normal Form (1NF): Atomicity</a:t>
+            </a:r>
+            <a:r>
+              <a:rPr lang="en-US" sz="1200" b="0" i="0" dirty="0">
+                <a:solidFill>
+                  <a:srgbClr val="0A0A0A"/>
+                </a:solidFill>
+                <a:effectLst/>
+                <a:highlight>
+                  <a:srgbClr val="FFFFFF"/>
+                </a:highlight>
+                <a:latin typeface="Calibri" panose="020F0502020204030204" pitchFamily="34" charset="0"/>
+                <a:cs typeface="Calibri" panose="020F0502020204030204" pitchFamily="34" charset="0"/>
+              </a:rPr>
+              <a:t> </a:t>
+            </a:r>
+          </a:p>
+          <a:p>
+            <a:pPr marL="0" indent="0" algn="l">
               <a:buNone/>
             </a:pPr>
-            <a:endParaRPr lang="de-DE" sz="1200" dirty="0"/>
+            <a:r>
+              <a:rPr lang="en-US" sz="1200" b="1" i="0" dirty="0">
+                <a:solidFill>
+                  <a:srgbClr val="0A0A0A"/>
+                </a:solidFill>
+                <a:effectLst/>
+                <a:highlight>
+                  <a:srgbClr val="FFFFFF"/>
+                </a:highlight>
+                <a:latin typeface="Calibri" panose="020F0502020204030204" pitchFamily="34" charset="0"/>
+                <a:cs typeface="Calibri" panose="020F0502020204030204" pitchFamily="34" charset="0"/>
+              </a:rPr>
+              <a:t>Definition:</a:t>
+            </a:r>
+            <a:r>
+              <a:rPr lang="en-US" sz="1200" b="0" i="0" dirty="0">
+                <a:solidFill>
+                  <a:srgbClr val="0A0A0A"/>
+                </a:solidFill>
+                <a:effectLst/>
+                <a:highlight>
+                  <a:srgbClr val="FFFFFF"/>
+                </a:highlight>
+                <a:latin typeface="Calibri" panose="020F0502020204030204" pitchFamily="34" charset="0"/>
+                <a:cs typeface="Calibri" panose="020F0502020204030204" pitchFamily="34" charset="0"/>
+              </a:rPr>
+              <a:t> A table is in 1NF if all data cells contain only single (atomic) values, and there are no repeating groups or arrays.</a:t>
+            </a:r>
+          </a:p>
+          <a:p>
+            <a:pPr marL="0" indent="0" algn="l">
+              <a:buNone/>
+            </a:pPr>
+            <a:r>
+              <a:rPr lang="en-US" sz="1200" b="1" i="0" dirty="0">
+                <a:solidFill>
+                  <a:srgbClr val="0A0A0A"/>
+                </a:solidFill>
+                <a:effectLst/>
+                <a:highlight>
+                  <a:srgbClr val="FFFFFF"/>
+                </a:highlight>
+                <a:latin typeface="Calibri" panose="020F0502020204030204" pitchFamily="34" charset="0"/>
+                <a:cs typeface="Calibri" panose="020F0502020204030204" pitchFamily="34" charset="0"/>
+              </a:rPr>
+              <a:t>Key Action:</a:t>
+            </a:r>
+            <a:r>
+              <a:rPr lang="en-US" sz="1200" b="0" i="0" dirty="0">
+                <a:solidFill>
+                  <a:srgbClr val="0A0A0A"/>
+                </a:solidFill>
+                <a:effectLst/>
+                <a:highlight>
+                  <a:srgbClr val="FFFFFF"/>
+                </a:highlight>
+                <a:latin typeface="Calibri" panose="020F0502020204030204" pitchFamily="34" charset="0"/>
+                <a:cs typeface="Calibri" panose="020F0502020204030204" pitchFamily="34" charset="0"/>
+              </a:rPr>
+              <a:t> Eliminate non-atomic values (e.g., separating a comma-separated list of phone numbers into multiple rows).</a:t>
+            </a:r>
+            <a:br>
+              <a:rPr lang="en-US" sz="1200" b="0" i="0" dirty="0">
+                <a:solidFill>
+                  <a:srgbClr val="0A0A0A"/>
+                </a:solidFill>
+                <a:effectLst/>
+                <a:highlight>
+                  <a:srgbClr val="FFFFFF"/>
+                </a:highlight>
+                <a:latin typeface="Calibri" panose="020F0502020204030204" pitchFamily="34" charset="0"/>
+                <a:cs typeface="Calibri" panose="020F0502020204030204" pitchFamily="34" charset="0"/>
+              </a:rPr>
+            </a:br>
+            <a:endParaRPr lang="en-US" sz="1200" b="0" i="0" dirty="0">
+              <a:solidFill>
+                <a:srgbClr val="0A0A0A"/>
+              </a:solidFill>
+              <a:effectLst/>
+              <a:highlight>
+                <a:srgbClr val="FFFFFF"/>
+              </a:highlight>
+              <a:latin typeface="Calibri" panose="020F0502020204030204" pitchFamily="34" charset="0"/>
+              <a:cs typeface="Calibri" panose="020F0502020204030204" pitchFamily="34" charset="0"/>
+            </a:endParaRPr>
+          </a:p>
+          <a:p>
+            <a:pPr marL="0" indent="0" algn="l">
+              <a:buNone/>
+            </a:pPr>
+            <a:r>
+              <a:rPr lang="en-US" sz="1200" b="1" i="0" dirty="0">
+                <a:solidFill>
+                  <a:srgbClr val="0A0A0A"/>
+                </a:solidFill>
+                <a:effectLst/>
+                <a:highlight>
+                  <a:srgbClr val="FFFFFF"/>
+                </a:highlight>
+                <a:latin typeface="Calibri" panose="020F0502020204030204" pitchFamily="34" charset="0"/>
+                <a:cs typeface="Calibri" panose="020F0502020204030204" pitchFamily="34" charset="0"/>
+              </a:rPr>
+              <a:t>2. Second Normal Form (2NF): Full Functional Dependency</a:t>
+            </a:r>
+            <a:r>
+              <a:rPr lang="en-US" sz="1200" b="0" i="0" dirty="0">
+                <a:solidFill>
+                  <a:srgbClr val="0A0A0A"/>
+                </a:solidFill>
+                <a:effectLst/>
+                <a:highlight>
+                  <a:srgbClr val="FFFFFF"/>
+                </a:highlight>
+                <a:latin typeface="Calibri" panose="020F0502020204030204" pitchFamily="34" charset="0"/>
+                <a:cs typeface="Calibri" panose="020F0502020204030204" pitchFamily="34" charset="0"/>
+              </a:rPr>
+              <a:t> </a:t>
+            </a:r>
+          </a:p>
+          <a:p>
+            <a:pPr marL="0" indent="0" algn="l">
+              <a:buNone/>
+            </a:pPr>
+            <a:r>
+              <a:rPr lang="en-US" sz="1200" b="1" i="0" dirty="0">
+                <a:solidFill>
+                  <a:srgbClr val="0A0A0A"/>
+                </a:solidFill>
+                <a:effectLst/>
+                <a:highlight>
+                  <a:srgbClr val="FFFFFF"/>
+                </a:highlight>
+                <a:latin typeface="Calibri" panose="020F0502020204030204" pitchFamily="34" charset="0"/>
+                <a:cs typeface="Calibri" panose="020F0502020204030204" pitchFamily="34" charset="0"/>
+              </a:rPr>
+              <a:t>Definition:</a:t>
+            </a:r>
+            <a:r>
+              <a:rPr lang="en-US" sz="1200" b="0" i="0" dirty="0">
+                <a:solidFill>
+                  <a:srgbClr val="0A0A0A"/>
+                </a:solidFill>
+                <a:effectLst/>
+                <a:highlight>
+                  <a:srgbClr val="FFFFFF"/>
+                </a:highlight>
+                <a:latin typeface="Calibri" panose="020F0502020204030204" pitchFamily="34" charset="0"/>
+                <a:cs typeface="Calibri" panose="020F0502020204030204" pitchFamily="34" charset="0"/>
+              </a:rPr>
+              <a:t> A table is in 2NF if it is in 1NF and all non-key attributes are fully functionally dependent on the entire primary key.</a:t>
+            </a:r>
+          </a:p>
+          <a:p>
+            <a:pPr marL="0" indent="0" algn="l">
+              <a:buNone/>
+            </a:pPr>
+            <a:r>
+              <a:rPr lang="en-US" sz="1200" b="1" i="0" dirty="0">
+                <a:solidFill>
+                  <a:srgbClr val="0A0A0A"/>
+                </a:solidFill>
+                <a:effectLst/>
+                <a:highlight>
+                  <a:srgbClr val="FFFFFF"/>
+                </a:highlight>
+                <a:latin typeface="Calibri" panose="020F0502020204030204" pitchFamily="34" charset="0"/>
+                <a:cs typeface="Calibri" panose="020F0502020204030204" pitchFamily="34" charset="0"/>
+              </a:rPr>
+              <a:t>Key Action:</a:t>
+            </a:r>
+            <a:r>
+              <a:rPr lang="en-US" sz="1200" b="0" i="0" dirty="0">
+                <a:solidFill>
+                  <a:srgbClr val="0A0A0A"/>
+                </a:solidFill>
+                <a:effectLst/>
+                <a:highlight>
+                  <a:srgbClr val="FFFFFF"/>
+                </a:highlight>
+                <a:latin typeface="Calibri" panose="020F0502020204030204" pitchFamily="34" charset="0"/>
+                <a:cs typeface="Calibri" panose="020F0502020204030204" pitchFamily="34" charset="0"/>
+              </a:rPr>
+              <a:t> Remove partial dependencies, which occur when a non-key attribute depends on only </a:t>
+            </a:r>
+            <a:r>
+              <a:rPr lang="en-US" sz="1200" b="0" i="1" dirty="0">
+                <a:solidFill>
+                  <a:srgbClr val="0A0A0A"/>
+                </a:solidFill>
+                <a:effectLst/>
+                <a:highlight>
+                  <a:srgbClr val="FFFFFF"/>
+                </a:highlight>
+                <a:latin typeface="Calibri" panose="020F0502020204030204" pitchFamily="34" charset="0"/>
+                <a:cs typeface="Calibri" panose="020F0502020204030204" pitchFamily="34" charset="0"/>
+              </a:rPr>
+              <a:t>part</a:t>
+            </a:r>
+            <a:r>
+              <a:rPr lang="en-US" sz="1200" b="0" i="0" dirty="0">
+                <a:solidFill>
+                  <a:srgbClr val="0A0A0A"/>
+                </a:solidFill>
+                <a:effectLst/>
+                <a:highlight>
+                  <a:srgbClr val="FFFFFF"/>
+                </a:highlight>
+                <a:latin typeface="Calibri" panose="020F0502020204030204" pitchFamily="34" charset="0"/>
+                <a:cs typeface="Calibri" panose="020F0502020204030204" pitchFamily="34" charset="0"/>
+              </a:rPr>
+              <a:t> of a composite primary key.</a:t>
+            </a:r>
+          </a:p>
+          <a:p>
+            <a:pPr marL="0" indent="0" algn="l">
+              <a:buNone/>
+            </a:pPr>
+            <a:r>
+              <a:rPr lang="en-US" sz="1200" b="1" i="0" dirty="0">
+                <a:solidFill>
+                  <a:srgbClr val="0A0A0A"/>
+                </a:solidFill>
+                <a:effectLst/>
+                <a:highlight>
+                  <a:srgbClr val="FFFFFF"/>
+                </a:highlight>
+                <a:latin typeface="Calibri" panose="020F0502020204030204" pitchFamily="34" charset="0"/>
+                <a:cs typeface="Calibri" panose="020F0502020204030204" pitchFamily="34" charset="0"/>
+              </a:rPr>
+              <a:t>Scenario:</a:t>
+            </a:r>
+            <a:r>
+              <a:rPr lang="en-US" sz="1200" b="0" i="0" dirty="0">
+                <a:solidFill>
+                  <a:srgbClr val="0A0A0A"/>
+                </a:solidFill>
+                <a:effectLst/>
+                <a:highlight>
+                  <a:srgbClr val="FFFFFF"/>
+                </a:highlight>
+                <a:latin typeface="Calibri" panose="020F0502020204030204" pitchFamily="34" charset="0"/>
+                <a:cs typeface="Calibri" panose="020F0502020204030204" pitchFamily="34" charset="0"/>
+              </a:rPr>
+              <a:t> In a table with a composite key (</a:t>
+            </a:r>
+            <a:r>
+              <a:rPr lang="en-US" sz="1200" b="0" i="0" dirty="0" err="1">
+                <a:solidFill>
+                  <a:srgbClr val="0A0A0A"/>
+                </a:solidFill>
+                <a:effectLst/>
+                <a:highlight>
+                  <a:srgbClr val="FFFFFF"/>
+                </a:highlight>
+                <a:latin typeface="Calibri" panose="020F0502020204030204" pitchFamily="34" charset="0"/>
+                <a:cs typeface="Calibri" panose="020F0502020204030204" pitchFamily="34" charset="0"/>
+              </a:rPr>
+              <a:t>OrderID</a:t>
+            </a:r>
+            <a:r>
+              <a:rPr lang="en-US" sz="1200" b="0" i="0" dirty="0">
+                <a:solidFill>
+                  <a:srgbClr val="0A0A0A"/>
+                </a:solidFill>
+                <a:effectLst/>
+                <a:highlight>
+                  <a:srgbClr val="FFFFFF"/>
+                </a:highlight>
+                <a:latin typeface="Calibri" panose="020F0502020204030204" pitchFamily="34" charset="0"/>
+                <a:cs typeface="Calibri" panose="020F0502020204030204" pitchFamily="34" charset="0"/>
+              </a:rPr>
+              <a:t>, </a:t>
+            </a:r>
+            <a:r>
+              <a:rPr lang="en-US" sz="1200" b="0" i="0" dirty="0" err="1">
+                <a:solidFill>
+                  <a:srgbClr val="0A0A0A"/>
+                </a:solidFill>
+                <a:effectLst/>
+                <a:highlight>
+                  <a:srgbClr val="FFFFFF"/>
+                </a:highlight>
+                <a:latin typeface="Calibri" panose="020F0502020204030204" pitchFamily="34" charset="0"/>
+                <a:cs typeface="Calibri" panose="020F0502020204030204" pitchFamily="34" charset="0"/>
+              </a:rPr>
+              <a:t>ProductID</a:t>
+            </a:r>
+            <a:r>
+              <a:rPr lang="en-US" sz="1200" b="0" i="0" dirty="0">
+                <a:solidFill>
+                  <a:srgbClr val="0A0A0A"/>
+                </a:solidFill>
+                <a:effectLst/>
+                <a:highlight>
+                  <a:srgbClr val="FFFFFF"/>
+                </a:highlight>
+                <a:latin typeface="Calibri" panose="020F0502020204030204" pitchFamily="34" charset="0"/>
+                <a:cs typeface="Calibri" panose="020F0502020204030204" pitchFamily="34" charset="0"/>
+              </a:rPr>
+              <a:t>), a </a:t>
+            </a:r>
+            <a:r>
+              <a:rPr lang="en-US" sz="1200" b="0" i="0" dirty="0" err="1">
+                <a:solidFill>
+                  <a:srgbClr val="0A0A0A"/>
+                </a:solidFill>
+                <a:effectLst/>
+                <a:highlight>
+                  <a:srgbClr val="FFFFFF"/>
+                </a:highlight>
+                <a:latin typeface="Calibri" panose="020F0502020204030204" pitchFamily="34" charset="0"/>
+                <a:cs typeface="Calibri" panose="020F0502020204030204" pitchFamily="34" charset="0"/>
+              </a:rPr>
+              <a:t>ProductPrice</a:t>
+            </a:r>
+            <a:r>
+              <a:rPr lang="en-US" sz="1200" b="0" i="0" dirty="0">
+                <a:solidFill>
+                  <a:srgbClr val="0A0A0A"/>
+                </a:solidFill>
+                <a:effectLst/>
+                <a:highlight>
+                  <a:srgbClr val="FFFFFF"/>
+                </a:highlight>
+                <a:latin typeface="Calibri" panose="020F0502020204030204" pitchFamily="34" charset="0"/>
+                <a:cs typeface="Calibri" panose="020F0502020204030204" pitchFamily="34" charset="0"/>
+              </a:rPr>
+              <a:t> dependent only on </a:t>
+            </a:r>
+            <a:r>
+              <a:rPr lang="en-US" sz="1200" b="0" i="0" dirty="0" err="1">
+                <a:solidFill>
+                  <a:srgbClr val="0A0A0A"/>
+                </a:solidFill>
+                <a:effectLst/>
+                <a:highlight>
+                  <a:srgbClr val="FFFFFF"/>
+                </a:highlight>
+                <a:latin typeface="Calibri" panose="020F0502020204030204" pitchFamily="34" charset="0"/>
+                <a:cs typeface="Calibri" panose="020F0502020204030204" pitchFamily="34" charset="0"/>
+              </a:rPr>
+              <a:t>ProductID</a:t>
+            </a:r>
+            <a:r>
+              <a:rPr lang="en-US" sz="1200" b="0" i="0" dirty="0">
+                <a:solidFill>
+                  <a:srgbClr val="0A0A0A"/>
+                </a:solidFill>
+                <a:effectLst/>
+                <a:highlight>
+                  <a:srgbClr val="FFFFFF"/>
+                </a:highlight>
+                <a:latin typeface="Calibri" panose="020F0502020204030204" pitchFamily="34" charset="0"/>
+                <a:cs typeface="Calibri" panose="020F0502020204030204" pitchFamily="34" charset="0"/>
+              </a:rPr>
+              <a:t> violates 2NF.</a:t>
+            </a:r>
+            <a:endParaRPr lang="en-US" sz="1100" b="0" i="0" dirty="0">
+              <a:solidFill>
+                <a:srgbClr val="0A0A0A"/>
+              </a:solidFill>
+              <a:effectLst/>
+              <a:highlight>
+                <a:srgbClr val="FFFFFF"/>
+              </a:highlight>
+              <a:latin typeface="Calibri" panose="020F0502020204030204" pitchFamily="34" charset="0"/>
+              <a:cs typeface="Calibri" panose="020F0502020204030204" pitchFamily="34" charset="0"/>
+            </a:endParaRPr>
+          </a:p>
+          <a:p>
+            <a:pPr marL="0" indent="0" algn="l">
+              <a:buNone/>
+            </a:pPr>
+            <a:endParaRPr lang="en-US" sz="1100" b="1" i="0" dirty="0">
+              <a:solidFill>
+                <a:srgbClr val="0A0A0A"/>
+              </a:solidFill>
+              <a:effectLst/>
+              <a:highlight>
+                <a:srgbClr val="FFFFFF"/>
+              </a:highlight>
+              <a:latin typeface="Google Sans"/>
+            </a:endParaRPr>
+          </a:p>
+          <a:p>
+            <a:pPr marL="0" indent="0" algn="l">
+              <a:buNone/>
+            </a:pPr>
+            <a:r>
+              <a:rPr lang="en-US" sz="1200" b="1" i="0" dirty="0">
+                <a:solidFill>
+                  <a:srgbClr val="0A0A0A"/>
+                </a:solidFill>
+                <a:effectLst/>
+                <a:highlight>
+                  <a:srgbClr val="FFFFFF"/>
+                </a:highlight>
+                <a:latin typeface="Google Sans"/>
+              </a:rPr>
+              <a:t>3. Third Normal Form (3NF): No Transitive Dependency </a:t>
+            </a:r>
+          </a:p>
+          <a:p>
+            <a:pPr marL="0" indent="0" algn="l">
+              <a:buNone/>
+            </a:pPr>
+            <a:r>
+              <a:rPr lang="en-US" sz="1200" b="1" i="0" dirty="0">
+                <a:solidFill>
+                  <a:srgbClr val="0A0A0A"/>
+                </a:solidFill>
+                <a:effectLst/>
+                <a:highlight>
+                  <a:srgbClr val="FFFFFF"/>
+                </a:highlight>
+                <a:latin typeface="Google Sans"/>
+              </a:rPr>
+              <a:t>Definition</a:t>
+            </a:r>
+            <a:r>
+              <a:rPr lang="en-US" sz="1200" b="0" i="0" dirty="0">
+                <a:solidFill>
+                  <a:srgbClr val="0A0A0A"/>
+                </a:solidFill>
+                <a:effectLst/>
+                <a:highlight>
+                  <a:srgbClr val="FFFFFF"/>
+                </a:highlight>
+                <a:latin typeface="Google Sans"/>
+              </a:rPr>
+              <a:t>: A table is in 3NF if it is in 2NF and no non-key attribute depends on another non-key attribute (no transitive dependency).</a:t>
+            </a:r>
+          </a:p>
+          <a:p>
+            <a:pPr marL="0" indent="0" algn="l">
+              <a:buNone/>
+            </a:pPr>
+            <a:r>
+              <a:rPr lang="en-US" sz="1200" b="1" i="0" dirty="0">
+                <a:solidFill>
+                  <a:srgbClr val="0A0A0A"/>
+                </a:solidFill>
+                <a:effectLst/>
+                <a:highlight>
+                  <a:srgbClr val="FFFFFF"/>
+                </a:highlight>
+                <a:latin typeface="Google Sans"/>
+              </a:rPr>
+              <a:t>Key Action: </a:t>
+            </a:r>
+            <a:r>
+              <a:rPr lang="en-US" sz="1200" b="0" i="0" dirty="0">
+                <a:solidFill>
+                  <a:srgbClr val="0A0A0A"/>
+                </a:solidFill>
+                <a:effectLst/>
+                <a:highlight>
+                  <a:srgbClr val="FFFFFF"/>
+                </a:highlight>
+                <a:latin typeface="Google Sans"/>
+              </a:rPr>
+              <a:t>Ensure all non-key attributes depend only on the primary key, not on other columns.</a:t>
+            </a:r>
+          </a:p>
+          <a:p>
+            <a:pPr marL="0" indent="0" algn="l">
+              <a:buNone/>
+            </a:pPr>
+            <a:r>
+              <a:rPr lang="en-US" sz="1200" b="1" i="0" dirty="0">
+                <a:solidFill>
+                  <a:srgbClr val="0A0A0A"/>
+                </a:solidFill>
+                <a:effectLst/>
+                <a:highlight>
+                  <a:srgbClr val="FFFFFF"/>
+                </a:highlight>
+                <a:latin typeface="Google Sans"/>
+              </a:rPr>
+              <a:t>Scenario</a:t>
+            </a:r>
+            <a:r>
+              <a:rPr lang="en-US" sz="1200" b="0" i="0" dirty="0">
+                <a:solidFill>
+                  <a:srgbClr val="0A0A0A"/>
+                </a:solidFill>
+                <a:effectLst/>
+                <a:highlight>
+                  <a:srgbClr val="FFFFFF"/>
+                </a:highlight>
+                <a:latin typeface="Google Sans"/>
+              </a:rPr>
+              <a:t>: In a table (</a:t>
+            </a:r>
+            <a:r>
+              <a:rPr lang="en-US" sz="1200" b="0" i="0" dirty="0" err="1">
+                <a:solidFill>
+                  <a:srgbClr val="0A0A0A"/>
+                </a:solidFill>
+                <a:effectLst/>
+                <a:highlight>
+                  <a:srgbClr val="FFFFFF"/>
+                </a:highlight>
+                <a:latin typeface="Google Sans"/>
+              </a:rPr>
+              <a:t>EmployeeID</a:t>
+            </a:r>
+            <a:r>
+              <a:rPr lang="en-US" sz="1200" b="0" i="0" dirty="0">
+                <a:solidFill>
+                  <a:srgbClr val="0A0A0A"/>
+                </a:solidFill>
+                <a:effectLst/>
+                <a:highlight>
+                  <a:srgbClr val="FFFFFF"/>
+                </a:highlight>
+                <a:latin typeface="Google Sans"/>
+              </a:rPr>
+              <a:t>, </a:t>
+            </a:r>
+            <a:r>
+              <a:rPr lang="en-US" sz="1200" b="0" i="0" dirty="0" err="1">
+                <a:solidFill>
+                  <a:srgbClr val="0A0A0A"/>
+                </a:solidFill>
+                <a:effectLst/>
+                <a:highlight>
+                  <a:srgbClr val="FFFFFF"/>
+                </a:highlight>
+                <a:latin typeface="Google Sans"/>
+              </a:rPr>
+              <a:t>ZipCode</a:t>
+            </a:r>
+            <a:r>
+              <a:rPr lang="en-US" sz="1200" b="0" i="0" dirty="0">
+                <a:solidFill>
+                  <a:srgbClr val="0A0A0A"/>
+                </a:solidFill>
+                <a:effectLst/>
+                <a:highlight>
+                  <a:srgbClr val="FFFFFF"/>
+                </a:highlight>
+                <a:latin typeface="Google Sans"/>
+              </a:rPr>
+              <a:t>, City), if City depends on </a:t>
+            </a:r>
+            <a:r>
+              <a:rPr lang="en-US" sz="1200" b="0" i="0" dirty="0" err="1">
+                <a:solidFill>
+                  <a:srgbClr val="0A0A0A"/>
+                </a:solidFill>
+                <a:effectLst/>
+                <a:highlight>
+                  <a:srgbClr val="FFFFFF"/>
+                </a:highlight>
+                <a:latin typeface="Google Sans"/>
+              </a:rPr>
+              <a:t>ZipCode</a:t>
+            </a:r>
+            <a:r>
+              <a:rPr lang="en-US" sz="1200" b="0" i="0" dirty="0">
+                <a:solidFill>
+                  <a:srgbClr val="0A0A0A"/>
+                </a:solidFill>
+                <a:effectLst/>
+                <a:highlight>
+                  <a:srgbClr val="FFFFFF"/>
+                </a:highlight>
+                <a:latin typeface="Google Sans"/>
+              </a:rPr>
+              <a:t> rather than directly on </a:t>
+            </a:r>
+            <a:r>
+              <a:rPr lang="en-US" sz="1200" b="0" i="0" dirty="0" err="1">
+                <a:solidFill>
+                  <a:srgbClr val="0A0A0A"/>
+                </a:solidFill>
+                <a:effectLst/>
+                <a:highlight>
+                  <a:srgbClr val="FFFFFF"/>
+                </a:highlight>
+                <a:latin typeface="Google Sans"/>
+              </a:rPr>
+              <a:t>EmployeeID</a:t>
+            </a:r>
+            <a:r>
+              <a:rPr lang="en-US" sz="1200" b="0" i="0" dirty="0">
+                <a:solidFill>
+                  <a:srgbClr val="0A0A0A"/>
+                </a:solidFill>
+                <a:effectLst/>
+                <a:highlight>
+                  <a:srgbClr val="FFFFFF"/>
+                </a:highlight>
+                <a:latin typeface="Google Sans"/>
+              </a:rPr>
+              <a:t>, it violates 3NF. </a:t>
+            </a:r>
+          </a:p>
+          <a:p>
+            <a:pPr marL="0" indent="0" algn="l">
+              <a:buNone/>
+            </a:pPr>
+            <a:endParaRPr lang="en-US" sz="1200" dirty="0">
+              <a:solidFill>
+                <a:srgbClr val="0A0A0A"/>
+              </a:solidFill>
+              <a:highlight>
+                <a:srgbClr val="FFFFFF"/>
+              </a:highlight>
+              <a:latin typeface="Google Sans"/>
+            </a:endParaRPr>
+          </a:p>
+          <a:p>
+            <a:pPr marL="0" indent="0" algn="l">
+              <a:buNone/>
+            </a:pPr>
+            <a:r>
+              <a:rPr lang="en-US" sz="1200" b="0" i="0" dirty="0">
+                <a:solidFill>
+                  <a:srgbClr val="0A0A0A"/>
+                </a:solidFill>
+                <a:effectLst/>
+                <a:highlight>
+                  <a:srgbClr val="FFFFFF"/>
+                </a:highlight>
+                <a:latin typeface="Google Sans"/>
+              </a:rPr>
+              <a:t>1NF: Data is in a tabular format.</a:t>
+            </a:r>
+          </a:p>
+          <a:p>
+            <a:pPr marL="0" indent="0" algn="l">
+              <a:buNone/>
+            </a:pPr>
+            <a:r>
+              <a:rPr lang="en-US" sz="1200" b="0" i="0" dirty="0">
+                <a:solidFill>
+                  <a:srgbClr val="0A0A0A"/>
+                </a:solidFill>
+                <a:effectLst/>
+                <a:highlight>
+                  <a:srgbClr val="FFFFFF"/>
+                </a:highlight>
+                <a:latin typeface="Google Sans"/>
+              </a:rPr>
+              <a:t>2NF: 1NF + Non-key columns depend on the whole primary key.</a:t>
+            </a:r>
+          </a:p>
+          <a:p>
+            <a:pPr marL="0" indent="0" algn="l">
+              <a:buNone/>
+            </a:pPr>
+            <a:r>
+              <a:rPr lang="en-US" sz="1200" b="0" i="0" dirty="0">
+                <a:solidFill>
+                  <a:srgbClr val="0A0A0A"/>
+                </a:solidFill>
+                <a:effectLst/>
+                <a:highlight>
+                  <a:srgbClr val="FFFFFF"/>
+                </a:highlight>
+                <a:latin typeface="Google Sans"/>
+              </a:rPr>
+              <a:t>3NF: 2NF + Non-key columns depend only on the primary key</a:t>
+            </a:r>
+          </a:p>
+          <a:p>
+            <a:pPr marL="0" indent="0" algn="l">
+              <a:buNone/>
+            </a:pPr>
+            <a:endParaRPr lang="en-US" sz="1200" b="0" i="0" dirty="0">
+              <a:solidFill>
+                <a:srgbClr val="0A0A0A"/>
+              </a:solidFill>
+              <a:effectLst/>
+              <a:highlight>
+                <a:srgbClr val="FFFFFF"/>
+              </a:highlight>
+              <a:latin typeface="Google Sans"/>
+            </a:endParaRPr>
+          </a:p>
+          <a:p>
+            <a:pPr marL="0" indent="0" algn="l">
+              <a:buNone/>
+            </a:pPr>
+            <a:endParaRPr lang="en-US" sz="1100" b="0" i="0" dirty="0">
+              <a:solidFill>
+                <a:srgbClr val="0A0A0A"/>
+              </a:solidFill>
+              <a:effectLst/>
+              <a:highlight>
+                <a:srgbClr val="FFFFFF"/>
+              </a:highlight>
+              <a:latin typeface="Google Sans"/>
+            </a:endParaRPr>
           </a:p>
         </p:txBody>
       </p:sp>
@@ -6588,7 +11506,7 @@
 </p:sld>
 </file>
 
-<file path=ppt/slides/slide4.xml><?xml version="1.0" encoding="utf-8"?>
+<file path=ppt/slides/slide5.xml><?xml version="1.0" encoding="utf-8"?>
 <p:sld xmlns:a="http://schemas.openxmlformats.org/drawingml/2006/main" xmlns:r="http://schemas.openxmlformats.org/officeDocument/2006/relationships" xmlns:p="http://schemas.openxmlformats.org/presentationml/2006/main">
   <p:cSld>
     <p:spTree>
@@ -7151,7 +12069,7 @@
 </p:sld>
 </file>
 
-<file path=ppt/slides/slide5.xml><?xml version="1.0" encoding="utf-8"?>
+<file path=ppt/slides/slide6.xml><?xml version="1.0" encoding="utf-8"?>
 <p:sld xmlns:a="http://schemas.openxmlformats.org/drawingml/2006/main" xmlns:r="http://schemas.openxmlformats.org/officeDocument/2006/relationships" xmlns:p="http://schemas.openxmlformats.org/presentationml/2006/main">
   <p:cSld>
     <p:spTree>
@@ -8393,7 +13311,7 @@
 </p:sld>
 </file>
 
-<file path=ppt/slides/slide6.xml><?xml version="1.0" encoding="utf-8"?>
+<file path=ppt/slides/slide7.xml><?xml version="1.0" encoding="utf-8"?>
 <p:sld xmlns:a="http://schemas.openxmlformats.org/drawingml/2006/main" xmlns:r="http://schemas.openxmlformats.org/officeDocument/2006/relationships" xmlns:p="http://schemas.openxmlformats.org/presentationml/2006/main">
   <p:cSld>
     <p:spTree>
@@ -8672,7 +13590,7 @@
 </p:sld>
 </file>
 
-<file path=ppt/slides/slide7.xml><?xml version="1.0" encoding="utf-8"?>
+<file path=ppt/slides/slide8.xml><?xml version="1.0" encoding="utf-8"?>
 <p:sld xmlns:a="http://schemas.openxmlformats.org/drawingml/2006/main" xmlns:r="http://schemas.openxmlformats.org/officeDocument/2006/relationships" xmlns:p="http://schemas.openxmlformats.org/presentationml/2006/main">
   <p:cSld>
     <p:spTree>
@@ -9218,7 +14136,7 @@
 </p:sld>
 </file>
 
-<file path=ppt/slides/slide8.xml><?xml version="1.0" encoding="utf-8"?>
+<file path=ppt/slides/slide9.xml><?xml version="1.0" encoding="utf-8"?>
 <p:sld xmlns:a="http://schemas.openxmlformats.org/drawingml/2006/main" xmlns:r="http://schemas.openxmlformats.org/officeDocument/2006/relationships" xmlns:p="http://schemas.openxmlformats.org/presentationml/2006/main">
   <p:cSld>
     <p:spTree>
@@ -9587,539 +14505,6 @@
     <p:extLst>
       <p:ext uri="{BB962C8B-B14F-4D97-AF65-F5344CB8AC3E}">
         <p14:creationId xmlns:p14="http://schemas.microsoft.com/office/powerpoint/2010/main" val="2148705449"/>
-      </p:ext>
-    </p:extLst>
-  </p:cSld>
-  <p:clrMapOvr>
-    <a:masterClrMapping/>
-  </p:clrMapOvr>
-</p:sld>
-</file>
-
-<file path=ppt/slides/slide9.xml><?xml version="1.0" encoding="utf-8"?>
-<p:sld xmlns:a="http://schemas.openxmlformats.org/drawingml/2006/main" xmlns:r="http://schemas.openxmlformats.org/officeDocument/2006/relationships" xmlns:p="http://schemas.openxmlformats.org/presentationml/2006/main">
-  <p:cSld>
-    <p:spTree>
-      <p:nvGrpSpPr>
-        <p:cNvPr id="1" name="">
-          <a:extLst>
-            <a:ext uri="{FF2B5EF4-FFF2-40B4-BE49-F238E27FC236}">
-              <a16:creationId xmlns:a16="http://schemas.microsoft.com/office/drawing/2014/main" id="{D3532CFE-8F0F-4545-01E0-ACDDE288D17C}"/>
-            </a:ext>
-          </a:extLst>
-        </p:cNvPr>
-        <p:cNvGrpSpPr/>
-        <p:nvPr/>
-      </p:nvGrpSpPr>
-      <p:grpSpPr>
-        <a:xfrm>
-          <a:off x="0" y="0"/>
-          <a:ext cx="0" cy="0"/>
-          <a:chOff x="0" y="0"/>
-          <a:chExt cx="0" cy="0"/>
-        </a:xfrm>
-      </p:grpSpPr>
-      <p:pic>
-        <p:nvPicPr>
-          <p:cNvPr id="9" name="Content Placeholder 8" descr="A screenshot of a graph&#10;&#10;Description automatically generated">
-            <a:extLst>
-              <a:ext uri="{FF2B5EF4-FFF2-40B4-BE49-F238E27FC236}">
-                <a16:creationId xmlns:a16="http://schemas.microsoft.com/office/drawing/2014/main" id="{609C0DA7-2AFC-2805-ABA1-C5E206B2B266}"/>
-              </a:ext>
-            </a:extLst>
-          </p:cNvPr>
-          <p:cNvPicPr>
-            <a:picLocks noGrp="1" noChangeAspect="1"/>
-          </p:cNvPicPr>
-          <p:nvPr>
-            <p:ph idx="1"/>
-          </p:nvPr>
-        </p:nvPicPr>
-        <p:blipFill>
-          <a:blip r:embed="rId3"/>
-          <a:stretch>
-            <a:fillRect/>
-          </a:stretch>
-        </p:blipFill>
-        <p:spPr>
-          <a:xfrm>
-            <a:off x="0" y="1026189"/>
-            <a:ext cx="7705003" cy="3023482"/>
-          </a:xfrm>
-        </p:spPr>
-      </p:pic>
-      <p:sp>
-        <p:nvSpPr>
-          <p:cNvPr id="5" name="Title 4">
-            <a:extLst>
-              <a:ext uri="{FF2B5EF4-FFF2-40B4-BE49-F238E27FC236}">
-                <a16:creationId xmlns:a16="http://schemas.microsoft.com/office/drawing/2014/main" id="{5CFBCEA6-8A21-82CC-B7B2-06FAFD71BEFC}"/>
-              </a:ext>
-            </a:extLst>
-          </p:cNvPr>
-          <p:cNvSpPr>
-            <a:spLocks noGrp="1"/>
-          </p:cNvSpPr>
-          <p:nvPr>
-            <p:ph type="title"/>
-          </p:nvPr>
-        </p:nvSpPr>
-        <p:spPr>
-          <a:xfrm>
-            <a:off x="0" y="95395"/>
-            <a:ext cx="10515600" cy="1325563"/>
-          </a:xfrm>
-        </p:spPr>
-        <p:txBody>
-          <a:bodyPr>
-            <a:normAutofit/>
-          </a:bodyPr>
-          <a:lstStyle/>
-          <a:p>
-            <a:r>
-              <a:rPr lang="de-DE" sz="4000" dirty="0"/>
-              <a:t>Lieferantendaten </a:t>
-            </a:r>
-          </a:p>
-        </p:txBody>
-      </p:sp>
-      <p:sp>
-        <p:nvSpPr>
-          <p:cNvPr id="12" name="Rectangle 11">
-            <a:extLst>
-              <a:ext uri="{FF2B5EF4-FFF2-40B4-BE49-F238E27FC236}">
-                <a16:creationId xmlns:a16="http://schemas.microsoft.com/office/drawing/2014/main" id="{A6CB4A9D-C657-4AC0-5AA9-EB5475A5E947}"/>
-              </a:ext>
-            </a:extLst>
-          </p:cNvPr>
-          <p:cNvSpPr/>
-          <p:nvPr/>
-        </p:nvSpPr>
-        <p:spPr>
-          <a:xfrm>
-            <a:off x="231244" y="1651518"/>
-            <a:ext cx="7373206" cy="298579"/>
-          </a:xfrm>
-          <a:prstGeom prst="rect">
-            <a:avLst/>
-          </a:prstGeom>
-          <a:noFill/>
-          <a:ln w="28575">
-            <a:solidFill>
-              <a:srgbClr val="00B050"/>
-            </a:solidFill>
-          </a:ln>
-        </p:spPr>
-        <p:style>
-          <a:lnRef idx="2">
-            <a:schemeClr val="accent1">
-              <a:shade val="15000"/>
-            </a:schemeClr>
-          </a:lnRef>
-          <a:fillRef idx="1">
-            <a:schemeClr val="accent1"/>
-          </a:fillRef>
-          <a:effectRef idx="0">
-            <a:schemeClr val="accent1"/>
-          </a:effectRef>
-          <a:fontRef idx="minor">
-            <a:schemeClr val="lt1"/>
-          </a:fontRef>
-        </p:style>
-        <p:txBody>
-          <a:bodyPr rtlCol="0" anchor="ctr"/>
-          <a:lstStyle/>
-          <a:p>
-            <a:pPr algn="ctr"/>
-            <a:endParaRPr lang="de-DE">
-              <a:solidFill>
-                <a:srgbClr val="00B050"/>
-              </a:solidFill>
-            </a:endParaRPr>
-          </a:p>
-        </p:txBody>
-      </p:sp>
-      <p:cxnSp>
-        <p:nvCxnSpPr>
-          <p:cNvPr id="14" name="Straight Arrow Connector 13">
-            <a:extLst>
-              <a:ext uri="{FF2B5EF4-FFF2-40B4-BE49-F238E27FC236}">
-                <a16:creationId xmlns:a16="http://schemas.microsoft.com/office/drawing/2014/main" id="{A8DB8931-B0F0-97B1-B7E4-0E74FA95943C}"/>
-              </a:ext>
-            </a:extLst>
-          </p:cNvPr>
-          <p:cNvCxnSpPr>
-            <a:cxnSpLocks/>
-            <a:stCxn id="12" idx="3"/>
-          </p:cNvCxnSpPr>
-          <p:nvPr/>
-        </p:nvCxnSpPr>
-        <p:spPr>
-          <a:xfrm>
-            <a:off x="7604450" y="1800808"/>
-            <a:ext cx="331796" cy="0"/>
-          </a:xfrm>
-          <a:prstGeom prst="straightConnector1">
-            <a:avLst/>
-          </a:prstGeom>
-          <a:ln w="28575">
-            <a:solidFill>
-              <a:srgbClr val="00B050"/>
-            </a:solidFill>
-            <a:tailEnd type="triangle"/>
-          </a:ln>
-        </p:spPr>
-        <p:style>
-          <a:lnRef idx="2">
-            <a:schemeClr val="accent1"/>
-          </a:lnRef>
-          <a:fillRef idx="0">
-            <a:schemeClr val="accent1"/>
-          </a:fillRef>
-          <a:effectRef idx="1">
-            <a:schemeClr val="accent1"/>
-          </a:effectRef>
-          <a:fontRef idx="minor">
-            <a:schemeClr val="tx1"/>
-          </a:fontRef>
-        </p:style>
-      </p:cxnSp>
-      <p:sp>
-        <p:nvSpPr>
-          <p:cNvPr id="19" name="TextBox 18">
-            <a:extLst>
-              <a:ext uri="{FF2B5EF4-FFF2-40B4-BE49-F238E27FC236}">
-                <a16:creationId xmlns:a16="http://schemas.microsoft.com/office/drawing/2014/main" id="{73587B3B-0880-FEC3-5A80-45D5D187FC2C}"/>
-              </a:ext>
-            </a:extLst>
-          </p:cNvPr>
-          <p:cNvSpPr txBox="1"/>
-          <p:nvPr/>
-        </p:nvSpPr>
-        <p:spPr>
-          <a:xfrm>
-            <a:off x="7936246" y="1395700"/>
-            <a:ext cx="4024512" cy="1938992"/>
-          </a:xfrm>
-          <a:prstGeom prst="rect">
-            <a:avLst/>
-          </a:prstGeom>
-          <a:noFill/>
-        </p:spPr>
-        <p:txBody>
-          <a:bodyPr wrap="square" rtlCol="0">
-            <a:spAutoFit/>
-          </a:bodyPr>
-          <a:lstStyle/>
-          <a:p>
-            <a:r>
-              <a:rPr lang="de-DE" sz="1500" dirty="0"/>
-              <a:t>Eindeutige </a:t>
-            </a:r>
-            <a:r>
-              <a:rPr lang="de-DE" sz="1500" dirty="0" err="1"/>
-              <a:t>Lieferant_ID</a:t>
-            </a:r>
-            <a:r>
-              <a:rPr lang="de-DE" sz="1500" dirty="0"/>
-              <a:t>: 22 / 22 Zeilen → keine Duplikate</a:t>
-            </a:r>
-          </a:p>
-          <a:p>
-            <a:br>
-              <a:rPr lang="de-DE" dirty="0"/>
-            </a:br>
-            <a:r>
-              <a:rPr lang="de-DE" sz="1800" dirty="0"/>
-              <a:t>→</a:t>
-            </a:r>
-            <a:r>
-              <a:rPr lang="de-DE" dirty="0"/>
-              <a:t> </a:t>
-            </a:r>
-            <a:r>
-              <a:rPr lang="de-DE" sz="1800" b="1" dirty="0" err="1"/>
-              <a:t>Lieferant_ID</a:t>
-            </a:r>
-            <a:r>
-              <a:rPr lang="de-DE" b="1" dirty="0"/>
-              <a:t> </a:t>
-            </a:r>
-            <a:r>
-              <a:rPr lang="de-DE" dirty="0"/>
-              <a:t>= eindeutiger Primärschlüssel (</a:t>
-            </a:r>
-            <a:r>
-              <a:rPr lang="de-DE" b="1" dirty="0"/>
-              <a:t>PK</a:t>
-            </a:r>
-            <a:r>
-              <a:rPr lang="de-DE" dirty="0"/>
-              <a:t>) der </a:t>
-            </a:r>
-            <a:r>
-              <a:rPr lang="de-DE" dirty="0" err="1"/>
-              <a:t>Liferantendaten</a:t>
-            </a:r>
-            <a:r>
-              <a:rPr lang="de-DE" dirty="0"/>
-              <a:t> Tabelle</a:t>
-            </a:r>
-          </a:p>
-          <a:p>
-            <a:endParaRPr lang="de-DE" dirty="0"/>
-          </a:p>
-        </p:txBody>
-      </p:sp>
-      <p:sp>
-        <p:nvSpPr>
-          <p:cNvPr id="23" name="TextBox 22">
-            <a:extLst>
-              <a:ext uri="{FF2B5EF4-FFF2-40B4-BE49-F238E27FC236}">
-                <a16:creationId xmlns:a16="http://schemas.microsoft.com/office/drawing/2014/main" id="{A7101C3C-9904-E285-95A6-4E664D4331FA}"/>
-              </a:ext>
-            </a:extLst>
-          </p:cNvPr>
-          <p:cNvSpPr txBox="1"/>
-          <p:nvPr/>
-        </p:nvSpPr>
-        <p:spPr>
-          <a:xfrm>
-            <a:off x="231244" y="4280231"/>
-            <a:ext cx="11058797" cy="830997"/>
-          </a:xfrm>
-          <a:prstGeom prst="rect">
-            <a:avLst/>
-          </a:prstGeom>
-          <a:noFill/>
-          <a:ln>
-            <a:solidFill>
-              <a:schemeClr val="accent6">
-                <a:lumMod val="20000"/>
-                <a:lumOff val="80000"/>
-              </a:schemeClr>
-            </a:solidFill>
-          </a:ln>
-        </p:spPr>
-        <p:txBody>
-          <a:bodyPr wrap="square" rtlCol="0">
-            <a:spAutoFit/>
-          </a:bodyPr>
-          <a:lstStyle/>
-          <a:p>
-            <a:r>
-              <a:rPr lang="de-DE" sz="1200" b="0" i="0" dirty="0">
-                <a:solidFill>
-                  <a:srgbClr val="0A0A0A"/>
-                </a:solidFill>
-                <a:effectLst/>
-                <a:highlight>
-                  <a:srgbClr val="FFFFFF"/>
-                </a:highlight>
-                <a:latin typeface="Google Sans"/>
-              </a:rPr>
-              <a:t>⚠️ </a:t>
-            </a:r>
-            <a:r>
-              <a:rPr lang="de-DE" sz="1200" b="1" dirty="0"/>
-              <a:t>1NF: </a:t>
-            </a:r>
-            <a:r>
-              <a:rPr lang="de-DE" sz="1200" dirty="0"/>
-              <a:t>Adresse in Lieferantendaten speichert Straße, Hausnummer, Postleitzahl und Stadt in einem einzigen Feld. Empfehlung: In separate Attribute aufteilen — </a:t>
-            </a:r>
-            <a:r>
-              <a:rPr lang="de-DE" sz="1200" dirty="0" err="1"/>
-              <a:t>Strasse</a:t>
-            </a:r>
-            <a:r>
-              <a:rPr lang="de-DE" sz="1200" dirty="0"/>
-              <a:t>, Hausnummer, PLZ, Stadt — um gezielte Abfragen und Validierungen zu ermöglichen, z.B. Prüfung ob PLZ zum angegebenen Ort gehört.</a:t>
-            </a:r>
-          </a:p>
-          <a:p>
-            <a:r>
-              <a:rPr lang="de-DE" sz="1200" b="1" dirty="0">
-                <a:sym typeface="Wingdings" pitchFamily="2" charset="2"/>
-              </a:rPr>
-              <a:t> </a:t>
-            </a:r>
-            <a:r>
-              <a:rPr lang="de-DE" sz="1200" i="1" dirty="0"/>
-              <a:t>"Kein formaler 1NF-Verstoß, aber fehlende </a:t>
-            </a:r>
-            <a:r>
-              <a:rPr lang="de-DE" sz="1200" i="1" dirty="0" err="1"/>
-              <a:t>Atomarität</a:t>
-            </a:r>
-            <a:r>
-              <a:rPr lang="de-DE" sz="1200" i="1" dirty="0"/>
-              <a:t> verhindert Validierung und gezielte Auswertung."</a:t>
-            </a:r>
-            <a:endParaRPr lang="de-DE" sz="1200" dirty="0"/>
-          </a:p>
-          <a:p>
-            <a:endParaRPr lang="de-DE" sz="1200" b="1" dirty="0"/>
-          </a:p>
-        </p:txBody>
-      </p:sp>
-      <p:sp>
-        <p:nvSpPr>
-          <p:cNvPr id="24" name="TextBox 23">
-            <a:extLst>
-              <a:ext uri="{FF2B5EF4-FFF2-40B4-BE49-F238E27FC236}">
-                <a16:creationId xmlns:a16="http://schemas.microsoft.com/office/drawing/2014/main" id="{E3B472E4-6D38-4536-A5D7-BD660D4E4CEF}"/>
-              </a:ext>
-            </a:extLst>
-          </p:cNvPr>
-          <p:cNvSpPr txBox="1"/>
-          <p:nvPr/>
-        </p:nvSpPr>
-        <p:spPr>
-          <a:xfrm>
-            <a:off x="231244" y="5203288"/>
-            <a:ext cx="4710169" cy="276999"/>
-          </a:xfrm>
-          <a:prstGeom prst="rect">
-            <a:avLst/>
-          </a:prstGeom>
-          <a:noFill/>
-          <a:ln>
-            <a:solidFill>
-              <a:schemeClr val="accent6">
-                <a:lumMod val="20000"/>
-                <a:lumOff val="80000"/>
-              </a:schemeClr>
-            </a:solidFill>
-          </a:ln>
-        </p:spPr>
-        <p:txBody>
-          <a:bodyPr wrap="square" rtlCol="0">
-            <a:spAutoFit/>
-          </a:bodyPr>
-          <a:lstStyle/>
-          <a:p>
-            <a:r>
-              <a:rPr lang="de-DE" sz="1200" dirty="0"/>
-              <a:t>✅</a:t>
-            </a:r>
-            <a:r>
-              <a:rPr lang="de-DE" sz="1200" b="0" i="0" dirty="0">
-                <a:solidFill>
-                  <a:srgbClr val="0A0A0A"/>
-                </a:solidFill>
-                <a:effectLst/>
-                <a:highlight>
-                  <a:srgbClr val="FFFFFF"/>
-                </a:highlight>
-                <a:latin typeface="Google Sans"/>
-              </a:rPr>
-              <a:t> </a:t>
-            </a:r>
-            <a:r>
-              <a:rPr lang="de-DE" sz="1200" b="1" i="0" dirty="0">
-                <a:solidFill>
-                  <a:srgbClr val="0A0A0A"/>
-                </a:solidFill>
-                <a:effectLst/>
-                <a:highlight>
-                  <a:srgbClr val="FFFFFF"/>
-                </a:highlight>
-                <a:latin typeface="Google Sans"/>
-              </a:rPr>
-              <a:t>2</a:t>
-            </a:r>
-            <a:r>
-              <a:rPr lang="de-DE" sz="1200" b="1" dirty="0"/>
-              <a:t>NF </a:t>
-            </a:r>
-            <a:r>
-              <a:rPr lang="de-DE" sz="1200" dirty="0"/>
-              <a:t>(vorausgesetzt, die 1. Normalform ist erfüllt)</a:t>
-            </a:r>
-          </a:p>
-        </p:txBody>
-      </p:sp>
-      <p:sp>
-        <p:nvSpPr>
-          <p:cNvPr id="25" name="TextBox 24">
-            <a:extLst>
-              <a:ext uri="{FF2B5EF4-FFF2-40B4-BE49-F238E27FC236}">
-                <a16:creationId xmlns:a16="http://schemas.microsoft.com/office/drawing/2014/main" id="{4AA7640E-3A45-94F1-1EE8-E041C9407418}"/>
-              </a:ext>
-            </a:extLst>
-          </p:cNvPr>
-          <p:cNvSpPr txBox="1"/>
-          <p:nvPr/>
-        </p:nvSpPr>
-        <p:spPr>
-          <a:xfrm>
-            <a:off x="231244" y="5572347"/>
-            <a:ext cx="4710169" cy="276999"/>
-          </a:xfrm>
-          <a:prstGeom prst="rect">
-            <a:avLst/>
-          </a:prstGeom>
-          <a:noFill/>
-          <a:ln>
-            <a:solidFill>
-              <a:schemeClr val="accent6">
-                <a:lumMod val="20000"/>
-                <a:lumOff val="80000"/>
-              </a:schemeClr>
-            </a:solidFill>
-          </a:ln>
-        </p:spPr>
-        <p:txBody>
-          <a:bodyPr wrap="square" rtlCol="0">
-            <a:spAutoFit/>
-          </a:bodyPr>
-          <a:lstStyle/>
-          <a:p>
-            <a:r>
-              <a:rPr lang="de-DE" sz="1200" dirty="0"/>
-              <a:t>✅</a:t>
-            </a:r>
-            <a:r>
-              <a:rPr lang="de-DE" sz="1200" b="0" i="0" dirty="0">
-                <a:solidFill>
-                  <a:srgbClr val="0A0A0A"/>
-                </a:solidFill>
-                <a:effectLst/>
-                <a:highlight>
-                  <a:srgbClr val="FFFFFF"/>
-                </a:highlight>
-                <a:latin typeface="Google Sans"/>
-              </a:rPr>
-              <a:t> </a:t>
-            </a:r>
-            <a:r>
-              <a:rPr lang="de-DE" sz="1200" b="1" dirty="0">
-                <a:solidFill>
-                  <a:srgbClr val="0A0A0A"/>
-                </a:solidFill>
-                <a:highlight>
-                  <a:srgbClr val="FFFFFF"/>
-                </a:highlight>
-                <a:latin typeface="Google Sans"/>
-              </a:rPr>
-              <a:t>3</a:t>
-            </a:r>
-            <a:r>
-              <a:rPr lang="de-DE" sz="1200" b="1" dirty="0"/>
-              <a:t>NF </a:t>
-            </a:r>
-            <a:r>
-              <a:rPr lang="de-DE" sz="1200" dirty="0"/>
-              <a:t>(vorausgesetzt, die 1. Normalform ist erfüllt)</a:t>
-            </a:r>
-          </a:p>
-        </p:txBody>
-      </p:sp>
-    </p:spTree>
-    <p:extLst>
-      <p:ext uri="{BB962C8B-B14F-4D97-AF65-F5344CB8AC3E}">
-        <p14:creationId xmlns:p14="http://schemas.microsoft.com/office/powerpoint/2010/main" val="789515391"/>
       </p:ext>
     </p:extLst>
   </p:cSld>

--- a/dm_presentation.pptx
+++ b/dm_presentation.pptx
@@ -5,7 +5,7 @@
     <p:sldMasterId id="2147483672" r:id="rId1"/>
   </p:sldMasterIdLst>
   <p:notesMasterIdLst>
-    <p:notesMasterId r:id="rId14"/>
+    <p:notesMasterId r:id="rId15"/>
   </p:notesMasterIdLst>
   <p:sldIdLst>
     <p:sldId id="256" r:id="rId2"/>
@@ -20,6 +20,7 @@
     <p:sldId id="264" r:id="rId11"/>
     <p:sldId id="259" r:id="rId12"/>
     <p:sldId id="265" r:id="rId13"/>
+    <p:sldId id="269" r:id="rId14"/>
   </p:sldIdLst>
   <p:sldSz cx="12192000" cy="6858000"/>
   <p:notesSz cx="6858000" cy="9144000"/>
@@ -129,7 +130,7 @@
 <file path=ppt/revisionInfo.xml><?xml version="1.0" encoding="utf-8"?>
 <p1510:revInfo xmlns:a="http://schemas.openxmlformats.org/drawingml/2006/main" xmlns:r="http://schemas.openxmlformats.org/officeDocument/2006/relationships" xmlns:p1510="http://schemas.microsoft.com/office/powerpoint/2015/10/main">
   <p1510:revLst>
-    <p1510:client id="{3BA904CF-6BC9-C143-B607-88BD5D704F2D}" v="72" dt="2026-04-10T07:39:15.083"/>
+    <p1510:client id="{3BA904CF-6BC9-C143-B607-88BD5D704F2D}" v="74" dt="2026-04-10T20:04:47.372"/>
   </p1510:revLst>
 </p1510:revInfo>
 </file>
@@ -139,7 +140,7 @@
   <pc:docChgLst>
     <pc:chgData name="Anna Sommani" userId="dfc5161e61809c7d" providerId="LiveId" clId="{3BA904CF-6BC9-C143-B607-88BD5D704F2D}"/>
     <pc:docChg chg="undo redo custSel addSld delSld modSld sldOrd modMainMaster">
-      <pc:chgData name="Anna Sommani" userId="dfc5161e61809c7d" providerId="LiveId" clId="{3BA904CF-6BC9-C143-B607-88BD5D704F2D}" dt="2026-04-10T08:51:25.039" v="3962" actId="478"/>
+      <pc:chgData name="Anna Sommani" userId="dfc5161e61809c7d" providerId="LiveId" clId="{3BA904CF-6BC9-C143-B607-88BD5D704F2D}" dt="2026-04-10T20:05:50.223" v="3981" actId="1076"/>
       <pc:docMkLst>
         <pc:docMk/>
       </pc:docMkLst>
@@ -1065,6 +1066,45 @@
           </ac:spMkLst>
         </pc:spChg>
       </pc:sldChg>
+      <pc:sldChg chg="addSp delSp modSp new mod">
+        <pc:chgData name="Anna Sommani" userId="dfc5161e61809c7d" providerId="LiveId" clId="{3BA904CF-6BC9-C143-B607-88BD5D704F2D}" dt="2026-04-10T20:05:50.223" v="3981" actId="1076"/>
+        <pc:sldMkLst>
+          <pc:docMk/>
+          <pc:sldMk cId="325043020" sldId="269"/>
+        </pc:sldMkLst>
+        <pc:spChg chg="del">
+          <ac:chgData name="Anna Sommani" userId="dfc5161e61809c7d" providerId="LiveId" clId="{3BA904CF-6BC9-C143-B607-88BD5D704F2D}" dt="2026-04-10T20:04:08.433" v="3965" actId="478"/>
+          <ac:spMkLst>
+            <pc:docMk/>
+            <pc:sldMk cId="325043020" sldId="269"/>
+            <ac:spMk id="2" creationId="{ABF63CD8-1C3C-9935-A0FB-A53090BF7FAC}"/>
+          </ac:spMkLst>
+        </pc:spChg>
+        <pc:spChg chg="del">
+          <ac:chgData name="Anna Sommani" userId="dfc5161e61809c7d" providerId="LiveId" clId="{3BA904CF-6BC9-C143-B607-88BD5D704F2D}" dt="2026-04-10T20:04:05.683" v="3964" actId="478"/>
+          <ac:spMkLst>
+            <pc:docMk/>
+            <pc:sldMk cId="325043020" sldId="269"/>
+            <ac:spMk id="3" creationId="{8BE63208-7440-7458-B0CF-A3A7CFFA16AA}"/>
+          </ac:spMkLst>
+        </pc:spChg>
+        <pc:spChg chg="add del mod">
+          <ac:chgData name="Anna Sommani" userId="dfc5161e61809c7d" providerId="LiveId" clId="{3BA904CF-6BC9-C143-B607-88BD5D704F2D}" dt="2026-04-10T20:04:59.621" v="3978"/>
+          <ac:spMkLst>
+            <pc:docMk/>
+            <pc:sldMk cId="325043020" sldId="269"/>
+            <ac:spMk id="6" creationId="{08517A8B-8825-6EA6-ECFD-3AE03396CE58}"/>
+          </ac:spMkLst>
+        </pc:spChg>
+        <pc:picChg chg="add mod modCrop">
+          <ac:chgData name="Anna Sommani" userId="dfc5161e61809c7d" providerId="LiveId" clId="{3BA904CF-6BC9-C143-B607-88BD5D704F2D}" dt="2026-04-10T20:05:50.223" v="3981" actId="1076"/>
+          <ac:picMkLst>
+            <pc:docMk/>
+            <pc:sldMk cId="325043020" sldId="269"/>
+            <ac:picMk id="5" creationId="{7CF2B303-5224-1F30-F8C3-806A37BB84D3}"/>
+          </ac:picMkLst>
+        </pc:picChg>
+      </pc:sldChg>
       <pc:sldMasterChg chg="modSldLayout">
         <pc:chgData name="Anna Sommani" userId="dfc5161e61809c7d" providerId="LiveId" clId="{3BA904CF-6BC9-C143-B607-88BD5D704F2D}" dt="2026-04-07T11:13:59.424" v="67" actId="16037"/>
         <pc:sldMasterMkLst>
@@ -10227,6 +10267,65 @@
     <p:extLst>
       <p:ext uri="{BB962C8B-B14F-4D97-AF65-F5344CB8AC3E}">
         <p14:creationId xmlns:p14="http://schemas.microsoft.com/office/powerpoint/2010/main" val="3924958371"/>
+      </p:ext>
+    </p:extLst>
+  </p:cSld>
+  <p:clrMapOvr>
+    <a:masterClrMapping/>
+  </p:clrMapOvr>
+</p:sld>
+</file>
+
+<file path=ppt/slides/slide13.xml><?xml version="1.0" encoding="utf-8"?>
+<p:sld xmlns:a="http://schemas.openxmlformats.org/drawingml/2006/main" xmlns:r="http://schemas.openxmlformats.org/officeDocument/2006/relationships" xmlns:p="http://schemas.openxmlformats.org/presentationml/2006/main">
+  <p:cSld>
+    <p:spTree>
+      <p:nvGrpSpPr>
+        <p:cNvPr id="1" name=""/>
+        <p:cNvGrpSpPr/>
+        <p:nvPr/>
+      </p:nvGrpSpPr>
+      <p:grpSpPr>
+        <a:xfrm>
+          <a:off x="0" y="0"/>
+          <a:ext cx="0" cy="0"/>
+          <a:chOff x="0" y="0"/>
+          <a:chExt cx="0" cy="0"/>
+        </a:xfrm>
+      </p:grpSpPr>
+      <p:pic>
+        <p:nvPicPr>
+          <p:cNvPr id="5" name="Picture 4" descr="A screenshot of a graph&#10;&#10;Description automatically generated">
+            <a:extLst>
+              <a:ext uri="{FF2B5EF4-FFF2-40B4-BE49-F238E27FC236}">
+                <a16:creationId xmlns:a16="http://schemas.microsoft.com/office/drawing/2014/main" id="{7CF2B303-5224-1F30-F8C3-806A37BB84D3}"/>
+              </a:ext>
+            </a:extLst>
+          </p:cNvPr>
+          <p:cNvPicPr>
+            <a:picLocks noChangeAspect="1"/>
+          </p:cNvPicPr>
+          <p:nvPr/>
+        </p:nvPicPr>
+        <p:blipFill rotWithShape="1">
+          <a:blip r:embed="rId2"/>
+          <a:srcRect r="20056" b="6045"/>
+          <a:stretch/>
+        </p:blipFill>
+        <p:spPr>
+          <a:xfrm>
+            <a:off x="1285748" y="0"/>
+            <a:ext cx="9153442" cy="6858000"/>
+          </a:xfrm>
+          <a:prstGeom prst="rect">
+            <a:avLst/>
+          </a:prstGeom>
+        </p:spPr>
+      </p:pic>
+    </p:spTree>
+    <p:extLst>
+      <p:ext uri="{BB962C8B-B14F-4D97-AF65-F5344CB8AC3E}">
+        <p14:creationId xmlns:p14="http://schemas.microsoft.com/office/powerpoint/2010/main" val="325043020"/>
       </p:ext>
     </p:extLst>
   </p:cSld>
